--- a/jsp/jsp_ppt/1장. 웹개발 환경 구축 및 JSP.pptx
+++ b/jsp/jsp_ppt/1장. 웹개발 환경 구축 및 JSP.pptx
@@ -244,7 +244,7 @@
           <a:p>
             <a:fld id="{7665CDAC-D627-4E87-877A-1B781DD4CADC}" type="datetimeFigureOut">
               <a:rPr lang="ko-KR" altLang="en-US" smtClean="0"/>
-              <a:t>2025-10-02</a:t>
+              <a:t>2026-08-12</a:t>
             </a:fld>
             <a:endParaRPr lang="ko-KR" altLang="en-US"/>
           </a:p>
@@ -308,38 +308,37 @@
           <a:p>
             <a:pPr lvl="0"/>
             <a:r>
-              <a:rPr lang="ko-KR" altLang="en-US" smtClean="0"/>
+              <a:rPr lang="ko-KR" altLang="en-US"/>
               <a:t>마스터 텍스트 스타일을 편집합니다</a:t>
             </a:r>
           </a:p>
           <a:p>
             <a:pPr lvl="1"/>
             <a:r>
-              <a:rPr lang="ko-KR" altLang="en-US" smtClean="0"/>
+              <a:rPr lang="ko-KR" altLang="en-US"/>
               <a:t>둘째 수준</a:t>
             </a:r>
           </a:p>
           <a:p>
             <a:pPr lvl="2"/>
             <a:r>
-              <a:rPr lang="ko-KR" altLang="en-US" smtClean="0"/>
+              <a:rPr lang="ko-KR" altLang="en-US"/>
               <a:t>셋째 수준</a:t>
             </a:r>
           </a:p>
           <a:p>
             <a:pPr lvl="3"/>
             <a:r>
-              <a:rPr lang="ko-KR" altLang="en-US" smtClean="0"/>
+              <a:rPr lang="ko-KR" altLang="en-US"/>
               <a:t>넷째 수준</a:t>
             </a:r>
           </a:p>
           <a:p>
             <a:pPr lvl="4"/>
             <a:r>
-              <a:rPr lang="ko-KR" altLang="en-US" smtClean="0"/>
+              <a:rPr lang="ko-KR" altLang="en-US"/>
               <a:t>다섯째 수준</a:t>
             </a:r>
-            <a:endParaRPr lang="ko-KR" altLang="en-US"/>
           </a:p>
         </p:txBody>
       </p:sp>
@@ -970,10 +969,9 @@
           <a:lstStyle/>
           <a:p>
             <a:r>
-              <a:rPr lang="ko-KR" altLang="en-US" dirty="0" smtClean="0"/>
+              <a:rPr lang="ko-KR" altLang="en-US" dirty="0"/>
               <a:t>마스터 제목 스타일 편집</a:t>
             </a:r>
-            <a:endParaRPr lang="ko-KR" altLang="en-US" dirty="0"/>
           </a:p>
         </p:txBody>
       </p:sp>
@@ -1094,10 +1092,9 @@
           </a:lstStyle>
           <a:p>
             <a:r>
-              <a:rPr lang="ko-KR" altLang="en-US" smtClean="0"/>
+              <a:rPr lang="ko-KR" altLang="en-US"/>
               <a:t>마스터 부제목 스타일 편집</a:t>
             </a:r>
-            <a:endParaRPr lang="ko-KR" altLang="en-US"/>
           </a:p>
         </p:txBody>
       </p:sp>
@@ -1118,7 +1115,7 @@
           <a:p>
             <a:fld id="{F4AC81B4-D91A-4578-85B3-829E63FCFE17}" type="datetime1">
               <a:rPr lang="ko-KR" altLang="en-US" smtClean="0"/>
-              <a:t>2025-10-02</a:t>
+              <a:t>2026-08-12</a:t>
             </a:fld>
             <a:endParaRPr lang="ko-KR" altLang="en-US"/>
           </a:p>
@@ -1417,10 +1414,9 @@
           <a:lstStyle/>
           <a:p>
             <a:r>
-              <a:rPr lang="ko-KR" altLang="en-US" smtClean="0"/>
+              <a:rPr lang="ko-KR" altLang="en-US"/>
               <a:t>마스터 제목 스타일 편집</a:t>
             </a:r>
-            <a:endParaRPr lang="ko-KR" altLang="en-US"/>
           </a:p>
         </p:txBody>
       </p:sp>
@@ -1441,38 +1437,37 @@
           <a:p>
             <a:pPr lvl="0"/>
             <a:r>
-              <a:rPr lang="ko-KR" altLang="en-US" smtClean="0"/>
+              <a:rPr lang="ko-KR" altLang="en-US"/>
               <a:t>마스터 텍스트 스타일을 편집합니다</a:t>
             </a:r>
           </a:p>
           <a:p>
             <a:pPr lvl="1"/>
             <a:r>
-              <a:rPr lang="ko-KR" altLang="en-US" smtClean="0"/>
+              <a:rPr lang="ko-KR" altLang="en-US"/>
               <a:t>둘째 수준</a:t>
             </a:r>
           </a:p>
           <a:p>
             <a:pPr lvl="2"/>
             <a:r>
-              <a:rPr lang="ko-KR" altLang="en-US" smtClean="0"/>
+              <a:rPr lang="ko-KR" altLang="en-US"/>
               <a:t>셋째 수준</a:t>
             </a:r>
           </a:p>
           <a:p>
             <a:pPr lvl="3"/>
             <a:r>
-              <a:rPr lang="ko-KR" altLang="en-US" smtClean="0"/>
+              <a:rPr lang="ko-KR" altLang="en-US"/>
               <a:t>넷째 수준</a:t>
             </a:r>
           </a:p>
           <a:p>
             <a:pPr lvl="4"/>
             <a:r>
-              <a:rPr lang="ko-KR" altLang="en-US" smtClean="0"/>
+              <a:rPr lang="ko-KR" altLang="en-US"/>
               <a:t>다섯째 수준</a:t>
             </a:r>
-            <a:endParaRPr lang="ko-KR" altLang="en-US"/>
           </a:p>
         </p:txBody>
       </p:sp>
@@ -1493,7 +1488,7 @@
           <a:p>
             <a:fld id="{F5B77542-37E5-48F2-BAE7-80CC6B0EB6A3}" type="datetime1">
               <a:rPr lang="ko-KR" altLang="en-US" smtClean="0"/>
-              <a:t>2025-10-02</a:t>
+              <a:t>2026-08-12</a:t>
             </a:fld>
             <a:endParaRPr lang="ko-KR" altLang="en-US"/>
           </a:p>
@@ -1592,10 +1587,9 @@
           <a:lstStyle/>
           <a:p>
             <a:r>
-              <a:rPr lang="ko-KR" altLang="en-US" smtClean="0"/>
+              <a:rPr lang="ko-KR" altLang="en-US"/>
               <a:t>마스터 제목 스타일 편집</a:t>
             </a:r>
-            <a:endParaRPr lang="ko-KR" altLang="en-US"/>
           </a:p>
         </p:txBody>
       </p:sp>
@@ -1621,38 +1615,37 @@
           <a:p>
             <a:pPr lvl="0"/>
             <a:r>
-              <a:rPr lang="ko-KR" altLang="en-US" smtClean="0"/>
+              <a:rPr lang="ko-KR" altLang="en-US"/>
               <a:t>마스터 텍스트 스타일을 편집합니다</a:t>
             </a:r>
           </a:p>
           <a:p>
             <a:pPr lvl="1"/>
             <a:r>
-              <a:rPr lang="ko-KR" altLang="en-US" smtClean="0"/>
+              <a:rPr lang="ko-KR" altLang="en-US"/>
               <a:t>둘째 수준</a:t>
             </a:r>
           </a:p>
           <a:p>
             <a:pPr lvl="2"/>
             <a:r>
-              <a:rPr lang="ko-KR" altLang="en-US" smtClean="0"/>
+              <a:rPr lang="ko-KR" altLang="en-US"/>
               <a:t>셋째 수준</a:t>
             </a:r>
           </a:p>
           <a:p>
             <a:pPr lvl="3"/>
             <a:r>
-              <a:rPr lang="ko-KR" altLang="en-US" smtClean="0"/>
+              <a:rPr lang="ko-KR" altLang="en-US"/>
               <a:t>넷째 수준</a:t>
             </a:r>
           </a:p>
           <a:p>
             <a:pPr lvl="4"/>
             <a:r>
-              <a:rPr lang="ko-KR" altLang="en-US" smtClean="0"/>
+              <a:rPr lang="ko-KR" altLang="en-US"/>
               <a:t>다섯째 수준</a:t>
             </a:r>
-            <a:endParaRPr lang="ko-KR" altLang="en-US"/>
           </a:p>
         </p:txBody>
       </p:sp>
@@ -1673,7 +1666,7 @@
           <a:p>
             <a:fld id="{227CF174-B5AC-4A98-B673-0BE8126D3F27}" type="datetime1">
               <a:rPr lang="ko-KR" altLang="en-US" smtClean="0"/>
-              <a:t>2025-10-02</a:t>
+              <a:t>2026-08-12</a:t>
             </a:fld>
             <a:endParaRPr lang="ko-KR" altLang="en-US"/>
           </a:p>
@@ -1771,10 +1764,9 @@
           </a:lstStyle>
           <a:p>
             <a:r>
-              <a:rPr lang="ko-KR" altLang="en-US" dirty="0" smtClean="0"/>
+              <a:rPr lang="ko-KR" altLang="en-US" dirty="0"/>
               <a:t> 마스터 제목 스타일 편집</a:t>
             </a:r>
-            <a:endParaRPr lang="ko-KR" altLang="en-US" dirty="0"/>
           </a:p>
         </p:txBody>
       </p:sp>
@@ -1795,38 +1787,37 @@
           <a:p>
             <a:pPr lvl="0"/>
             <a:r>
-              <a:rPr lang="ko-KR" altLang="en-US" smtClean="0"/>
+              <a:rPr lang="ko-KR" altLang="en-US"/>
               <a:t>마스터 텍스트 스타일을 편집합니다</a:t>
             </a:r>
           </a:p>
           <a:p>
             <a:pPr lvl="1"/>
             <a:r>
-              <a:rPr lang="ko-KR" altLang="en-US" smtClean="0"/>
+              <a:rPr lang="ko-KR" altLang="en-US"/>
               <a:t>둘째 수준</a:t>
             </a:r>
           </a:p>
           <a:p>
             <a:pPr lvl="2"/>
             <a:r>
-              <a:rPr lang="ko-KR" altLang="en-US" smtClean="0"/>
+              <a:rPr lang="ko-KR" altLang="en-US"/>
               <a:t>셋째 수준</a:t>
             </a:r>
           </a:p>
           <a:p>
             <a:pPr lvl="3"/>
             <a:r>
-              <a:rPr lang="ko-KR" altLang="en-US" smtClean="0"/>
+              <a:rPr lang="ko-KR" altLang="en-US"/>
               <a:t>넷째 수준</a:t>
             </a:r>
           </a:p>
           <a:p>
             <a:pPr lvl="4"/>
             <a:r>
-              <a:rPr lang="ko-KR" altLang="en-US" smtClean="0"/>
+              <a:rPr lang="ko-KR" altLang="en-US"/>
               <a:t>다섯째 수준</a:t>
             </a:r>
-            <a:endParaRPr lang="ko-KR" altLang="en-US"/>
           </a:p>
         </p:txBody>
       </p:sp>
@@ -1847,7 +1838,7 @@
           <a:p>
             <a:fld id="{E20FDEC8-1339-42E8-9704-2977280C2FD3}" type="datetime1">
               <a:rPr lang="ko-KR" altLang="en-US" smtClean="0"/>
-              <a:t>2025-10-02</a:t>
+              <a:t>2026-08-12</a:t>
             </a:fld>
             <a:endParaRPr lang="ko-KR" altLang="en-US"/>
           </a:p>
@@ -1950,10 +1941,9 @@
           </a:lstStyle>
           <a:p>
             <a:r>
-              <a:rPr lang="ko-KR" altLang="en-US" smtClean="0"/>
+              <a:rPr lang="ko-KR" altLang="en-US"/>
               <a:t>마스터 제목 스타일 편집</a:t>
             </a:r>
-            <a:endParaRPr lang="ko-KR" altLang="en-US"/>
           </a:p>
         </p:txBody>
       </p:sp>
@@ -2070,7 +2060,7 @@
           <a:p>
             <a:pPr lvl="0"/>
             <a:r>
-              <a:rPr lang="ko-KR" altLang="en-US" smtClean="0"/>
+              <a:rPr lang="ko-KR" altLang="en-US"/>
               <a:t>마스터 텍스트 스타일을 편집합니다</a:t>
             </a:r>
           </a:p>
@@ -2093,7 +2083,7 @@
           <a:p>
             <a:fld id="{4D18DC76-A282-4817-B790-197F054E1215}" type="datetime1">
               <a:rPr lang="ko-KR" altLang="en-US" smtClean="0"/>
-              <a:t>2025-10-02</a:t>
+              <a:t>2026-08-12</a:t>
             </a:fld>
             <a:endParaRPr lang="ko-KR" altLang="en-US"/>
           </a:p>
@@ -2187,10 +2177,9 @@
           <a:lstStyle/>
           <a:p>
             <a:r>
-              <a:rPr lang="ko-KR" altLang="en-US" smtClean="0"/>
+              <a:rPr lang="ko-KR" altLang="en-US"/>
               <a:t>마스터 제목 스타일 편집</a:t>
             </a:r>
-            <a:endParaRPr lang="ko-KR" altLang="en-US"/>
           </a:p>
         </p:txBody>
       </p:sp>
@@ -2244,38 +2233,37 @@
           <a:p>
             <a:pPr lvl="0"/>
             <a:r>
-              <a:rPr lang="ko-KR" altLang="en-US" smtClean="0"/>
+              <a:rPr lang="ko-KR" altLang="en-US"/>
               <a:t>마스터 텍스트 스타일을 편집합니다</a:t>
             </a:r>
           </a:p>
           <a:p>
             <a:pPr lvl="1"/>
             <a:r>
-              <a:rPr lang="ko-KR" altLang="en-US" smtClean="0"/>
+              <a:rPr lang="ko-KR" altLang="en-US"/>
               <a:t>둘째 수준</a:t>
             </a:r>
           </a:p>
           <a:p>
             <a:pPr lvl="2"/>
             <a:r>
-              <a:rPr lang="ko-KR" altLang="en-US" smtClean="0"/>
+              <a:rPr lang="ko-KR" altLang="en-US"/>
               <a:t>셋째 수준</a:t>
             </a:r>
           </a:p>
           <a:p>
             <a:pPr lvl="3"/>
             <a:r>
-              <a:rPr lang="ko-KR" altLang="en-US" smtClean="0"/>
+              <a:rPr lang="ko-KR" altLang="en-US"/>
               <a:t>넷째 수준</a:t>
             </a:r>
           </a:p>
           <a:p>
             <a:pPr lvl="4"/>
             <a:r>
-              <a:rPr lang="ko-KR" altLang="en-US" smtClean="0"/>
+              <a:rPr lang="ko-KR" altLang="en-US"/>
               <a:t>다섯째 수준</a:t>
             </a:r>
-            <a:endParaRPr lang="ko-KR" altLang="en-US"/>
           </a:p>
         </p:txBody>
       </p:sp>
@@ -2329,38 +2317,37 @@
           <a:p>
             <a:pPr lvl="0"/>
             <a:r>
-              <a:rPr lang="ko-KR" altLang="en-US" smtClean="0"/>
+              <a:rPr lang="ko-KR" altLang="en-US"/>
               <a:t>마스터 텍스트 스타일을 편집합니다</a:t>
             </a:r>
           </a:p>
           <a:p>
             <a:pPr lvl="1"/>
             <a:r>
-              <a:rPr lang="ko-KR" altLang="en-US" smtClean="0"/>
+              <a:rPr lang="ko-KR" altLang="en-US"/>
               <a:t>둘째 수준</a:t>
             </a:r>
           </a:p>
           <a:p>
             <a:pPr lvl="2"/>
             <a:r>
-              <a:rPr lang="ko-KR" altLang="en-US" smtClean="0"/>
+              <a:rPr lang="ko-KR" altLang="en-US"/>
               <a:t>셋째 수준</a:t>
             </a:r>
           </a:p>
           <a:p>
             <a:pPr lvl="3"/>
             <a:r>
-              <a:rPr lang="ko-KR" altLang="en-US" smtClean="0"/>
+              <a:rPr lang="ko-KR" altLang="en-US"/>
               <a:t>넷째 수준</a:t>
             </a:r>
           </a:p>
           <a:p>
             <a:pPr lvl="4"/>
             <a:r>
-              <a:rPr lang="ko-KR" altLang="en-US" smtClean="0"/>
+              <a:rPr lang="ko-KR" altLang="en-US"/>
               <a:t>다섯째 수준</a:t>
             </a:r>
-            <a:endParaRPr lang="ko-KR" altLang="en-US"/>
           </a:p>
         </p:txBody>
       </p:sp>
@@ -2381,7 +2368,7 @@
           <a:p>
             <a:fld id="{6680AA6C-13D8-43E4-90F0-E6C88A2B9F16}" type="datetime1">
               <a:rPr lang="ko-KR" altLang="en-US" smtClean="0"/>
-              <a:t>2025-10-02</a:t>
+              <a:t>2026-08-12</a:t>
             </a:fld>
             <a:endParaRPr lang="ko-KR" altLang="en-US"/>
           </a:p>
@@ -2479,10 +2466,9 @@
           </a:lstStyle>
           <a:p>
             <a:r>
-              <a:rPr lang="ko-KR" altLang="en-US" smtClean="0"/>
+              <a:rPr lang="ko-KR" altLang="en-US"/>
               <a:t>마스터 제목 스타일 편집</a:t>
             </a:r>
-            <a:endParaRPr lang="ko-KR" altLang="en-US"/>
           </a:p>
         </p:txBody>
       </p:sp>
@@ -2545,7 +2531,7 @@
           <a:p>
             <a:pPr lvl="0"/>
             <a:r>
-              <a:rPr lang="ko-KR" altLang="en-US" smtClean="0"/>
+              <a:rPr lang="ko-KR" altLang="en-US"/>
               <a:t>마스터 텍스트 스타일을 편집합니다</a:t>
             </a:r>
           </a:p>
@@ -2601,38 +2587,37 @@
           <a:p>
             <a:pPr lvl="0"/>
             <a:r>
-              <a:rPr lang="ko-KR" altLang="en-US" smtClean="0"/>
+              <a:rPr lang="ko-KR" altLang="en-US"/>
               <a:t>마스터 텍스트 스타일을 편집합니다</a:t>
             </a:r>
           </a:p>
           <a:p>
             <a:pPr lvl="1"/>
             <a:r>
-              <a:rPr lang="ko-KR" altLang="en-US" smtClean="0"/>
+              <a:rPr lang="ko-KR" altLang="en-US"/>
               <a:t>둘째 수준</a:t>
             </a:r>
           </a:p>
           <a:p>
             <a:pPr lvl="2"/>
             <a:r>
-              <a:rPr lang="ko-KR" altLang="en-US" smtClean="0"/>
+              <a:rPr lang="ko-KR" altLang="en-US"/>
               <a:t>셋째 수준</a:t>
             </a:r>
           </a:p>
           <a:p>
             <a:pPr lvl="3"/>
             <a:r>
-              <a:rPr lang="ko-KR" altLang="en-US" smtClean="0"/>
+              <a:rPr lang="ko-KR" altLang="en-US"/>
               <a:t>넷째 수준</a:t>
             </a:r>
           </a:p>
           <a:p>
             <a:pPr lvl="4"/>
             <a:r>
-              <a:rPr lang="ko-KR" altLang="en-US" smtClean="0"/>
+              <a:rPr lang="ko-KR" altLang="en-US"/>
               <a:t>다섯째 수준</a:t>
             </a:r>
-            <a:endParaRPr lang="ko-KR" altLang="en-US"/>
           </a:p>
         </p:txBody>
       </p:sp>
@@ -2695,7 +2680,7 @@
           <a:p>
             <a:pPr lvl="0"/>
             <a:r>
-              <a:rPr lang="ko-KR" altLang="en-US" smtClean="0"/>
+              <a:rPr lang="ko-KR" altLang="en-US"/>
               <a:t>마스터 텍스트 스타일을 편집합니다</a:t>
             </a:r>
           </a:p>
@@ -2751,38 +2736,37 @@
           <a:p>
             <a:pPr lvl="0"/>
             <a:r>
-              <a:rPr lang="ko-KR" altLang="en-US" smtClean="0"/>
+              <a:rPr lang="ko-KR" altLang="en-US"/>
               <a:t>마스터 텍스트 스타일을 편집합니다</a:t>
             </a:r>
           </a:p>
           <a:p>
             <a:pPr lvl="1"/>
             <a:r>
-              <a:rPr lang="ko-KR" altLang="en-US" smtClean="0"/>
+              <a:rPr lang="ko-KR" altLang="en-US"/>
               <a:t>둘째 수준</a:t>
             </a:r>
           </a:p>
           <a:p>
             <a:pPr lvl="2"/>
             <a:r>
-              <a:rPr lang="ko-KR" altLang="en-US" smtClean="0"/>
+              <a:rPr lang="ko-KR" altLang="en-US"/>
               <a:t>셋째 수준</a:t>
             </a:r>
           </a:p>
           <a:p>
             <a:pPr lvl="3"/>
             <a:r>
-              <a:rPr lang="ko-KR" altLang="en-US" smtClean="0"/>
+              <a:rPr lang="ko-KR" altLang="en-US"/>
               <a:t>넷째 수준</a:t>
             </a:r>
           </a:p>
           <a:p>
             <a:pPr lvl="4"/>
             <a:r>
-              <a:rPr lang="ko-KR" altLang="en-US" smtClean="0"/>
+              <a:rPr lang="ko-KR" altLang="en-US"/>
               <a:t>다섯째 수준</a:t>
             </a:r>
-            <a:endParaRPr lang="ko-KR" altLang="en-US"/>
           </a:p>
         </p:txBody>
       </p:sp>
@@ -2803,7 +2787,7 @@
           <a:p>
             <a:fld id="{3EF5B03B-20CC-436E-8601-C933C6C1F4A6}" type="datetime1">
               <a:rPr lang="ko-KR" altLang="en-US" smtClean="0"/>
-              <a:t>2025-10-02</a:t>
+              <a:t>2026-08-12</a:t>
             </a:fld>
             <a:endParaRPr lang="ko-KR" altLang="en-US"/>
           </a:p>
@@ -2897,10 +2881,9 @@
           <a:lstStyle/>
           <a:p>
             <a:r>
-              <a:rPr lang="ko-KR" altLang="en-US" smtClean="0"/>
+              <a:rPr lang="ko-KR" altLang="en-US"/>
               <a:t>마스터 제목 스타일 편집</a:t>
             </a:r>
-            <a:endParaRPr lang="ko-KR" altLang="en-US"/>
           </a:p>
         </p:txBody>
       </p:sp>
@@ -2921,7 +2904,7 @@
           <a:p>
             <a:fld id="{87B5A15D-8B08-482F-AB47-E416EC355EB6}" type="datetime1">
               <a:rPr lang="ko-KR" altLang="en-US" smtClean="0"/>
-              <a:t>2025-10-02</a:t>
+              <a:t>2026-08-12</a:t>
             </a:fld>
             <a:endParaRPr lang="ko-KR" altLang="en-US"/>
           </a:p>
@@ -3016,7 +2999,7 @@
           <a:p>
             <a:fld id="{A877D7F8-7B64-44F8-A411-CBD22F28CBFF}" type="datetime1">
               <a:rPr lang="ko-KR" altLang="en-US" smtClean="0"/>
-              <a:t>2025-10-02</a:t>
+              <a:t>2026-08-12</a:t>
             </a:fld>
             <a:endParaRPr lang="ko-KR" altLang="en-US"/>
           </a:p>
@@ -3119,10 +3102,9 @@
           </a:lstStyle>
           <a:p>
             <a:r>
-              <a:rPr lang="ko-KR" altLang="en-US" smtClean="0"/>
+              <a:rPr lang="ko-KR" altLang="en-US"/>
               <a:t>마스터 제목 스타일 편집</a:t>
             </a:r>
-            <a:endParaRPr lang="ko-KR" altLang="en-US"/>
           </a:p>
         </p:txBody>
       </p:sp>
@@ -3176,38 +3158,37 @@
           <a:p>
             <a:pPr lvl="0"/>
             <a:r>
-              <a:rPr lang="ko-KR" altLang="en-US" smtClean="0"/>
+              <a:rPr lang="ko-KR" altLang="en-US"/>
               <a:t>마스터 텍스트 스타일을 편집합니다</a:t>
             </a:r>
           </a:p>
           <a:p>
             <a:pPr lvl="1"/>
             <a:r>
-              <a:rPr lang="ko-KR" altLang="en-US" smtClean="0"/>
+              <a:rPr lang="ko-KR" altLang="en-US"/>
               <a:t>둘째 수준</a:t>
             </a:r>
           </a:p>
           <a:p>
             <a:pPr lvl="2"/>
             <a:r>
-              <a:rPr lang="ko-KR" altLang="en-US" smtClean="0"/>
+              <a:rPr lang="ko-KR" altLang="en-US"/>
               <a:t>셋째 수준</a:t>
             </a:r>
           </a:p>
           <a:p>
             <a:pPr lvl="3"/>
             <a:r>
-              <a:rPr lang="ko-KR" altLang="en-US" smtClean="0"/>
+              <a:rPr lang="ko-KR" altLang="en-US"/>
               <a:t>넷째 수준</a:t>
             </a:r>
           </a:p>
           <a:p>
             <a:pPr lvl="4"/>
             <a:r>
-              <a:rPr lang="ko-KR" altLang="en-US" smtClean="0"/>
+              <a:rPr lang="ko-KR" altLang="en-US"/>
               <a:t>다섯째 수준</a:t>
             </a:r>
-            <a:endParaRPr lang="ko-KR" altLang="en-US"/>
           </a:p>
         </p:txBody>
       </p:sp>
@@ -3270,7 +3251,7 @@
           <a:p>
             <a:pPr lvl="0"/>
             <a:r>
-              <a:rPr lang="ko-KR" altLang="en-US" smtClean="0"/>
+              <a:rPr lang="ko-KR" altLang="en-US"/>
               <a:t>마스터 텍스트 스타일을 편집합니다</a:t>
             </a:r>
           </a:p>
@@ -3293,7 +3274,7 @@
           <a:p>
             <a:fld id="{E12DBD9B-2BB6-4D1F-BCB4-1E48829C93C3}" type="datetime1">
               <a:rPr lang="ko-KR" altLang="en-US" smtClean="0"/>
-              <a:t>2025-10-02</a:t>
+              <a:t>2026-08-12</a:t>
             </a:fld>
             <a:endParaRPr lang="ko-KR" altLang="en-US"/>
           </a:p>
@@ -3396,10 +3377,9 @@
           </a:lstStyle>
           <a:p>
             <a:r>
-              <a:rPr lang="ko-KR" altLang="en-US" smtClean="0"/>
+              <a:rPr lang="ko-KR" altLang="en-US"/>
               <a:t>마스터 제목 스타일 편집</a:t>
             </a:r>
-            <a:endParaRPr lang="ko-KR" altLang="en-US"/>
           </a:p>
         </p:txBody>
       </p:sp>
@@ -3523,7 +3503,7 @@
           <a:p>
             <a:pPr lvl="0"/>
             <a:r>
-              <a:rPr lang="ko-KR" altLang="en-US" smtClean="0"/>
+              <a:rPr lang="ko-KR" altLang="en-US"/>
               <a:t>마스터 텍스트 스타일을 편집합니다</a:t>
             </a:r>
           </a:p>
@@ -3546,7 +3526,7 @@
           <a:p>
             <a:fld id="{17564C48-0CD7-40EB-BE64-BBF4DB8C56AF}" type="datetime1">
               <a:rPr lang="ko-KR" altLang="en-US" smtClean="0"/>
-              <a:t>2025-10-02</a:t>
+              <a:t>2026-08-12</a:t>
             </a:fld>
             <a:endParaRPr lang="ko-KR" altLang="en-US"/>
           </a:p>
@@ -3656,38 +3636,37 @@
           <a:p>
             <a:pPr lvl="0"/>
             <a:r>
-              <a:rPr lang="ko-KR" altLang="en-US" smtClean="0"/>
+              <a:rPr lang="ko-KR" altLang="en-US"/>
               <a:t>마스터 텍스트 스타일을 편집합니다</a:t>
             </a:r>
           </a:p>
           <a:p>
             <a:pPr lvl="1"/>
             <a:r>
-              <a:rPr lang="ko-KR" altLang="en-US" smtClean="0"/>
+              <a:rPr lang="ko-KR" altLang="en-US"/>
               <a:t>둘째 수준</a:t>
             </a:r>
           </a:p>
           <a:p>
             <a:pPr lvl="2"/>
             <a:r>
-              <a:rPr lang="ko-KR" altLang="en-US" smtClean="0"/>
+              <a:rPr lang="ko-KR" altLang="en-US"/>
               <a:t>셋째 수준</a:t>
             </a:r>
           </a:p>
           <a:p>
             <a:pPr lvl="3"/>
             <a:r>
-              <a:rPr lang="ko-KR" altLang="en-US" smtClean="0"/>
+              <a:rPr lang="ko-KR" altLang="en-US"/>
               <a:t>넷째 수준</a:t>
             </a:r>
           </a:p>
           <a:p>
             <a:pPr lvl="4"/>
             <a:r>
-              <a:rPr lang="ko-KR" altLang="en-US" smtClean="0"/>
+              <a:rPr lang="ko-KR" altLang="en-US"/>
               <a:t>다섯째 수준</a:t>
             </a:r>
-            <a:endParaRPr lang="ko-KR" altLang="en-US"/>
           </a:p>
         </p:txBody>
       </p:sp>
@@ -3726,7 +3705,7 @@
           <a:p>
             <a:fld id="{C116BCB4-B68B-4638-8167-F4BDC0A30DA1}" type="datetime1">
               <a:rPr lang="ko-KR" altLang="en-US" smtClean="0"/>
-              <a:t>2025-10-02</a:t>
+              <a:t>2026-08-12</a:t>
             </a:fld>
             <a:endParaRPr lang="ko-KR" altLang="en-US"/>
           </a:p>
@@ -3887,10 +3866,9 @@
           <a:lstStyle/>
           <a:p>
             <a:r>
-              <a:rPr lang="ko-KR" altLang="en-US" dirty="0" smtClean="0"/>
+              <a:rPr lang="ko-KR" altLang="en-US" dirty="0"/>
               <a:t>  마스터 제목 스타일 편집</a:t>
             </a:r>
-            <a:endParaRPr lang="ko-KR" altLang="en-US" dirty="0"/>
           </a:p>
         </p:txBody>
       </p:sp>
@@ -4330,7 +4308,7 @@
               <a:t>. </a:t>
             </a:r>
             <a:r>
-              <a:rPr lang="ko-KR" altLang="en-US" b="1" dirty="0" smtClean="0">
+              <a:rPr lang="ko-KR" altLang="en-US" b="1" dirty="0">
                 <a:solidFill>
                   <a:schemeClr val="tx1"/>
                 </a:solidFill>
@@ -4340,7 +4318,7 @@
               <a:t>웹 개발 환경 구축 및 </a:t>
             </a:r>
             <a:r>
-              <a:rPr lang="en-US" altLang="ko-KR" b="1" dirty="0" smtClean="0">
+              <a:rPr lang="en-US" altLang="ko-KR" b="1" dirty="0">
                 <a:solidFill>
                   <a:schemeClr val="tx1"/>
                 </a:solidFill>
@@ -4388,7 +4366,7 @@
           <a:p>
             <a:pPr algn="l"/>
             <a:r>
-              <a:rPr lang="en-US" altLang="ko-KR" sz="2000" dirty="0" smtClean="0">
+              <a:rPr lang="en-US" altLang="ko-KR" sz="2000" dirty="0">
                 <a:solidFill>
                   <a:schemeClr val="bg1"/>
                 </a:solidFill>
@@ -4396,7 +4374,7 @@
               <a:t> </a:t>
             </a:r>
             <a:r>
-              <a:rPr lang="en-US" altLang="ko-KR" sz="1800" i="1" dirty="0" smtClean="0">
+              <a:rPr lang="en-US" altLang="ko-KR" sz="1800" i="1" dirty="0">
                 <a:solidFill>
                   <a:schemeClr val="bg1"/>
                 </a:solidFill>
@@ -4404,7 +4382,7 @@
               <a:t>JAVA </a:t>
             </a:r>
             <a:r>
-              <a:rPr lang="ko-KR" altLang="en-US" sz="1800" i="1" dirty="0" smtClean="0">
+              <a:rPr lang="ko-KR" altLang="en-US" sz="1800" i="1" dirty="0">
                 <a:solidFill>
                   <a:schemeClr val="bg1"/>
                 </a:solidFill>
@@ -4412,7 +4390,7 @@
               <a:t>웹 </a:t>
             </a:r>
             <a:r>
-              <a:rPr lang="en-US" altLang="ko-KR" sz="1800" i="1" dirty="0" smtClean="0">
+              <a:rPr lang="en-US" altLang="ko-KR" sz="1800" i="1" dirty="0">
                 <a:solidFill>
                   <a:schemeClr val="bg1"/>
                 </a:solidFill>
@@ -4519,13 +4497,6 @@
   <p:clrMapOvr>
     <a:masterClrMapping/>
   </p:clrMapOvr>
-  <p:timing>
-    <p:tnLst>
-      <p:par>
-        <p:cTn id="1" dur="indefinite" restart="never" nodeType="tmRoot"/>
-      </p:par>
-    </p:tnLst>
-  </p:timing>
 </p:sld>
 </file>
 
@@ -4583,26 +4554,21 @@
           </a:lstStyle>
           <a:p>
             <a:r>
-              <a:rPr lang="en-US" altLang="ko-KR" dirty="0" smtClean="0"/>
-              <a:t> </a:t>
-            </a:r>
-            <a:r>
               <a:rPr lang="en-US" altLang="ko-KR" dirty="0"/>
-              <a:t> </a:t>
-            </a:r>
-            <a:r>
-              <a:rPr lang="ko-KR" altLang="en-US" dirty="0" err="1" smtClean="0"/>
+              <a:t>  </a:t>
+            </a:r>
+            <a:r>
+              <a:rPr lang="ko-KR" altLang="en-US" dirty="0" err="1"/>
               <a:t>톰캣</a:t>
             </a:r>
             <a:r>
-              <a:rPr lang="en-US" altLang="ko-KR" dirty="0" smtClean="0"/>
+              <a:rPr lang="en-US" altLang="ko-KR" dirty="0"/>
               <a:t>(Tomcat) </a:t>
             </a:r>
             <a:r>
-              <a:rPr lang="ko-KR" altLang="en-US" dirty="0" smtClean="0"/>
+              <a:rPr lang="ko-KR" altLang="en-US" dirty="0"/>
               <a:t>설치</a:t>
             </a:r>
-            <a:endParaRPr lang="ko-KR" altLang="en-US" dirty="0"/>
           </a:p>
         </p:txBody>
       </p:sp>
@@ -4636,11 +4602,11 @@
               <a:buChar char="u"/>
             </a:pPr>
             <a:r>
-              <a:rPr lang="ko-KR" altLang="en-US" sz="2000" b="1" dirty="0" err="1" smtClean="0"/>
+              <a:rPr lang="ko-KR" altLang="en-US" sz="2000" b="1" dirty="0" err="1"/>
               <a:t>톰캣</a:t>
             </a:r>
             <a:r>
-              <a:rPr lang="ko-KR" altLang="en-US" sz="2000" b="1" dirty="0" smtClean="0"/>
+              <a:rPr lang="ko-KR" altLang="en-US" sz="2000" b="1" dirty="0"/>
               <a:t> 설치</a:t>
             </a:r>
             <a:endParaRPr lang="en-US" altLang="ko-KR" sz="2000" b="1" dirty="0"/>
@@ -4652,24 +4618,24 @@
               </a:lnSpc>
             </a:pPr>
             <a:r>
-              <a:rPr lang="en-US" altLang="ko-KR" sz="2200" b="1" dirty="0" smtClean="0"/>
+              <a:rPr lang="en-US" altLang="ko-KR" sz="2200" b="1" dirty="0"/>
               <a:t>    </a:t>
             </a:r>
             <a:r>
-              <a:rPr lang="ko-KR" altLang="en-US" b="1" dirty="0" smtClean="0"/>
+              <a:rPr lang="ko-KR" altLang="en-US" b="1" dirty="0"/>
               <a:t>아파치 사이트에 접속 </a:t>
             </a:r>
             <a:r>
-              <a:rPr lang="en-US" altLang="ko-KR" b="1" dirty="0" smtClean="0"/>
+              <a:rPr lang="en-US" altLang="ko-KR" b="1" dirty="0"/>
               <a:t>– </a:t>
             </a:r>
             <a:r>
-              <a:rPr lang="en-US" altLang="ko-KR" b="1" dirty="0" smtClean="0">
+              <a:rPr lang="en-US" altLang="ko-KR" b="1" dirty="0">
                 <a:hlinkClick r:id="rId2"/>
               </a:rPr>
               <a:t>http://tomcat.apache.org</a:t>
             </a:r>
-            <a:endParaRPr lang="en-US" altLang="ko-KR" b="1" dirty="0" smtClean="0"/>
+            <a:endParaRPr lang="en-US" altLang="ko-KR" b="1" dirty="0"/>
           </a:p>
           <a:p>
             <a:pPr>
@@ -4678,10 +4644,10 @@
               </a:lnSpc>
             </a:pPr>
             <a:r>
-              <a:rPr lang="ko-KR" altLang="en-US" sz="1400" b="1" dirty="0" smtClean="0"/>
+              <a:rPr lang="ko-KR" altLang="en-US" sz="1400" b="1" dirty="0"/>
               <a:t>  </a:t>
             </a:r>
-            <a:endParaRPr lang="en-US" altLang="ko-KR" b="1" dirty="0" smtClean="0"/>
+            <a:endParaRPr lang="en-US" altLang="ko-KR" b="1" dirty="0"/>
           </a:p>
         </p:txBody>
       </p:sp>
@@ -4756,13 +4722,6 @@
   <p:clrMapOvr>
     <a:masterClrMapping/>
   </p:clrMapOvr>
-  <p:timing>
-    <p:tnLst>
-      <p:par>
-        <p:cTn id="1" dur="indefinite" restart="never" nodeType="tmRoot"/>
-      </p:par>
-    </p:tnLst>
-  </p:timing>
 </p:sld>
 </file>
 
@@ -4820,26 +4779,21 @@
           </a:lstStyle>
           <a:p>
             <a:r>
-              <a:rPr lang="en-US" altLang="ko-KR" dirty="0" smtClean="0"/>
-              <a:t> </a:t>
-            </a:r>
-            <a:r>
               <a:rPr lang="en-US" altLang="ko-KR" dirty="0"/>
-              <a:t> </a:t>
-            </a:r>
-            <a:r>
-              <a:rPr lang="ko-KR" altLang="en-US" dirty="0" err="1" smtClean="0"/>
+              <a:t>  </a:t>
+            </a:r>
+            <a:r>
+              <a:rPr lang="ko-KR" altLang="en-US" dirty="0" err="1"/>
               <a:t>톰캣</a:t>
             </a:r>
             <a:r>
-              <a:rPr lang="en-US" altLang="ko-KR" dirty="0" smtClean="0"/>
+              <a:rPr lang="en-US" altLang="ko-KR" dirty="0"/>
               <a:t>(Tomcat) </a:t>
             </a:r>
             <a:r>
-              <a:rPr lang="ko-KR" altLang="en-US" dirty="0" smtClean="0"/>
+              <a:rPr lang="ko-KR" altLang="en-US" dirty="0"/>
               <a:t>설치</a:t>
             </a:r>
-            <a:endParaRPr lang="ko-KR" altLang="en-US" dirty="0"/>
           </a:p>
         </p:txBody>
       </p:sp>
@@ -4873,14 +4827,14 @@
               <a:buChar char="u"/>
             </a:pPr>
             <a:r>
-              <a:rPr lang="ko-KR" altLang="en-US" sz="2000" b="1" dirty="0" err="1" smtClean="0"/>
+              <a:rPr lang="ko-KR" altLang="en-US" sz="2000" b="1" dirty="0" err="1"/>
               <a:t>톰캣</a:t>
             </a:r>
             <a:r>
-              <a:rPr lang="ko-KR" altLang="en-US" sz="2000" b="1" dirty="0" smtClean="0"/>
+              <a:rPr lang="ko-KR" altLang="en-US" sz="2000" b="1" dirty="0"/>
               <a:t> 설치  </a:t>
             </a:r>
-            <a:endParaRPr lang="en-US" altLang="ko-KR" sz="2000" b="1" dirty="0" smtClean="0"/>
+            <a:endParaRPr lang="en-US" altLang="ko-KR" sz="2000" b="1" dirty="0"/>
           </a:p>
         </p:txBody>
       </p:sp>
@@ -4938,15 +4892,15 @@
           <a:lstStyle/>
           <a:p>
             <a:r>
-              <a:rPr lang="en-US" altLang="ko-KR" sz="1600" dirty="0" smtClean="0"/>
+              <a:rPr lang="en-US" altLang="ko-KR" sz="1600" dirty="0"/>
               <a:t>64-bit Windows.zip </a:t>
             </a:r>
             <a:r>
-              <a:rPr lang="ko-KR" altLang="en-US" sz="1600" dirty="0" smtClean="0"/>
+              <a:rPr lang="ko-KR" altLang="en-US" sz="1600" dirty="0"/>
               <a:t>다운로드 </a:t>
             </a:r>
             <a:r>
-              <a:rPr lang="en-US" altLang="ko-KR" sz="1600" dirty="0" smtClean="0"/>
+              <a:rPr lang="en-US" altLang="ko-KR" sz="1600" dirty="0"/>
               <a:t>&gt;</a:t>
             </a:r>
             <a:endParaRPr lang="ko-KR" altLang="en-US" sz="1600" dirty="0"/>
@@ -4976,14 +4930,13 @@
           <a:lstStyle/>
           <a:p>
             <a:r>
-              <a:rPr lang="en-US" altLang="ko-KR" sz="1600" dirty="0" smtClean="0"/>
+              <a:rPr lang="en-US" altLang="ko-KR" sz="1600" dirty="0"/>
               <a:t>C</a:t>
             </a:r>
             <a:r>
-              <a:rPr lang="ko-KR" altLang="en-US" sz="1600" dirty="0" smtClean="0"/>
+              <a:rPr lang="ko-KR" altLang="en-US" sz="1600" dirty="0"/>
               <a:t>드라이브에 압축 풀기</a:t>
             </a:r>
-            <a:endParaRPr lang="ko-KR" altLang="en-US" sz="1600" dirty="0"/>
           </a:p>
         </p:txBody>
       </p:sp>
@@ -5051,13 +5004,6 @@
   <p:clrMapOvr>
     <a:masterClrMapping/>
   </p:clrMapOvr>
-  <p:timing>
-    <p:tnLst>
-      <p:par>
-        <p:cTn id="1" dur="indefinite" restart="never" nodeType="tmRoot"/>
-      </p:par>
-    </p:tnLst>
-  </p:timing>
 </p:sld>
 </file>
 
@@ -5099,18 +5045,13 @@
           <a:lstStyle/>
           <a:p>
             <a:r>
-              <a:rPr lang="en-US" altLang="ko-KR" dirty="0" smtClean="0"/>
+              <a:rPr lang="en-US" altLang="ko-KR" dirty="0"/>
               <a:t> </a:t>
             </a:r>
             <a:r>
               <a:rPr lang="ko-KR" altLang="en-US" dirty="0"/>
-              <a:t> </a:t>
-            </a:r>
-            <a:r>
-              <a:rPr lang="ko-KR" altLang="en-US" dirty="0" smtClean="0"/>
-              <a:t>웹 애플리케이션 이해하기</a:t>
-            </a:r>
-            <a:endParaRPr lang="ko-KR" altLang="en-US" dirty="0"/>
+              <a:t> 웹 애플리케이션 이해하기</a:t>
+            </a:r>
           </a:p>
         </p:txBody>
       </p:sp>
@@ -5312,30 +5253,29 @@
               <a:buChar char="u"/>
             </a:pPr>
             <a:r>
-              <a:rPr lang="ko-KR" altLang="en-US" sz="2000" b="1" dirty="0" smtClean="0"/>
+              <a:rPr lang="ko-KR" altLang="en-US" sz="2000" b="1" dirty="0"/>
               <a:t> 웹 프로젝트</a:t>
             </a:r>
             <a:r>
-              <a:rPr lang="en-US" altLang="ko-KR" sz="2000" b="1" dirty="0" smtClean="0"/>
+              <a:rPr lang="en-US" altLang="ko-KR" sz="2000" b="1" dirty="0"/>
               <a:t>(</a:t>
             </a:r>
             <a:r>
-              <a:rPr lang="ko-KR" altLang="en-US" sz="2000" b="1" dirty="0" smtClean="0"/>
+              <a:rPr lang="ko-KR" altLang="en-US" sz="2000" b="1" dirty="0"/>
               <a:t>웹 애플리케이션</a:t>
             </a:r>
             <a:r>
-              <a:rPr lang="en-US" altLang="ko-KR" sz="2000" b="1" dirty="0" smtClean="0"/>
+              <a:rPr lang="en-US" altLang="ko-KR" sz="2000" b="1" dirty="0"/>
               <a:t>)</a:t>
             </a:r>
             <a:r>
-              <a:rPr lang="ko-KR" altLang="en-US" sz="2000" b="1" dirty="0" smtClean="0"/>
+              <a:rPr lang="ko-KR" altLang="en-US" sz="2000" b="1" dirty="0"/>
               <a:t> 만들고 실행하기</a:t>
             </a:r>
             <a:r>
               <a:rPr lang="en-US" altLang="ko-KR" sz="2000" b="1" dirty="0"/>
               <a:t> </a:t>
             </a:r>
-            <a:endParaRPr lang="en-US" altLang="ko-KR" sz="2000" b="1" dirty="0" smtClean="0"/>
           </a:p>
           <a:p>
             <a:pPr marL="0" indent="0">
@@ -5345,39 +5285,39 @@
               <a:buNone/>
             </a:pPr>
             <a:r>
-              <a:rPr lang="en-US" altLang="ko-KR" sz="2000" b="1" dirty="0" smtClean="0"/>
+              <a:rPr lang="en-US" altLang="ko-KR" sz="2000" b="1" dirty="0"/>
               <a:t>    </a:t>
             </a:r>
             <a:r>
-              <a:rPr lang="ko-KR" altLang="en-US" sz="2000" b="1" dirty="0" smtClean="0"/>
+              <a:rPr lang="ko-KR" altLang="en-US" sz="2000" b="1" dirty="0"/>
               <a:t>자바 </a:t>
             </a:r>
             <a:r>
-              <a:rPr lang="en-US" altLang="ko-KR" sz="2000" b="1" dirty="0" smtClean="0"/>
+              <a:rPr lang="en-US" altLang="ko-KR" sz="2000" b="1" dirty="0"/>
               <a:t>EE </a:t>
             </a:r>
             <a:r>
-              <a:rPr lang="ko-KR" altLang="en-US" sz="2000" b="1" dirty="0" smtClean="0"/>
+              <a:rPr lang="ko-KR" altLang="en-US" sz="2000" b="1" dirty="0"/>
               <a:t>버전 처음 </a:t>
             </a:r>
             <a:r>
-              <a:rPr lang="ko-KR" altLang="en-US" sz="2000" b="1" dirty="0" err="1" smtClean="0"/>
+              <a:rPr lang="ko-KR" altLang="en-US" sz="2000" b="1" dirty="0" err="1"/>
               <a:t>실행시</a:t>
             </a:r>
             <a:r>
-              <a:rPr lang="ko-KR" altLang="en-US" sz="2000" b="1" dirty="0" smtClean="0"/>
+              <a:rPr lang="ko-KR" altLang="en-US" sz="2000" b="1" dirty="0"/>
               <a:t> </a:t>
             </a:r>
             <a:r>
-              <a:rPr lang="en-US" altLang="ko-KR" sz="2000" b="1" dirty="0" smtClean="0"/>
+              <a:rPr lang="en-US" altLang="ko-KR" sz="2000" b="1" dirty="0"/>
               <a:t>– </a:t>
             </a:r>
             <a:r>
-              <a:rPr lang="ko-KR" altLang="en-US" sz="2000" b="1" dirty="0" err="1" smtClean="0"/>
+              <a:rPr lang="ko-KR" altLang="en-US" sz="2000" b="1" dirty="0" err="1"/>
               <a:t>이클립스</a:t>
             </a:r>
             <a:r>
-              <a:rPr lang="ko-KR" altLang="en-US" sz="2000" b="1" dirty="0" smtClean="0"/>
+              <a:rPr lang="ko-KR" altLang="en-US" sz="2000" b="1" dirty="0"/>
               <a:t> 화면</a:t>
             </a:r>
             <a:endParaRPr lang="en-US" altLang="ko-KR" sz="2000" b="1" dirty="0"/>
@@ -5527,7 +5467,7 @@
           <a:p>
             <a:pPr algn="ctr"/>
             <a:r>
-              <a:rPr lang="en-US" altLang="ko-KR" sz="1600" dirty="0" smtClean="0">
+              <a:rPr lang="en-US" altLang="ko-KR" sz="1600" dirty="0">
                 <a:solidFill>
                   <a:sysClr val="windowText" lastClr="000000"/>
                 </a:solidFill>
@@ -5535,22 +5475,14 @@
               <a:t>Create Dynamic Web project </a:t>
             </a:r>
             <a:r>
-              <a:rPr lang="ko-KR" altLang="en-US" sz="1600" dirty="0" smtClean="0">
+              <a:rPr lang="ko-KR" altLang="en-US" sz="1600" dirty="0">
                 <a:solidFill>
                   <a:sysClr val="windowText" lastClr="000000"/>
                 </a:solidFill>
               </a:rPr>
-              <a:t>클</a:t>
-            </a:r>
-            <a:r>
-              <a:rPr lang="ko-KR" altLang="en-US" sz="1600" dirty="0">
-                <a:solidFill>
-                  <a:sysClr val="windowText" lastClr="000000"/>
-                </a:solidFill>
-              </a:rPr>
-              <a:t>릭</a:t>
-            </a:r>
-            <a:endParaRPr lang="en-US" altLang="ko-KR" sz="1600" dirty="0" smtClean="0">
+              <a:t>클릭</a:t>
+            </a:r>
+            <a:endParaRPr lang="en-US" altLang="ko-KR" sz="1600" dirty="0">
               <a:solidFill>
                 <a:sysClr val="windowText" lastClr="000000"/>
               </a:solidFill>
@@ -5605,13 +5537,6 @@
   <p:clrMapOvr>
     <a:masterClrMapping/>
   </p:clrMapOvr>
-  <p:timing>
-    <p:tnLst>
-      <p:par>
-        <p:cTn id="1" dur="indefinite" restart="never" nodeType="tmRoot"/>
-      </p:par>
-    </p:tnLst>
-  </p:timing>
 </p:sld>
 </file>
 
@@ -5701,18 +5626,13 @@
           <a:lstStyle/>
           <a:p>
             <a:r>
-              <a:rPr lang="en-US" altLang="ko-KR" dirty="0" smtClean="0"/>
+              <a:rPr lang="en-US" altLang="ko-KR" dirty="0"/>
               <a:t> </a:t>
             </a:r>
             <a:r>
               <a:rPr lang="ko-KR" altLang="en-US" dirty="0"/>
-              <a:t> </a:t>
-            </a:r>
-            <a:r>
-              <a:rPr lang="ko-KR" altLang="en-US" dirty="0" smtClean="0"/>
-              <a:t>웹 애플리케이션 이해하기</a:t>
-            </a:r>
-            <a:endParaRPr lang="ko-KR" altLang="en-US" dirty="0"/>
+              <a:t> 웹 애플리케이션 이해하기</a:t>
+            </a:r>
           </a:p>
         </p:txBody>
       </p:sp>
@@ -5914,23 +5834,23 @@
               <a:buChar char="u"/>
             </a:pPr>
             <a:r>
-              <a:rPr lang="ko-KR" altLang="en-US" sz="2000" b="1" dirty="0" smtClean="0"/>
+              <a:rPr lang="ko-KR" altLang="en-US" sz="2000" b="1" dirty="0"/>
               <a:t> 웹 프로젝트</a:t>
             </a:r>
             <a:r>
-              <a:rPr lang="en-US" altLang="ko-KR" sz="2000" b="1" dirty="0" smtClean="0"/>
+              <a:rPr lang="en-US" altLang="ko-KR" sz="2000" b="1" dirty="0"/>
               <a:t>(</a:t>
             </a:r>
             <a:r>
-              <a:rPr lang="ko-KR" altLang="en-US" sz="2000" b="1" dirty="0" smtClean="0"/>
+              <a:rPr lang="ko-KR" altLang="en-US" sz="2000" b="1" dirty="0"/>
               <a:t>웹 애플리케이션</a:t>
             </a:r>
             <a:r>
-              <a:rPr lang="en-US" altLang="ko-KR" sz="2000" b="1" dirty="0" smtClean="0"/>
+              <a:rPr lang="en-US" altLang="ko-KR" sz="2000" b="1" dirty="0"/>
               <a:t>)</a:t>
             </a:r>
             <a:r>
-              <a:rPr lang="ko-KR" altLang="en-US" sz="2000" b="1" dirty="0" smtClean="0"/>
+              <a:rPr lang="ko-KR" altLang="en-US" sz="2000" b="1" dirty="0"/>
               <a:t> 만들고 실행하기</a:t>
             </a:r>
             <a:endParaRPr lang="en-US" altLang="ko-KR" sz="2000" b="1" dirty="0"/>
@@ -5978,7 +5898,7 @@
           <a:lstStyle/>
           <a:p>
             <a:r>
-              <a:rPr lang="en-US" altLang="ko-KR" sz="1600" dirty="0" smtClean="0"/>
+              <a:rPr lang="en-US" altLang="ko-KR" sz="1600" dirty="0"/>
               <a:t>File &gt; New &gt; Dynamic Web Project</a:t>
             </a:r>
             <a:endParaRPr lang="ko-KR" altLang="en-US" sz="1600" dirty="0"/>
@@ -6132,7 +6052,7 @@
           <a:p>
             <a:pPr algn="ctr"/>
             <a:r>
-              <a:rPr lang="ko-KR" altLang="en-US" sz="1600" dirty="0" err="1" smtClean="0">
+              <a:rPr lang="ko-KR" altLang="en-US" sz="1600" dirty="0" err="1">
                 <a:solidFill>
                   <a:sysClr val="windowText" lastClr="000000"/>
                 </a:solidFill>
@@ -6140,14 +6060,14 @@
               <a:t>톰캣</a:t>
             </a:r>
             <a:r>
-              <a:rPr lang="ko-KR" altLang="en-US" sz="1600" dirty="0" smtClean="0">
+              <a:rPr lang="ko-KR" altLang="en-US" sz="1600" dirty="0">
                 <a:solidFill>
                   <a:sysClr val="windowText" lastClr="000000"/>
                 </a:solidFill>
               </a:rPr>
               <a:t> 서버 설정</a:t>
             </a:r>
-            <a:endParaRPr lang="en-US" altLang="ko-KR" sz="1600" dirty="0" smtClean="0">
+            <a:endParaRPr lang="en-US" altLang="ko-KR" sz="1600" dirty="0">
               <a:solidFill>
                 <a:sysClr val="windowText" lastClr="000000"/>
               </a:solidFill>
@@ -6292,14 +6212,14 @@
           <a:p>
             <a:pPr algn="ctr"/>
             <a:r>
-              <a:rPr lang="ko-KR" altLang="en-US" sz="1600" dirty="0" smtClean="0">
+              <a:rPr lang="ko-KR" altLang="en-US" sz="1600" dirty="0">
                 <a:solidFill>
                   <a:sysClr val="windowText" lastClr="000000"/>
                 </a:solidFill>
               </a:rPr>
               <a:t>프로젝트 이름</a:t>
             </a:r>
-            <a:endParaRPr lang="en-US" altLang="ko-KR" sz="1600" dirty="0" smtClean="0">
+            <a:endParaRPr lang="en-US" altLang="ko-KR" sz="1600" dirty="0">
               <a:solidFill>
                 <a:sysClr val="windowText" lastClr="000000"/>
               </a:solidFill>
@@ -6533,7 +6453,7 @@
           <a:p>
             <a:pPr algn="ctr"/>
             <a:r>
-              <a:rPr lang="en-US" altLang="ko-KR" sz="1400" dirty="0" smtClean="0">
+              <a:rPr lang="en-US" altLang="ko-KR" sz="1400" dirty="0">
                 <a:solidFill>
                   <a:sysClr val="windowText" lastClr="000000"/>
                 </a:solidFill>
@@ -6541,14 +6461,14 @@
               <a:t>web.xml </a:t>
             </a:r>
             <a:r>
-              <a:rPr lang="ko-KR" altLang="en-US" sz="1400" dirty="0" smtClean="0">
+              <a:rPr lang="ko-KR" altLang="en-US" sz="1400" dirty="0">
                 <a:solidFill>
                   <a:sysClr val="windowText" lastClr="000000"/>
                 </a:solidFill>
               </a:rPr>
               <a:t>체크</a:t>
             </a:r>
-            <a:endParaRPr lang="en-US" altLang="ko-KR" sz="1400" dirty="0" smtClean="0">
+            <a:endParaRPr lang="en-US" altLang="ko-KR" sz="1400" dirty="0">
               <a:solidFill>
                 <a:sysClr val="windowText" lastClr="000000"/>
               </a:solidFill>
@@ -6617,18 +6537,13 @@
           <a:p>
             <a:pPr algn="ctr"/>
             <a:r>
-              <a:rPr lang="ko-KR" altLang="en-US" dirty="0" smtClean="0">
+              <a:rPr lang="ko-KR" altLang="en-US" dirty="0">
                 <a:solidFill>
                   <a:srgbClr val="C00000"/>
                 </a:solidFill>
               </a:rPr>
               <a:t>①</a:t>
             </a:r>
-            <a:endParaRPr lang="ko-KR" altLang="en-US" dirty="0">
-              <a:solidFill>
-                <a:srgbClr val="C00000"/>
-              </a:solidFill>
-            </a:endParaRPr>
           </a:p>
         </p:txBody>
       </p:sp>
@@ -6690,18 +6605,13 @@
           <a:p>
             <a:pPr algn="ctr"/>
             <a:r>
-              <a:rPr lang="ko-KR" altLang="en-US" dirty="0" smtClean="0">
+              <a:rPr lang="ko-KR" altLang="en-US" dirty="0">
                 <a:solidFill>
                   <a:srgbClr val="C00000"/>
                 </a:solidFill>
               </a:rPr>
               <a:t>③</a:t>
             </a:r>
-            <a:endParaRPr lang="ko-KR" altLang="en-US" dirty="0">
-              <a:solidFill>
-                <a:srgbClr val="C00000"/>
-              </a:solidFill>
-            </a:endParaRPr>
           </a:p>
         </p:txBody>
       </p:sp>
@@ -6763,18 +6673,13 @@
           <a:p>
             <a:pPr algn="ctr"/>
             <a:r>
-              <a:rPr lang="ko-KR" altLang="en-US" dirty="0" smtClean="0">
+              <a:rPr lang="ko-KR" altLang="en-US" dirty="0">
                 <a:solidFill>
                   <a:srgbClr val="C00000"/>
                 </a:solidFill>
               </a:rPr>
               <a:t>⑤</a:t>
             </a:r>
-            <a:endParaRPr lang="ko-KR" altLang="en-US" dirty="0">
-              <a:solidFill>
-                <a:srgbClr val="C00000"/>
-              </a:solidFill>
-            </a:endParaRPr>
           </a:p>
         </p:txBody>
       </p:sp>
@@ -6788,13 +6693,6 @@
   <p:clrMapOvr>
     <a:masterClrMapping/>
   </p:clrMapOvr>
-  <p:timing>
-    <p:tnLst>
-      <p:par>
-        <p:cTn id="1" dur="indefinite" restart="never" nodeType="tmRoot"/>
-      </p:par>
-    </p:tnLst>
-  </p:timing>
 </p:sld>
 </file>
 
@@ -6836,18 +6734,13 @@
           <a:lstStyle/>
           <a:p>
             <a:r>
-              <a:rPr lang="en-US" altLang="ko-KR" dirty="0" smtClean="0"/>
+              <a:rPr lang="en-US" altLang="ko-KR" dirty="0"/>
               <a:t> </a:t>
             </a:r>
             <a:r>
               <a:rPr lang="ko-KR" altLang="en-US" dirty="0"/>
-              <a:t> </a:t>
-            </a:r>
-            <a:r>
-              <a:rPr lang="ko-KR" altLang="en-US" dirty="0" smtClean="0"/>
-              <a:t>웹 애플리케이션 이해하기</a:t>
-            </a:r>
-            <a:endParaRPr lang="ko-KR" altLang="en-US" dirty="0"/>
+              <a:t> 웹 애플리케이션 이해하기</a:t>
+            </a:r>
           </a:p>
         </p:txBody>
       </p:sp>
@@ -7049,19 +6942,19 @@
               <a:buChar char="§"/>
             </a:pPr>
             <a:r>
-              <a:rPr lang="ko-KR" altLang="en-US" sz="2000" b="1" dirty="0" smtClean="0"/>
+              <a:rPr lang="ko-KR" altLang="en-US" sz="2000" b="1" dirty="0"/>
               <a:t> </a:t>
             </a:r>
             <a:r>
-              <a:rPr lang="en-US" altLang="ko-KR" sz="2000" b="1" dirty="0" err="1" smtClean="0"/>
+              <a:rPr lang="en-US" altLang="ko-KR" sz="2000" b="1" dirty="0" err="1"/>
               <a:t>Jsp</a:t>
             </a:r>
             <a:r>
-              <a:rPr lang="en-US" altLang="ko-KR" sz="2000" b="1" dirty="0" smtClean="0"/>
+              <a:rPr lang="en-US" altLang="ko-KR" sz="2000" b="1" dirty="0"/>
               <a:t> </a:t>
             </a:r>
             <a:r>
-              <a:rPr lang="ko-KR" altLang="en-US" sz="2000" b="1" dirty="0" smtClean="0"/>
+              <a:rPr lang="ko-KR" altLang="en-US" sz="2000" b="1" dirty="0"/>
               <a:t>파일 만들기</a:t>
             </a:r>
             <a:endParaRPr lang="en-US" altLang="ko-KR" sz="2000" b="1" dirty="0"/>
@@ -7105,11 +6998,11 @@
           <a:lstStyle/>
           <a:p>
             <a:r>
-              <a:rPr lang="en-US" altLang="ko-KR" sz="1600" dirty="0" err="1" smtClean="0"/>
+              <a:rPr lang="en-US" altLang="ko-KR" sz="1600" dirty="0" err="1"/>
               <a:t>webapp</a:t>
             </a:r>
             <a:r>
-              <a:rPr lang="en-US" altLang="ko-KR" sz="1600" dirty="0" smtClean="0"/>
+              <a:rPr lang="en-US" altLang="ko-KR" sz="1600" dirty="0"/>
               <a:t> &gt; New &gt; JSP File</a:t>
             </a:r>
             <a:endParaRPr lang="ko-KR" altLang="en-US" sz="1600" dirty="0"/>
@@ -7213,11 +7106,11 @@
           <a:lstStyle/>
           <a:p>
             <a:r>
-              <a:rPr lang="en-US" altLang="ko-KR" sz="1600" dirty="0" smtClean="0"/>
+              <a:rPr lang="en-US" altLang="ko-KR" sz="1600" dirty="0"/>
               <a:t>File name – </a:t>
             </a:r>
             <a:r>
-              <a:rPr lang="en-US" altLang="ko-KR" sz="1600" dirty="0" err="1" smtClean="0"/>
+              <a:rPr lang="en-US" altLang="ko-KR" sz="1600" dirty="0" err="1"/>
               <a:t>hello.jsp</a:t>
             </a:r>
             <a:endParaRPr lang="ko-KR" altLang="en-US" sz="1600" dirty="0"/>
@@ -7234,13 +7127,6 @@
   <p:clrMapOvr>
     <a:masterClrMapping/>
   </p:clrMapOvr>
-  <p:timing>
-    <p:tnLst>
-      <p:par>
-        <p:cTn id="1" dur="indefinite" restart="never" nodeType="tmRoot"/>
-      </p:par>
-    </p:tnLst>
-  </p:timing>
 </p:sld>
 </file>
 
@@ -7313,18 +7199,13 @@
           <a:lstStyle/>
           <a:p>
             <a:r>
-              <a:rPr lang="en-US" altLang="ko-KR" dirty="0" smtClean="0"/>
+              <a:rPr lang="en-US" altLang="ko-KR" dirty="0"/>
               <a:t> </a:t>
             </a:r>
             <a:r>
               <a:rPr lang="ko-KR" altLang="en-US" dirty="0"/>
-              <a:t> </a:t>
-            </a:r>
-            <a:r>
-              <a:rPr lang="ko-KR" altLang="en-US" dirty="0" smtClean="0"/>
-              <a:t>웹 애플리케이션 이해하기</a:t>
-            </a:r>
-            <a:endParaRPr lang="ko-KR" altLang="en-US" dirty="0"/>
+              <a:t> 웹 애플리케이션 이해하기</a:t>
+            </a:r>
           </a:p>
         </p:txBody>
       </p:sp>
@@ -7526,19 +7407,19 @@
               <a:buChar char="§"/>
             </a:pPr>
             <a:r>
-              <a:rPr lang="ko-KR" altLang="en-US" sz="2000" b="1" dirty="0" smtClean="0"/>
+              <a:rPr lang="ko-KR" altLang="en-US" sz="2000" b="1" dirty="0"/>
               <a:t> </a:t>
             </a:r>
             <a:r>
-              <a:rPr lang="en-US" altLang="ko-KR" sz="2000" b="1" dirty="0" err="1" smtClean="0"/>
+              <a:rPr lang="en-US" altLang="ko-KR" sz="2000" b="1" dirty="0" err="1"/>
               <a:t>Jsp</a:t>
             </a:r>
             <a:r>
-              <a:rPr lang="en-US" altLang="ko-KR" sz="2000" b="1" dirty="0" smtClean="0"/>
+              <a:rPr lang="en-US" altLang="ko-KR" sz="2000" b="1" dirty="0"/>
               <a:t> </a:t>
             </a:r>
             <a:r>
-              <a:rPr lang="ko-KR" altLang="en-US" sz="2000" b="1" dirty="0" smtClean="0"/>
+              <a:rPr lang="ko-KR" altLang="en-US" sz="2000" b="1" dirty="0"/>
               <a:t>파일 만들기</a:t>
             </a:r>
             <a:endParaRPr lang="en-US" altLang="ko-KR" sz="2000" b="1" dirty="0"/>
@@ -7656,7 +7537,7 @@
               </a:lnSpc>
             </a:pPr>
             <a:r>
-              <a:rPr lang="en-US" altLang="ko-KR" sz="1600" b="1" dirty="0" smtClean="0">
+              <a:rPr lang="en-US" altLang="ko-KR" sz="1600" b="1" dirty="0">
                 <a:solidFill>
                   <a:srgbClr val="C00000"/>
                 </a:solidFill>
@@ -7664,7 +7545,7 @@
               <a:t>&lt;%@.. %&gt;</a:t>
             </a:r>
             <a:r>
-              <a:rPr lang="ko-KR" altLang="en-US" sz="1600" dirty="0" smtClean="0">
+              <a:rPr lang="ko-KR" altLang="en-US" sz="1600" dirty="0">
                 <a:solidFill>
                   <a:srgbClr val="002060"/>
                 </a:solidFill>
@@ -7672,7 +7553,7 @@
               <a:t>란 지시어</a:t>
             </a:r>
             <a:r>
-              <a:rPr lang="en-US" altLang="ko-KR" sz="1600" dirty="0" smtClean="0">
+              <a:rPr lang="en-US" altLang="ko-KR" sz="1600" dirty="0">
                 <a:solidFill>
                   <a:srgbClr val="002060"/>
                 </a:solidFill>
@@ -7680,7 +7561,7 @@
               <a:t>(</a:t>
             </a:r>
             <a:r>
-              <a:rPr lang="ko-KR" altLang="en-US" sz="1600" dirty="0" err="1" smtClean="0">
+              <a:rPr lang="ko-KR" altLang="en-US" sz="1600" dirty="0" err="1">
                 <a:solidFill>
                   <a:srgbClr val="002060"/>
                 </a:solidFill>
@@ -7688,7 +7569,7 @@
               <a:t>디렉티브태그</a:t>
             </a:r>
             <a:r>
-              <a:rPr lang="en-US" altLang="ko-KR" sz="1600" dirty="0" smtClean="0">
+              <a:rPr lang="en-US" altLang="ko-KR" sz="1600" dirty="0">
                 <a:solidFill>
                   <a:srgbClr val="002060"/>
                 </a:solidFill>
@@ -7696,7 +7577,7 @@
               <a:t>)</a:t>
             </a:r>
             <a:r>
-              <a:rPr lang="ko-KR" altLang="en-US" sz="1600" dirty="0" smtClean="0">
+              <a:rPr lang="ko-KR" altLang="en-US" sz="1600" dirty="0">
                 <a:solidFill>
                   <a:srgbClr val="002060"/>
                 </a:solidFill>
@@ -7704,7 +7585,7 @@
               <a:t>로 </a:t>
             </a:r>
             <a:r>
-              <a:rPr lang="en-US" altLang="ko-KR" sz="1600" dirty="0" err="1" smtClean="0">
+              <a:rPr lang="en-US" altLang="ko-KR" sz="1600" dirty="0" err="1">
                 <a:solidFill>
                   <a:srgbClr val="002060"/>
                 </a:solidFill>
@@ -7712,7 +7593,7 @@
               <a:t>jsp</a:t>
             </a:r>
             <a:r>
-              <a:rPr lang="en-US" altLang="ko-KR" sz="1600" dirty="0" smtClean="0">
+              <a:rPr lang="en-US" altLang="ko-KR" sz="1600" dirty="0">
                 <a:solidFill>
                   <a:srgbClr val="002060"/>
                 </a:solidFill>
@@ -7720,7 +7601,7 @@
               <a:t> </a:t>
             </a:r>
             <a:r>
-              <a:rPr lang="ko-KR" altLang="en-US" sz="1600" dirty="0" smtClean="0">
+              <a:rPr lang="ko-KR" altLang="en-US" sz="1600" dirty="0">
                 <a:solidFill>
                   <a:srgbClr val="002060"/>
                 </a:solidFill>
@@ -7728,7 +7609,7 @@
               <a:t>파일의 정보</a:t>
             </a:r>
             <a:r>
-              <a:rPr lang="en-US" altLang="ko-KR" sz="1600" dirty="0" smtClean="0">
+              <a:rPr lang="en-US" altLang="ko-KR" sz="1600" dirty="0">
                 <a:solidFill>
                   <a:srgbClr val="002060"/>
                 </a:solidFill>
@@ -7736,7 +7617,7 @@
               <a:t>- </a:t>
             </a:r>
             <a:r>
-              <a:rPr lang="ko-KR" altLang="en-US" sz="1600" dirty="0" smtClean="0">
+              <a:rPr lang="ko-KR" altLang="en-US" sz="1600" dirty="0">
                 <a:solidFill>
                   <a:srgbClr val="002060"/>
                 </a:solidFill>
@@ -7744,7 +7625,7 @@
               <a:t>언어</a:t>
             </a:r>
             <a:r>
-              <a:rPr lang="en-US" altLang="ko-KR" sz="1600" dirty="0" smtClean="0">
+              <a:rPr lang="en-US" altLang="ko-KR" sz="1600" dirty="0">
                 <a:solidFill>
                   <a:srgbClr val="002060"/>
                 </a:solidFill>
@@ -7752,7 +7633,7 @@
               <a:t>, </a:t>
             </a:r>
             <a:r>
-              <a:rPr lang="ko-KR" altLang="en-US" sz="1600" dirty="0" smtClean="0">
+              <a:rPr lang="ko-KR" altLang="en-US" sz="1600" dirty="0">
                 <a:solidFill>
                   <a:srgbClr val="002060"/>
                 </a:solidFill>
@@ -7760,7 +7641,7 @@
               <a:t>문서유형</a:t>
             </a:r>
             <a:r>
-              <a:rPr lang="en-US" altLang="ko-KR" sz="1600" dirty="0" smtClean="0">
+              <a:rPr lang="en-US" altLang="ko-KR" sz="1600" dirty="0">
                 <a:solidFill>
                   <a:srgbClr val="002060"/>
                 </a:solidFill>
@@ -7768,7 +7649,7 @@
               <a:t>, </a:t>
             </a:r>
             <a:r>
-              <a:rPr lang="ko-KR" altLang="en-US" sz="1600" dirty="0" err="1" smtClean="0">
+              <a:rPr lang="ko-KR" altLang="en-US" sz="1600" dirty="0" err="1">
                 <a:solidFill>
                   <a:srgbClr val="002060"/>
                 </a:solidFill>
@@ -7776,18 +7657,13 @@
               <a:t>인코딩등의</a:t>
             </a:r>
             <a:r>
-              <a:rPr lang="ko-KR" altLang="en-US" sz="1600" dirty="0" smtClean="0">
+              <a:rPr lang="ko-KR" altLang="en-US" sz="1600" dirty="0">
                 <a:solidFill>
                   <a:srgbClr val="002060"/>
                 </a:solidFill>
               </a:rPr>
               <a:t> 정보를 서버에게 알려줌</a:t>
             </a:r>
-            <a:endParaRPr lang="ko-KR" altLang="en-US" sz="1600" dirty="0">
-              <a:solidFill>
-                <a:srgbClr val="002060"/>
-              </a:solidFill>
-            </a:endParaRPr>
           </a:p>
         </p:txBody>
       </p:sp>
@@ -7801,13 +7677,6 @@
   <p:clrMapOvr>
     <a:masterClrMapping/>
   </p:clrMapOvr>
-  <p:timing>
-    <p:tnLst>
-      <p:par>
-        <p:cTn id="1" dur="indefinite" restart="never" nodeType="tmRoot"/>
-      </p:par>
-    </p:tnLst>
-  </p:timing>
 </p:sld>
 </file>
 
@@ -7849,18 +7718,13 @@
           <a:lstStyle/>
           <a:p>
             <a:r>
-              <a:rPr lang="en-US" altLang="ko-KR" dirty="0" smtClean="0"/>
+              <a:rPr lang="en-US" altLang="ko-KR" dirty="0"/>
               <a:t> </a:t>
             </a:r>
             <a:r>
               <a:rPr lang="ko-KR" altLang="en-US" dirty="0"/>
-              <a:t> </a:t>
-            </a:r>
-            <a:r>
-              <a:rPr lang="ko-KR" altLang="en-US" dirty="0" smtClean="0"/>
-              <a:t>웹 애플리케이션 이해하기</a:t>
-            </a:r>
-            <a:endParaRPr lang="ko-KR" altLang="en-US" dirty="0"/>
+              <a:t> 웹 애플리케이션 이해하기</a:t>
+            </a:r>
           </a:p>
         </p:txBody>
       </p:sp>
@@ -8062,7 +7926,7 @@
               <a:buChar char="§"/>
             </a:pPr>
             <a:r>
-              <a:rPr lang="ko-KR" altLang="en-US" sz="2000" b="1" dirty="0" smtClean="0"/>
+              <a:rPr lang="ko-KR" altLang="en-US" sz="2000" b="1" dirty="0"/>
               <a:t> 서버 실행</a:t>
             </a:r>
             <a:endParaRPr lang="en-US" altLang="ko-KR" sz="2000" b="1" dirty="0"/>
@@ -8137,23 +8001,23 @@
           <a:lstStyle/>
           <a:p>
             <a:r>
-              <a:rPr lang="en-US" altLang="ko-KR" dirty="0" err="1" smtClean="0"/>
+              <a:rPr lang="en-US" altLang="ko-KR" dirty="0" err="1"/>
               <a:t>Hello.jsp</a:t>
             </a:r>
             <a:r>
-              <a:rPr lang="en-US" altLang="ko-KR" dirty="0" smtClean="0"/>
+              <a:rPr lang="en-US" altLang="ko-KR" dirty="0"/>
               <a:t> &gt; </a:t>
             </a:r>
             <a:r>
-              <a:rPr lang="ko-KR" altLang="en-US" dirty="0" err="1" smtClean="0"/>
+              <a:rPr lang="ko-KR" altLang="en-US" dirty="0" err="1"/>
               <a:t>우클릭</a:t>
             </a:r>
             <a:r>
-              <a:rPr lang="ko-KR" altLang="en-US" dirty="0" smtClean="0"/>
+              <a:rPr lang="ko-KR" altLang="en-US" dirty="0"/>
               <a:t> </a:t>
             </a:r>
             <a:r>
-              <a:rPr lang="en-US" altLang="ko-KR" dirty="0" smtClean="0"/>
+              <a:rPr lang="en-US" altLang="ko-KR" dirty="0"/>
               <a:t>&gt; Run As &gt; Run on Server</a:t>
             </a:r>
             <a:endParaRPr lang="ko-KR" altLang="en-US" dirty="0"/>
@@ -8170,13 +8034,6 @@
   <p:clrMapOvr>
     <a:masterClrMapping/>
   </p:clrMapOvr>
-  <p:timing>
-    <p:tnLst>
-      <p:par>
-        <p:cTn id="1" dur="indefinite" restart="never" nodeType="tmRoot"/>
-      </p:par>
-    </p:tnLst>
-  </p:timing>
 </p:sld>
 </file>
 
@@ -8218,18 +8075,13 @@
           <a:lstStyle/>
           <a:p>
             <a:r>
-              <a:rPr lang="en-US" altLang="ko-KR" dirty="0" smtClean="0"/>
+              <a:rPr lang="en-US" altLang="ko-KR" dirty="0"/>
               <a:t> </a:t>
             </a:r>
             <a:r>
               <a:rPr lang="ko-KR" altLang="en-US" dirty="0"/>
-              <a:t> </a:t>
-            </a:r>
-            <a:r>
-              <a:rPr lang="ko-KR" altLang="en-US" dirty="0" smtClean="0"/>
-              <a:t>웹 애플리케이션 이해하기</a:t>
-            </a:r>
-            <a:endParaRPr lang="ko-KR" altLang="en-US" dirty="0"/>
+              <a:t> 웹 애플리케이션 이해하기</a:t>
+            </a:r>
           </a:p>
         </p:txBody>
       </p:sp>
@@ -8431,7 +8283,7 @@
               <a:buChar char="§"/>
             </a:pPr>
             <a:r>
-              <a:rPr lang="ko-KR" altLang="en-US" sz="2000" b="1" dirty="0" smtClean="0"/>
+              <a:rPr lang="ko-KR" altLang="en-US" sz="2000" b="1" dirty="0"/>
               <a:t> 웹 브라우저 실행</a:t>
             </a:r>
             <a:endParaRPr lang="en-US" altLang="ko-KR" sz="2000" b="1" dirty="0"/>
@@ -8493,13 +8345,6 @@
   <p:clrMapOvr>
     <a:masterClrMapping/>
   </p:clrMapOvr>
-  <p:timing>
-    <p:tnLst>
-      <p:par>
-        <p:cTn id="1" dur="indefinite" restart="never" nodeType="tmRoot"/>
-      </p:par>
-    </p:tnLst>
-  </p:timing>
 </p:sld>
 </file>
 
@@ -8578,18 +8423,13 @@
           <a:lstStyle/>
           <a:p>
             <a:r>
-              <a:rPr lang="en-US" altLang="ko-KR" dirty="0" smtClean="0"/>
+              <a:rPr lang="en-US" altLang="ko-KR" dirty="0"/>
               <a:t> </a:t>
             </a:r>
             <a:r>
               <a:rPr lang="ko-KR" altLang="en-US" dirty="0"/>
-              <a:t> </a:t>
-            </a:r>
-            <a:r>
-              <a:rPr lang="ko-KR" altLang="en-US" dirty="0" smtClean="0"/>
-              <a:t>웹 애플리케이션 이해하기</a:t>
-            </a:r>
-            <a:endParaRPr lang="ko-KR" altLang="en-US" dirty="0"/>
+              <a:t> 웹 애플리케이션 이해하기</a:t>
+            </a:r>
           </a:p>
         </p:txBody>
       </p:sp>
@@ -8791,18 +8631,18 @@
               <a:buChar char="§"/>
             </a:pPr>
             <a:r>
-              <a:rPr lang="ko-KR" altLang="en-US" sz="2000" b="1" dirty="0" smtClean="0"/>
+              <a:rPr lang="ko-KR" altLang="en-US" sz="2000" b="1" dirty="0"/>
               <a:t> 웹 브라우저 설정 </a:t>
             </a:r>
             <a:r>
-              <a:rPr lang="en-US" altLang="ko-KR" sz="2000" b="1" dirty="0" smtClean="0"/>
+              <a:rPr lang="en-US" altLang="ko-KR" sz="2000" b="1" dirty="0"/>
               <a:t>- </a:t>
             </a:r>
             <a:r>
-              <a:rPr lang="ko-KR" altLang="en-US" sz="2000" b="1" dirty="0" smtClean="0"/>
+              <a:rPr lang="ko-KR" altLang="en-US" sz="2000" b="1" dirty="0"/>
               <a:t>크롬</a:t>
             </a:r>
-            <a:endParaRPr lang="en-US" altLang="ko-KR" sz="2000" b="1" dirty="0" smtClean="0"/>
+            <a:endParaRPr lang="en-US" altLang="ko-KR" sz="2000" b="1" dirty="0"/>
           </a:p>
         </p:txBody>
       </p:sp>
@@ -8829,14 +8669,13 @@
           <a:lstStyle/>
           <a:p>
             <a:r>
-              <a:rPr lang="en-US" altLang="ko-KR" sz="1600" dirty="0" smtClean="0"/>
+              <a:rPr lang="en-US" altLang="ko-KR" sz="1600" dirty="0"/>
               <a:t>General &gt; Web Browser &gt; Chrome </a:t>
             </a:r>
             <a:r>
-              <a:rPr lang="ko-KR" altLang="en-US" sz="1600" dirty="0" smtClean="0"/>
+              <a:rPr lang="ko-KR" altLang="en-US" sz="1600" dirty="0"/>
               <a:t> </a:t>
             </a:r>
-            <a:endParaRPr lang="ko-KR" altLang="en-US" sz="1600" dirty="0"/>
           </a:p>
         </p:txBody>
       </p:sp>
@@ -8960,13 +8799,6 @@
   <p:clrMapOvr>
     <a:masterClrMapping/>
   </p:clrMapOvr>
-  <p:timing>
-    <p:tnLst>
-      <p:par>
-        <p:cTn id="1" dur="indefinite" restart="never" nodeType="tmRoot"/>
-      </p:par>
-    </p:tnLst>
-  </p:timing>
 </p:sld>
 </file>
 
@@ -9039,18 +8871,13 @@
           <a:lstStyle/>
           <a:p>
             <a:r>
-              <a:rPr lang="en-US" altLang="ko-KR" dirty="0" smtClean="0"/>
+              <a:rPr lang="en-US" altLang="ko-KR" dirty="0"/>
               <a:t> </a:t>
             </a:r>
             <a:r>
               <a:rPr lang="ko-KR" altLang="en-US" dirty="0"/>
-              <a:t> </a:t>
-            </a:r>
-            <a:r>
-              <a:rPr lang="ko-KR" altLang="en-US" dirty="0" smtClean="0"/>
-              <a:t>웹 애플리케이션 이해하기</a:t>
-            </a:r>
-            <a:endParaRPr lang="ko-KR" altLang="en-US" dirty="0"/>
+              <a:t> 웹 애플리케이션 이해하기</a:t>
+            </a:r>
           </a:p>
         </p:txBody>
       </p:sp>
@@ -9252,10 +9079,10 @@
               <a:buChar char="§"/>
             </a:pPr>
             <a:r>
-              <a:rPr lang="ko-KR" altLang="en-US" sz="2000" b="1" dirty="0" smtClean="0"/>
+              <a:rPr lang="ko-KR" altLang="en-US" sz="2000" b="1" dirty="0"/>
               <a:t> 현재 날짜와 시간 출력</a:t>
             </a:r>
-            <a:endParaRPr lang="en-US" altLang="ko-KR" sz="2000" b="1" dirty="0" smtClean="0"/>
+            <a:endParaRPr lang="en-US" altLang="ko-KR" sz="2000" b="1" dirty="0"/>
           </a:p>
         </p:txBody>
       </p:sp>
@@ -9304,7 +9131,7 @@
               </a:lnSpc>
             </a:pPr>
             <a:r>
-              <a:rPr lang="en-US" altLang="ko-KR" sz="1600" b="1" dirty="0" smtClean="0">
+              <a:rPr lang="en-US" altLang="ko-KR" sz="1600" b="1" dirty="0">
                 <a:solidFill>
                   <a:srgbClr val="C00000"/>
                 </a:solidFill>
@@ -9312,7 +9139,7 @@
               <a:t>&lt;%=.. %&gt;</a:t>
             </a:r>
             <a:r>
-              <a:rPr lang="ko-KR" altLang="en-US" sz="1600" dirty="0" smtClean="0">
+              <a:rPr lang="ko-KR" altLang="en-US" sz="1600" dirty="0">
                 <a:solidFill>
                   <a:srgbClr val="002060"/>
                 </a:solidFill>
@@ -9320,7 +9147,7 @@
               <a:t>란 </a:t>
             </a:r>
             <a:r>
-              <a:rPr lang="en-US" altLang="ko-KR" sz="1600" dirty="0" smtClean="0">
+              <a:rPr lang="en-US" altLang="ko-KR" sz="1600" dirty="0">
                 <a:solidFill>
                   <a:srgbClr val="002060"/>
                 </a:solidFill>
@@ -9328,7 +9155,7 @@
               <a:t>Expression</a:t>
             </a:r>
             <a:r>
-              <a:rPr lang="ko-KR" altLang="en-US" sz="1600" dirty="0" smtClean="0">
+              <a:rPr lang="ko-KR" altLang="en-US" sz="1600" dirty="0">
                 <a:solidFill>
                   <a:srgbClr val="002060"/>
                 </a:solidFill>
@@ -9336,7 +9163,7 @@
               <a:t>이라고 하며</a:t>
             </a:r>
             <a:r>
-              <a:rPr lang="en-US" altLang="ko-KR" sz="1600" dirty="0" smtClean="0">
+              <a:rPr lang="en-US" altLang="ko-KR" sz="1600" dirty="0">
                 <a:solidFill>
                   <a:srgbClr val="002060"/>
                 </a:solidFill>
@@ -9344,7 +9171,7 @@
               <a:t>,</a:t>
             </a:r>
             <a:r>
-              <a:rPr lang="ko-KR" altLang="en-US" sz="1600" dirty="0" smtClean="0">
+              <a:rPr lang="ko-KR" altLang="en-US" sz="1600" dirty="0">
                 <a:solidFill>
                   <a:srgbClr val="002060"/>
                 </a:solidFill>
@@ -9352,7 +9179,7 @@
               <a:t>  </a:t>
             </a:r>
             <a:r>
-              <a:rPr lang="en-US" altLang="ko-KR" sz="1600" dirty="0" smtClean="0">
+              <a:rPr lang="en-US" altLang="ko-KR" sz="1600" dirty="0">
                 <a:solidFill>
                   <a:srgbClr val="002060"/>
                 </a:solidFill>
@@ -9360,7 +9187,7 @@
               <a:t>JSP</a:t>
             </a:r>
             <a:r>
-              <a:rPr lang="ko-KR" altLang="en-US" sz="1600" dirty="0" smtClean="0">
+              <a:rPr lang="ko-KR" altLang="en-US" sz="1600" dirty="0">
                 <a:solidFill>
                   <a:srgbClr val="002060"/>
                 </a:solidFill>
@@ -9368,7 +9195,7 @@
               <a:t>에서 출력을 위해 사용한다</a:t>
             </a:r>
             <a:r>
-              <a:rPr lang="en-US" altLang="ko-KR" sz="1600" dirty="0" smtClean="0">
+              <a:rPr lang="en-US" altLang="ko-KR" sz="1600" dirty="0">
                 <a:solidFill>
                   <a:srgbClr val="002060"/>
                 </a:solidFill>
@@ -9393,13 +9220,6 @@
   <p:clrMapOvr>
     <a:masterClrMapping/>
   </p:clrMapOvr>
-  <p:timing>
-    <p:tnLst>
-      <p:par>
-        <p:cTn id="1" dur="indefinite" restart="never" nodeType="tmRoot"/>
-      </p:par>
-    </p:tnLst>
-  </p:timing>
 </p:sld>
 </file>
 
@@ -9457,12 +9277,8 @@
           </a:lstStyle>
           <a:p>
             <a:r>
-              <a:rPr lang="en-US" altLang="ko-KR" dirty="0" smtClean="0"/>
-              <a:t> </a:t>
-            </a:r>
-            <a:r>
-              <a:rPr lang="en-US" altLang="ko-KR" dirty="0" smtClean="0"/>
-              <a:t>JSP(Java Server Page)</a:t>
+              <a:rPr lang="en-US" altLang="ko-KR" dirty="0"/>
+              <a:t> JSP(Java Server Page)</a:t>
             </a:r>
             <a:endParaRPr lang="ko-KR" altLang="en-US" dirty="0"/>
           </a:p>
@@ -9496,15 +9312,15 @@
               </a:lnSpc>
             </a:pPr>
             <a:r>
-              <a:rPr lang="en-US" altLang="ko-KR" sz="2000" b="1" dirty="0" smtClean="0"/>
+              <a:rPr lang="en-US" altLang="ko-KR" sz="2000" b="1" dirty="0"/>
               <a:t>1. JSP</a:t>
             </a:r>
             <a:r>
-              <a:rPr lang="ko-KR" altLang="en-US" sz="2000" b="1" dirty="0" smtClean="0"/>
+              <a:rPr lang="ko-KR" altLang="en-US" sz="2000" b="1" dirty="0"/>
               <a:t>란</a:t>
             </a:r>
             <a:r>
-              <a:rPr lang="en-US" altLang="ko-KR" sz="2000" b="1" dirty="0" smtClean="0"/>
+              <a:rPr lang="en-US" altLang="ko-KR" sz="2000" b="1" dirty="0"/>
               <a:t>?</a:t>
             </a:r>
           </a:p>
@@ -9556,7 +9372,7 @@
               </a:lnSpc>
             </a:pPr>
             <a:r>
-              <a:rPr lang="ko-KR" altLang="en-US" sz="1600" dirty="0" err="1" smtClean="0"/>
+              <a:rPr lang="ko-KR" altLang="en-US" sz="1600" dirty="0" err="1"/>
               <a:t>확장자</a:t>
             </a:r>
             <a:r>
@@ -9576,12 +9392,8 @@
               </a:lnSpc>
             </a:pPr>
             <a:r>
-              <a:rPr lang="ko-KR" altLang="en-US" sz="1600" dirty="0" smtClean="0"/>
-              <a:t>서버에서 </a:t>
-            </a:r>
-            <a:r>
               <a:rPr lang="ko-KR" altLang="en-US" sz="1600" dirty="0"/>
-              <a:t>실행되는 스크립트 기반 기술</a:t>
+              <a:t>서버에서 실행되는 스크립트 기반 기술</a:t>
             </a:r>
           </a:p>
           <a:p>
@@ -9591,12 +9403,8 @@
               </a:lnSpc>
             </a:pPr>
             <a:r>
-              <a:rPr lang="ko-KR" altLang="en-US" sz="1600" dirty="0" smtClean="0"/>
-              <a:t>클라이언트</a:t>
-            </a:r>
-            <a:r>
               <a:rPr lang="ko-KR" altLang="en-US" sz="1600" dirty="0"/>
-              <a:t>(브라우저)에게는 최종적으로 </a:t>
+              <a:t>클라이언트(브라우저)에게는 최종적으로 </a:t>
             </a:r>
             <a:r>
               <a:rPr lang="ko-KR" altLang="en-US" sz="1600" dirty="0" err="1"/>
@@ -9614,12 +9422,8 @@
               </a:lnSpc>
             </a:pPr>
             <a:r>
-              <a:rPr lang="ko-KR" altLang="en-US" sz="1600" dirty="0" smtClean="0"/>
-              <a:t>즉</a:t>
-            </a:r>
-            <a:r>
               <a:rPr lang="ko-KR" altLang="en-US" sz="1600" dirty="0"/>
-              <a:t>, JSP 파일은 HTML 안에서 </a:t>
+              <a:t>즉, JSP 파일은 HTML 안에서 </a:t>
             </a:r>
             <a:r>
               <a:rPr lang="ko-KR" altLang="en-US" sz="1600" dirty="0" err="1"/>
@@ -9627,15 +9431,7 @@
             </a:r>
             <a:r>
               <a:rPr lang="ko-KR" altLang="en-US" sz="1600" dirty="0"/>
-              <a:t> 코드를 삽입해서 동적으로 페이지를 생성하는 </a:t>
-            </a:r>
-            <a:r>
-              <a:rPr lang="ko-KR" altLang="en-US" sz="1600" dirty="0" smtClean="0"/>
-              <a:t>기술이다</a:t>
-            </a:r>
-            <a:r>
-              <a:rPr lang="ko-KR" altLang="en-US" sz="1600" dirty="0"/>
-              <a:t>.</a:t>
+              <a:t> 코드를 삽입해서 동적으로 페이지를 생성하는 기술이다.</a:t>
             </a:r>
           </a:p>
         </p:txBody>
@@ -9669,17 +9465,13 @@
             </a:pPr>
             <a:r>
               <a:rPr lang="en-US" altLang="ko-KR" sz="2000" b="1" dirty="0"/>
-              <a:t>2</a:t>
-            </a:r>
-            <a:r>
-              <a:rPr lang="en-US" altLang="ko-KR" sz="2000" b="1" dirty="0" smtClean="0"/>
-              <a:t>. JSP </a:t>
-            </a:r>
-            <a:r>
-              <a:rPr lang="ko-KR" altLang="en-US" sz="2000" b="1" dirty="0" smtClean="0"/>
+              <a:t>2. JSP </a:t>
+            </a:r>
+            <a:r>
+              <a:rPr lang="ko-KR" altLang="en-US" sz="2000" b="1" dirty="0"/>
               <a:t>동작 원리</a:t>
             </a:r>
-            <a:endParaRPr lang="en-US" altLang="ko-KR" sz="2000" b="1" dirty="0" smtClean="0"/>
+            <a:endParaRPr lang="en-US" altLang="ko-KR" sz="2000" b="1" dirty="0"/>
           </a:p>
         </p:txBody>
       </p:sp>
@@ -9710,7 +9502,7 @@
               </a:lnSpc>
             </a:pPr>
             <a:r>
-              <a:rPr lang="ko-KR" altLang="en-US" sz="1600" dirty="0" smtClean="0"/>
+              <a:rPr lang="ko-KR" altLang="en-US" sz="1600" dirty="0"/>
               <a:t>사용자가 </a:t>
             </a:r>
             <a:r>
@@ -9729,12 +9521,8 @@
               </a:lnSpc>
             </a:pPr>
             <a:r>
-              <a:rPr lang="ko-KR" altLang="en-US" sz="1600" dirty="0" smtClean="0"/>
-              <a:t>웹 </a:t>
-            </a:r>
-            <a:r>
               <a:rPr lang="ko-KR" altLang="en-US" sz="1600" dirty="0"/>
-              <a:t>컨테이너(</a:t>
+              <a:t>웹 컨테이너(</a:t>
             </a:r>
             <a:r>
               <a:rPr lang="ko-KR" altLang="en-US" sz="1600" dirty="0" err="1"/>
@@ -9776,12 +9564,8 @@
               </a:lnSpc>
             </a:pPr>
             <a:r>
-              <a:rPr lang="ko-KR" altLang="en-US" sz="1600" dirty="0" smtClean="0"/>
-              <a:t>예</a:t>
-            </a:r>
-            <a:r>
               <a:rPr lang="ko-KR" altLang="en-US" sz="1600" dirty="0"/>
-              <a:t>: hello_jsp.java</a:t>
+              <a:t>예: hello_jsp.java</a:t>
             </a:r>
           </a:p>
           <a:p>
@@ -9791,7 +9575,7 @@
               </a:lnSpc>
             </a:pPr>
             <a:r>
-              <a:rPr lang="ko-KR" altLang="en-US" sz="1600" dirty="0" smtClean="0"/>
+              <a:rPr lang="ko-KR" altLang="en-US" sz="1600" dirty="0"/>
               <a:t>변환된 </a:t>
             </a:r>
             <a:r>
@@ -9810,7 +9594,7 @@
               </a:lnSpc>
             </a:pPr>
             <a:r>
-              <a:rPr lang="ko-KR" altLang="en-US" sz="1600" dirty="0" smtClean="0"/>
+              <a:rPr lang="ko-KR" altLang="en-US" sz="1600" dirty="0"/>
               <a:t>결과 </a:t>
             </a:r>
             <a:r>
@@ -9834,13 +9618,6 @@
   <p:clrMapOvr>
     <a:masterClrMapping/>
   </p:clrMapOvr>
-  <p:timing>
-    <p:tnLst>
-      <p:par>
-        <p:cTn id="1" dur="indefinite" restart="never" nodeType="tmRoot"/>
-      </p:par>
-    </p:tnLst>
-  </p:timing>
 </p:sld>
 </file>
 
@@ -9882,18 +9659,13 @@
           <a:lstStyle/>
           <a:p>
             <a:r>
-              <a:rPr lang="en-US" altLang="ko-KR" dirty="0" smtClean="0"/>
+              <a:rPr lang="en-US" altLang="ko-KR" dirty="0"/>
               <a:t> </a:t>
             </a:r>
             <a:r>
               <a:rPr lang="ko-KR" altLang="en-US" dirty="0"/>
-              <a:t> </a:t>
-            </a:r>
-            <a:r>
-              <a:rPr lang="ko-KR" altLang="en-US" dirty="0" smtClean="0"/>
-              <a:t>웹 애플리케이션 이해하기</a:t>
-            </a:r>
-            <a:endParaRPr lang="ko-KR" altLang="en-US" dirty="0"/>
+              <a:t> 웹 애플리케이션 이해하기</a:t>
+            </a:r>
           </a:p>
         </p:txBody>
       </p:sp>
@@ -10095,10 +9867,10 @@
               <a:buChar char="§"/>
             </a:pPr>
             <a:r>
-              <a:rPr lang="ko-KR" altLang="en-US" sz="2000" b="1" dirty="0" smtClean="0"/>
+              <a:rPr lang="ko-KR" altLang="en-US" sz="2000" b="1" dirty="0"/>
               <a:t> 포트 번호 확인 및 변경</a:t>
             </a:r>
-            <a:endParaRPr lang="en-US" altLang="ko-KR" sz="2000" b="1" dirty="0" smtClean="0"/>
+            <a:endParaRPr lang="en-US" altLang="ko-KR" sz="2000" b="1" dirty="0"/>
           </a:p>
         </p:txBody>
       </p:sp>
@@ -10235,14 +10007,14 @@
           <a:p>
             <a:pPr algn="ctr"/>
             <a:r>
-              <a:rPr lang="ko-KR" altLang="en-US" sz="1600" dirty="0" smtClean="0">
+              <a:rPr lang="ko-KR" altLang="en-US" sz="1600" dirty="0">
                 <a:solidFill>
                   <a:sysClr val="windowText" lastClr="000000"/>
                 </a:solidFill>
               </a:rPr>
               <a:t>포트 번호</a:t>
             </a:r>
-            <a:endParaRPr lang="en-US" altLang="ko-KR" sz="1600" dirty="0" smtClean="0">
+            <a:endParaRPr lang="en-US" altLang="ko-KR" sz="1600" dirty="0">
               <a:solidFill>
                 <a:sysClr val="windowText" lastClr="000000"/>
               </a:solidFill>
@@ -10466,10 +10238,9 @@
           <a:lstStyle/>
           <a:p>
             <a:r>
-              <a:rPr lang="ko-KR" altLang="en-US" dirty="0" smtClean="0"/>
+              <a:rPr lang="ko-KR" altLang="en-US" dirty="0"/>
               <a:t>더블 클릭</a:t>
             </a:r>
-            <a:endParaRPr lang="ko-KR" altLang="en-US" dirty="0"/>
           </a:p>
         </p:txBody>
       </p:sp>
@@ -10483,13 +10254,6 @@
   <p:clrMapOvr>
     <a:masterClrMapping/>
   </p:clrMapOvr>
-  <p:timing>
-    <p:tnLst>
-      <p:par>
-        <p:cTn id="1" dur="indefinite" restart="never" nodeType="tmRoot"/>
-      </p:par>
-    </p:tnLst>
-  </p:timing>
 </p:sld>
 </file>
 
@@ -10531,18 +10295,13 @@
           <a:lstStyle/>
           <a:p>
             <a:r>
-              <a:rPr lang="en-US" altLang="ko-KR" dirty="0" smtClean="0"/>
+              <a:rPr lang="en-US" altLang="ko-KR" dirty="0"/>
               <a:t> </a:t>
             </a:r>
             <a:r>
               <a:rPr lang="ko-KR" altLang="en-US" dirty="0"/>
-              <a:t> </a:t>
-            </a:r>
-            <a:r>
-              <a:rPr lang="ko-KR" altLang="en-US" dirty="0" smtClean="0"/>
-              <a:t>웹 애플리케이션 이해하기</a:t>
-            </a:r>
-            <a:endParaRPr lang="ko-KR" altLang="en-US" dirty="0"/>
+              <a:t> 웹 애플리케이션 이해하기</a:t>
+            </a:r>
           </a:p>
         </p:txBody>
       </p:sp>
@@ -10744,22 +10503,21 @@
               <a:buChar char="§"/>
             </a:pPr>
             <a:r>
-              <a:rPr lang="ko-KR" altLang="en-US" sz="2000" b="1" dirty="0" smtClean="0"/>
+              <a:rPr lang="ko-KR" altLang="en-US" sz="2000" b="1" dirty="0"/>
               <a:t> 웹 컨텍스트 경로</a:t>
             </a:r>
             <a:r>
-              <a:rPr lang="en-US" altLang="ko-KR" sz="2000" b="1" dirty="0" smtClean="0"/>
+              <a:rPr lang="en-US" altLang="ko-KR" sz="2000" b="1" dirty="0"/>
               <a:t>(Path) </a:t>
             </a:r>
             <a:r>
-              <a:rPr lang="ko-KR" altLang="en-US" sz="2000" b="1" dirty="0" smtClean="0"/>
+              <a:rPr lang="ko-KR" altLang="en-US" sz="2000" b="1" dirty="0"/>
               <a:t>변경</a:t>
             </a:r>
             <a:r>
-              <a:rPr lang="en-US" altLang="ko-KR" sz="2000" b="1" dirty="0" smtClean="0"/>
+              <a:rPr lang="en-US" altLang="ko-KR" sz="2000" b="1" dirty="0"/>
               <a:t> </a:t>
             </a:r>
-            <a:endParaRPr lang="en-US" altLang="ko-KR" sz="2000" b="1" dirty="0"/>
           </a:p>
           <a:p>
             <a:pPr lvl="2">
@@ -10800,39 +10558,39 @@
           <a:lstStyle/>
           <a:p>
             <a:r>
-              <a:rPr lang="en-US" altLang="ko-KR" dirty="0" smtClean="0"/>
+              <a:rPr lang="en-US" altLang="ko-KR" dirty="0"/>
               <a:t>Tomcat v9.0 Server &gt; Modules &gt; Edit &gt; chap01 </a:t>
             </a:r>
             <a:r>
-              <a:rPr lang="ko-KR" altLang="en-US" dirty="0" smtClean="0"/>
+              <a:rPr lang="ko-KR" altLang="en-US" dirty="0"/>
               <a:t>지우고 </a:t>
             </a:r>
             <a:r>
-              <a:rPr lang="en-US" altLang="ko-KR" dirty="0" smtClean="0"/>
+              <a:rPr lang="en-US" altLang="ko-KR" dirty="0"/>
               <a:t>‘/’(</a:t>
             </a:r>
             <a:r>
-              <a:rPr lang="ko-KR" altLang="en-US" dirty="0" smtClean="0"/>
+              <a:rPr lang="ko-KR" altLang="en-US" dirty="0"/>
               <a:t>루트</a:t>
             </a:r>
             <a:r>
-              <a:rPr lang="en-US" altLang="ko-KR" dirty="0" smtClean="0"/>
+              <a:rPr lang="en-US" altLang="ko-KR" dirty="0"/>
               <a:t>)</a:t>
             </a:r>
             <a:r>
-              <a:rPr lang="ko-KR" altLang="en-US" dirty="0" smtClean="0"/>
+              <a:rPr lang="ko-KR" altLang="en-US" dirty="0"/>
               <a:t>로</a:t>
             </a:r>
             <a:r>
-              <a:rPr lang="en-US" altLang="ko-KR" dirty="0" smtClean="0"/>
+              <a:rPr lang="en-US" altLang="ko-KR" dirty="0"/>
               <a:t> </a:t>
             </a:r>
             <a:r>
-              <a:rPr lang="ko-KR" altLang="en-US" dirty="0" smtClean="0"/>
+              <a:rPr lang="ko-KR" altLang="en-US" dirty="0"/>
               <a:t>변경</a:t>
             </a:r>
             <a:r>
-              <a:rPr lang="en-US" altLang="ko-KR" dirty="0" smtClean="0"/>
+              <a:rPr lang="en-US" altLang="ko-KR" dirty="0"/>
               <a:t> </a:t>
             </a:r>
             <a:endParaRPr lang="ko-KR" altLang="en-US" dirty="0"/>
@@ -10886,13 +10644,6 @@
   <p:clrMapOvr>
     <a:masterClrMapping/>
   </p:clrMapOvr>
-  <p:timing>
-    <p:tnLst>
-      <p:par>
-        <p:cTn id="1" dur="indefinite" restart="never" nodeType="tmRoot"/>
-      </p:par>
-    </p:tnLst>
-  </p:timing>
 </p:sld>
 </file>
 
@@ -10934,18 +10685,13 @@
           <a:lstStyle/>
           <a:p>
             <a:r>
-              <a:rPr lang="en-US" altLang="ko-KR" dirty="0" smtClean="0"/>
+              <a:rPr lang="en-US" altLang="ko-KR" dirty="0"/>
               <a:t> </a:t>
             </a:r>
             <a:r>
               <a:rPr lang="ko-KR" altLang="en-US" dirty="0"/>
-              <a:t> </a:t>
-            </a:r>
-            <a:r>
-              <a:rPr lang="ko-KR" altLang="en-US" dirty="0" smtClean="0"/>
-              <a:t>웹 페이지 만들기</a:t>
-            </a:r>
-            <a:endParaRPr lang="ko-KR" altLang="en-US" dirty="0"/>
+              <a:t> 웹 페이지 만들기</a:t>
+            </a:r>
           </a:p>
         </p:txBody>
       </p:sp>
@@ -11147,22 +10893,21 @@
               <a:buChar char="§"/>
             </a:pPr>
             <a:r>
-              <a:rPr lang="ko-KR" altLang="en-US" sz="2000" b="1" dirty="0" smtClean="0"/>
+              <a:rPr lang="ko-KR" altLang="en-US" sz="2000" b="1" dirty="0"/>
               <a:t> 웹 페이지</a:t>
             </a:r>
             <a:r>
-              <a:rPr lang="en-US" altLang="ko-KR" sz="2000" b="1" dirty="0" smtClean="0"/>
+              <a:rPr lang="en-US" altLang="ko-KR" sz="2000" b="1" dirty="0"/>
               <a:t>(HTML, CSS, </a:t>
             </a:r>
             <a:r>
-              <a:rPr lang="en-US" altLang="ko-KR" sz="2000" b="1" dirty="0" err="1" smtClean="0"/>
+              <a:rPr lang="en-US" altLang="ko-KR" sz="2000" b="1" dirty="0" err="1"/>
               <a:t>Javascript</a:t>
             </a:r>
             <a:r>
-              <a:rPr lang="en-US" altLang="ko-KR" sz="2000" b="1" dirty="0" smtClean="0"/>
+              <a:rPr lang="en-US" altLang="ko-KR" sz="2000" b="1" dirty="0"/>
               <a:t>) </a:t>
             </a:r>
-            <a:endParaRPr lang="en-US" altLang="ko-KR" sz="2000" b="1" dirty="0"/>
           </a:p>
           <a:p>
             <a:pPr lvl="2">
@@ -11196,7 +10941,7 @@
         </p:blipFill>
         <p:spPr>
           <a:xfrm>
-            <a:off x="1496616" y="1668341"/>
+            <a:off x="1496616" y="1700808"/>
             <a:ext cx="5858851" cy="4464496"/>
           </a:xfrm>
           <a:prstGeom prst="rect">
@@ -11221,13 +10966,6 @@
   <p:clrMapOvr>
     <a:masterClrMapping/>
   </p:clrMapOvr>
-  <p:timing>
-    <p:tnLst>
-      <p:par>
-        <p:cTn id="1" dur="indefinite" restart="never" nodeType="tmRoot"/>
-      </p:par>
-    </p:tnLst>
-  </p:timing>
 </p:sld>
 </file>
 
@@ -11269,16 +11007,12 @@
           <a:lstStyle/>
           <a:p>
             <a:r>
-              <a:rPr lang="en-US" altLang="ko-KR" dirty="0" smtClean="0"/>
+              <a:rPr lang="en-US" altLang="ko-KR" dirty="0"/>
               <a:t>  </a:t>
             </a:r>
             <a:r>
-              <a:rPr lang="ko-KR" altLang="en-US" dirty="0" smtClean="0"/>
-              <a:t>웹 </a:t>
-            </a:r>
-            <a:r>
               <a:rPr lang="ko-KR" altLang="en-US" dirty="0"/>
-              <a:t>페이지 만들기</a:t>
+              <a:t>웹 페이지 만들기</a:t>
             </a:r>
           </a:p>
         </p:txBody>
@@ -11310,50 +11044,41 @@
               <a:buChar char="•"/>
             </a:pPr>
             <a:r>
-              <a:rPr lang="en-US" altLang="ko-KR" dirty="0" err="1" smtClean="0"/>
+              <a:rPr lang="en-US" altLang="ko-KR" dirty="0" err="1"/>
               <a:t>webapp</a:t>
-            </a:r>
-            <a:r>
-              <a:rPr lang="en-US" altLang="ko-KR" dirty="0" smtClean="0"/>
-              <a:t> </a:t>
-            </a:r>
-            <a:r>
-              <a:rPr lang="ko-KR" altLang="en-US" dirty="0" smtClean="0"/>
-              <a:t>하위에 </a:t>
-            </a:r>
-            <a:r>
-              <a:rPr lang="en-US" altLang="ko-KR" dirty="0"/>
-              <a:t>r</a:t>
-            </a:r>
-            <a:r>
-              <a:rPr lang="en-US" altLang="ko-KR" dirty="0" smtClean="0"/>
-              <a:t>esources </a:t>
-            </a:r>
-            <a:r>
-              <a:rPr lang="ko-KR" altLang="en-US" dirty="0" smtClean="0"/>
-              <a:t>폴더 생성 </a:t>
             </a:r>
             <a:r>
               <a:rPr lang="en-US" altLang="ko-KR" dirty="0"/>
               <a:t> </a:t>
             </a:r>
             <a:r>
-              <a:rPr lang="en-US" altLang="ko-KR" dirty="0" smtClean="0"/>
-              <a:t>- static(</a:t>
-            </a:r>
-            <a:r>
-              <a:rPr lang="ko-KR" altLang="en-US" dirty="0" smtClean="0"/>
+              <a:rPr lang="ko-KR" altLang="en-US" dirty="0"/>
+              <a:t>하위에 </a:t>
+            </a:r>
+            <a:r>
+              <a:rPr lang="en-US" altLang="ko-KR" dirty="0"/>
+              <a:t>resources </a:t>
+            </a:r>
+            <a:r>
+              <a:rPr lang="ko-KR" altLang="en-US" dirty="0"/>
+              <a:t>폴더 생성 </a:t>
+            </a:r>
+            <a:r>
+              <a:rPr lang="en-US" altLang="ko-KR" dirty="0"/>
+              <a:t> - static(</a:t>
+            </a:r>
+            <a:r>
+              <a:rPr lang="ko-KR" altLang="en-US" dirty="0"/>
               <a:t>정적</a:t>
             </a:r>
             <a:r>
-              <a:rPr lang="en-US" altLang="ko-KR" dirty="0" smtClean="0"/>
+              <a:rPr lang="en-US" altLang="ko-KR" dirty="0"/>
               <a:t>) </a:t>
             </a:r>
             <a:r>
-              <a:rPr lang="ko-KR" altLang="en-US" dirty="0" smtClean="0"/>
+              <a:rPr lang="ko-KR" altLang="en-US" dirty="0"/>
               <a:t>파일 저장</a:t>
             </a:r>
-            <a:endParaRPr lang="ko-KR" altLang="en-US" dirty="0"/>
           </a:p>
         </p:txBody>
       </p:sp>
@@ -11555,22 +11280,21 @@
               <a:buChar char="§"/>
             </a:pPr>
             <a:r>
-              <a:rPr lang="ko-KR" altLang="en-US" sz="2000" b="1" dirty="0" smtClean="0"/>
+              <a:rPr lang="ko-KR" altLang="en-US" sz="2000" b="1" dirty="0"/>
               <a:t> 웹 페이지</a:t>
             </a:r>
             <a:r>
-              <a:rPr lang="en-US" altLang="ko-KR" sz="2000" b="1" dirty="0" smtClean="0"/>
+              <a:rPr lang="en-US" altLang="ko-KR" sz="2000" b="1" dirty="0"/>
               <a:t>(HTML, CSS, </a:t>
             </a:r>
             <a:r>
-              <a:rPr lang="en-US" altLang="ko-KR" sz="2000" b="1" dirty="0" err="1" smtClean="0"/>
+              <a:rPr lang="en-US" altLang="ko-KR" sz="2000" b="1" dirty="0" err="1"/>
               <a:t>Javascript</a:t>
             </a:r>
             <a:r>
-              <a:rPr lang="en-US" altLang="ko-KR" sz="2000" b="1" dirty="0" smtClean="0"/>
+              <a:rPr lang="en-US" altLang="ko-KR" sz="2000" b="1" dirty="0"/>
               <a:t>) </a:t>
             </a:r>
-            <a:endParaRPr lang="en-US" altLang="ko-KR" sz="2000" b="1" dirty="0"/>
           </a:p>
           <a:p>
             <a:pPr lvl="2">
@@ -11629,13 +11353,6 @@
   <p:clrMapOvr>
     <a:masterClrMapping/>
   </p:clrMapOvr>
-  <p:timing>
-    <p:tnLst>
-      <p:par>
-        <p:cTn id="1" dur="indefinite" restart="never" nodeType="tmRoot"/>
-      </p:par>
-    </p:tnLst>
-  </p:timing>
 </p:sld>
 </file>
 
@@ -11677,16 +11394,12 @@
           <a:lstStyle/>
           <a:p>
             <a:r>
-              <a:rPr lang="en-US" altLang="ko-KR" dirty="0" smtClean="0"/>
+              <a:rPr lang="en-US" altLang="ko-KR" dirty="0"/>
               <a:t>  </a:t>
             </a:r>
             <a:r>
-              <a:rPr lang="ko-KR" altLang="en-US" dirty="0" smtClean="0"/>
-              <a:t>웹 </a:t>
-            </a:r>
-            <a:r>
               <a:rPr lang="ko-KR" altLang="en-US" dirty="0"/>
-              <a:t>페이지 만들기</a:t>
+              <a:t>웹 페이지 만들기</a:t>
             </a:r>
           </a:p>
         </p:txBody>
@@ -11889,18 +11602,17 @@
               <a:buChar char="§"/>
             </a:pPr>
             <a:r>
-              <a:rPr lang="ko-KR" altLang="en-US" sz="2000" b="1" dirty="0" smtClean="0"/>
+              <a:rPr lang="ko-KR" altLang="en-US" sz="2000" b="1" dirty="0"/>
               <a:t> </a:t>
             </a:r>
             <a:r>
-              <a:rPr lang="en-US" altLang="ko-KR" sz="2000" b="1" dirty="0" err="1" smtClean="0"/>
+              <a:rPr lang="en-US" altLang="ko-KR" sz="2000" b="1" dirty="0" err="1"/>
               <a:t>time.jsp</a:t>
             </a:r>
             <a:r>
-              <a:rPr lang="en-US" altLang="ko-KR" sz="2000" b="1" dirty="0" smtClean="0"/>
+              <a:rPr lang="en-US" altLang="ko-KR" sz="2000" b="1" dirty="0"/>
               <a:t> </a:t>
             </a:r>
-            <a:endParaRPr lang="en-US" altLang="ko-KR" sz="2000" b="1" dirty="0"/>
           </a:p>
           <a:p>
             <a:pPr lvl="2">
@@ -11959,13 +11671,6 @@
   <p:clrMapOvr>
     <a:masterClrMapping/>
   </p:clrMapOvr>
-  <p:timing>
-    <p:tnLst>
-      <p:par>
-        <p:cTn id="1" dur="indefinite" restart="never" nodeType="tmRoot"/>
-      </p:par>
-    </p:tnLst>
-  </p:timing>
 </p:sld>
 </file>
 
@@ -12007,16 +11712,12 @@
           <a:lstStyle/>
           <a:p>
             <a:r>
-              <a:rPr lang="en-US" altLang="ko-KR" dirty="0" smtClean="0"/>
+              <a:rPr lang="en-US" altLang="ko-KR" dirty="0"/>
               <a:t>  </a:t>
             </a:r>
             <a:r>
-              <a:rPr lang="ko-KR" altLang="en-US" dirty="0" smtClean="0"/>
-              <a:t>웹 </a:t>
-            </a:r>
-            <a:r>
               <a:rPr lang="ko-KR" altLang="en-US" dirty="0"/>
-              <a:t>페이지 만들기</a:t>
+              <a:t>웹 페이지 만들기</a:t>
             </a:r>
           </a:p>
         </p:txBody>
@@ -12219,18 +11920,17 @@
               <a:buChar char="§"/>
             </a:pPr>
             <a:r>
-              <a:rPr lang="ko-KR" altLang="en-US" sz="2000" b="1" dirty="0" smtClean="0"/>
+              <a:rPr lang="ko-KR" altLang="en-US" sz="2000" b="1" dirty="0"/>
               <a:t> </a:t>
             </a:r>
             <a:r>
-              <a:rPr lang="en-US" altLang="ko-KR" sz="2000" b="1" dirty="0" err="1" smtClean="0"/>
+              <a:rPr lang="en-US" altLang="ko-KR" sz="2000" b="1" dirty="0" err="1"/>
               <a:t>time.jsp</a:t>
             </a:r>
             <a:r>
-              <a:rPr lang="en-US" altLang="ko-KR" sz="2000" b="1" dirty="0" smtClean="0"/>
+              <a:rPr lang="en-US" altLang="ko-KR" sz="2000" b="1" dirty="0"/>
               <a:t> </a:t>
             </a:r>
-            <a:endParaRPr lang="en-US" altLang="ko-KR" sz="2000" b="1" dirty="0"/>
           </a:p>
           <a:p>
             <a:pPr lvl="2">
@@ -12289,13 +11989,6 @@
   <p:clrMapOvr>
     <a:masterClrMapping/>
   </p:clrMapOvr>
-  <p:timing>
-    <p:tnLst>
-      <p:par>
-        <p:cTn id="1" dur="indefinite" restart="never" nodeType="tmRoot"/>
-      </p:par>
-    </p:tnLst>
-  </p:timing>
 </p:sld>
 </file>
 
@@ -12353,7 +12046,7 @@
           </a:lstStyle>
           <a:p>
             <a:r>
-              <a:rPr lang="en-US" altLang="ko-KR" dirty="0" smtClean="0"/>
+              <a:rPr lang="en-US" altLang="ko-KR" dirty="0"/>
               <a:t> </a:t>
             </a:r>
             <a:r>
@@ -12361,22 +12054,21 @@
               <a:t> </a:t>
             </a:r>
             <a:r>
-              <a:rPr lang="en-US" altLang="ko-KR" dirty="0" smtClean="0"/>
+              <a:rPr lang="en-US" altLang="ko-KR" dirty="0"/>
               <a:t>JSP </a:t>
             </a:r>
             <a:r>
-              <a:rPr lang="ko-KR" altLang="en-US" dirty="0" smtClean="0"/>
+              <a:rPr lang="ko-KR" altLang="en-US" dirty="0"/>
               <a:t>태그 </a:t>
             </a:r>
             <a:r>
-              <a:rPr lang="en-US" altLang="ko-KR" dirty="0" smtClean="0"/>
+              <a:rPr lang="en-US" altLang="ko-KR" dirty="0"/>
               <a:t>- </a:t>
             </a:r>
             <a:r>
-              <a:rPr lang="ko-KR" altLang="en-US" dirty="0" smtClean="0"/>
+              <a:rPr lang="ko-KR" altLang="en-US" dirty="0"/>
               <a:t>스크립트 태그</a:t>
             </a:r>
-            <a:endParaRPr lang="ko-KR" altLang="en-US" dirty="0"/>
           </a:p>
         </p:txBody>
       </p:sp>
@@ -12408,7 +12100,7 @@
               </a:lnSpc>
             </a:pPr>
             <a:r>
-              <a:rPr lang="ko-KR" altLang="en-US" sz="2000" b="1" dirty="0" smtClean="0">
+              <a:rPr lang="ko-KR" altLang="en-US" sz="2000" b="1" dirty="0">
                 <a:solidFill>
                   <a:srgbClr val="0070C0"/>
                 </a:solidFill>
@@ -12416,7 +12108,7 @@
               <a:t>스크립트 태그</a:t>
             </a:r>
             <a:r>
-              <a:rPr lang="en-US" altLang="ko-KR" sz="2000" b="1" dirty="0" smtClean="0">
+              <a:rPr lang="en-US" altLang="ko-KR" sz="2000" b="1" dirty="0">
                 <a:solidFill>
                   <a:srgbClr val="0070C0"/>
                 </a:solidFill>
@@ -12481,10 +12173,9 @@
                     <a:p>
                       <a:pPr algn="ctr" latinLnBrk="1"/>
                       <a:r>
-                        <a:rPr lang="ko-KR" altLang="en-US" sz="1600" dirty="0" smtClean="0"/>
+                        <a:rPr lang="ko-KR" altLang="en-US" sz="1600" dirty="0"/>
                         <a:t>스크립트 태그</a:t>
                       </a:r>
-                      <a:endParaRPr lang="ko-KR" altLang="en-US" sz="1600" dirty="0"/>
                     </a:p>
                   </a:txBody>
                   <a:tcPr anchor="ctr">
@@ -12505,10 +12196,9 @@
                     <a:p>
                       <a:pPr algn="ctr" latinLnBrk="1"/>
                       <a:r>
-                        <a:rPr lang="ko-KR" altLang="en-US" sz="1600" dirty="0" smtClean="0"/>
+                        <a:rPr lang="ko-KR" altLang="en-US" sz="1600" dirty="0"/>
                         <a:t>형식</a:t>
                       </a:r>
-                      <a:endParaRPr lang="ko-KR" altLang="en-US" sz="1600" dirty="0"/>
                     </a:p>
                   </a:txBody>
                   <a:tcPr anchor="ctr">
@@ -12526,10 +12216,9 @@
                     <a:p>
                       <a:pPr algn="ctr" latinLnBrk="1"/>
                       <a:r>
-                        <a:rPr lang="ko-KR" altLang="en-US" sz="1600" dirty="0" smtClean="0"/>
+                        <a:rPr lang="ko-KR" altLang="en-US" sz="1600" dirty="0"/>
                         <a:t>설 명</a:t>
                       </a:r>
-                      <a:endParaRPr lang="ko-KR" altLang="en-US" sz="1600" dirty="0"/>
                     </a:p>
                   </a:txBody>
                   <a:tcPr anchor="ctr">
@@ -12557,15 +12246,15 @@
                     <a:p>
                       <a:pPr algn="l" latinLnBrk="1"/>
                       <a:r>
-                        <a:rPr lang="en-US" altLang="ko-KR" sz="1600" dirty="0" smtClean="0"/>
+                        <a:rPr lang="en-US" altLang="ko-KR" sz="1600" dirty="0"/>
                         <a:t> </a:t>
                       </a:r>
                       <a:r>
-                        <a:rPr lang="ko-KR" altLang="en-US" sz="1600" dirty="0" smtClean="0"/>
+                        <a:rPr lang="ko-KR" altLang="en-US" sz="1600" dirty="0"/>
                         <a:t>선언문</a:t>
                       </a:r>
                       <a:r>
-                        <a:rPr lang="en-US" altLang="ko-KR" sz="1600" dirty="0" smtClean="0"/>
+                        <a:rPr lang="en-US" altLang="ko-KR" sz="1600" dirty="0"/>
                         <a:t>(declaration)</a:t>
                       </a:r>
                     </a:p>
@@ -12583,7 +12272,7 @@
                     <a:p>
                       <a:pPr algn="l" latinLnBrk="1"/>
                       <a:r>
-                        <a:rPr lang="en-US" altLang="ko-KR" sz="1600" dirty="0" smtClean="0">
+                        <a:rPr lang="en-US" altLang="ko-KR" sz="1600" dirty="0">
                           <a:solidFill>
                             <a:srgbClr val="C00000"/>
                           </a:solidFill>
@@ -12591,7 +12280,7 @@
                         <a:t>&lt;</a:t>
                       </a:r>
                       <a:r>
-                        <a:rPr lang="en-US" altLang="ko-KR" sz="1600" b="1" dirty="0" smtClean="0">
+                        <a:rPr lang="en-US" altLang="ko-KR" sz="1600" b="1" dirty="0">
                           <a:solidFill>
                             <a:srgbClr val="C00000"/>
                           </a:solidFill>
@@ -12599,7 +12288,7 @@
                         <a:t>%! </a:t>
                       </a:r>
                       <a:r>
-                        <a:rPr lang="en-US" altLang="ko-KR" sz="1600" b="0" baseline="0" dirty="0" smtClean="0">
+                        <a:rPr lang="en-US" altLang="ko-KR" sz="1600" b="0" baseline="0" dirty="0">
                           <a:solidFill>
                             <a:srgbClr val="C00000"/>
                           </a:solidFill>
@@ -12607,7 +12296,7 @@
                         <a:t>    </a:t>
                       </a:r>
                       <a:r>
-                        <a:rPr lang="en-US" altLang="ko-KR" sz="1600" dirty="0" smtClean="0">
+                        <a:rPr lang="en-US" altLang="ko-KR" sz="1600" dirty="0">
                           <a:solidFill>
                             <a:srgbClr val="C00000"/>
                           </a:solidFill>
@@ -12625,22 +12314,21 @@
                     <a:p>
                       <a:pPr algn="l" latinLnBrk="1"/>
                       <a:r>
-                        <a:rPr lang="en-US" altLang="ko-KR" sz="1600" dirty="0" smtClean="0"/>
+                        <a:rPr lang="en-US" altLang="ko-KR" sz="1600" dirty="0"/>
                         <a:t> </a:t>
                       </a:r>
                       <a:r>
-                        <a:rPr lang="ko-KR" altLang="en-US" sz="1600" dirty="0" smtClean="0"/>
+                        <a:rPr lang="ko-KR" altLang="en-US" sz="1600" dirty="0"/>
                         <a:t>자바 변수나 </a:t>
                       </a:r>
                       <a:r>
-                        <a:rPr lang="ko-KR" altLang="en-US" sz="1600" dirty="0" err="1" smtClean="0"/>
+                        <a:rPr lang="ko-KR" altLang="en-US" sz="1600" dirty="0" err="1"/>
                         <a:t>메소드를</a:t>
                       </a:r>
                       <a:r>
-                        <a:rPr lang="ko-KR" altLang="en-US" sz="1600" dirty="0" smtClean="0"/>
+                        <a:rPr lang="ko-KR" altLang="en-US" sz="1600" dirty="0"/>
                         <a:t> 정의하는 데 사용</a:t>
                       </a:r>
-                      <a:endParaRPr lang="ko-KR" altLang="en-US" sz="1600" dirty="0"/>
                     </a:p>
                   </a:txBody>
                   <a:tcPr anchor="ctr">
@@ -12663,23 +12351,23 @@
                     <a:p>
                       <a:pPr algn="l" latinLnBrk="1"/>
                       <a:r>
-                        <a:rPr lang="en-US" altLang="ko-KR" sz="1600" dirty="0" smtClean="0"/>
+                        <a:rPr lang="en-US" altLang="ko-KR" sz="1600" dirty="0"/>
                         <a:t> </a:t>
                       </a:r>
                       <a:r>
-                        <a:rPr lang="ko-KR" altLang="en-US" sz="1600" dirty="0" err="1" smtClean="0"/>
+                        <a:rPr lang="ko-KR" altLang="en-US" sz="1600" dirty="0" err="1"/>
                         <a:t>스크립트릿</a:t>
                       </a:r>
                       <a:r>
-                        <a:rPr lang="en-US" altLang="ko-KR" sz="1600" dirty="0" smtClean="0"/>
+                        <a:rPr lang="en-US" altLang="ko-KR" sz="1600" dirty="0"/>
                         <a:t>(</a:t>
                       </a:r>
                       <a:r>
-                        <a:rPr lang="en-US" altLang="ko-KR" sz="1600" dirty="0" err="1" smtClean="0"/>
+                        <a:rPr lang="en-US" altLang="ko-KR" sz="1600" dirty="0" err="1"/>
                         <a:t>scriptlet</a:t>
                       </a:r>
                       <a:r>
-                        <a:rPr lang="en-US" altLang="ko-KR" sz="1600" dirty="0" smtClean="0"/>
+                        <a:rPr lang="en-US" altLang="ko-KR" sz="1600" dirty="0"/>
                         <a:t>)</a:t>
                       </a:r>
                     </a:p>
@@ -12697,7 +12385,7 @@
                     <a:p>
                       <a:pPr algn="l" latinLnBrk="1"/>
                       <a:r>
-                        <a:rPr lang="en-US" altLang="ko-KR" sz="1600" dirty="0" smtClean="0">
+                        <a:rPr lang="en-US" altLang="ko-KR" sz="1600" dirty="0">
                           <a:solidFill>
                             <a:srgbClr val="C00000"/>
                           </a:solidFill>
@@ -12705,7 +12393,7 @@
                         <a:t>&lt;</a:t>
                       </a:r>
                       <a:r>
-                        <a:rPr lang="en-US" altLang="ko-KR" sz="1600" b="1" dirty="0" smtClean="0">
+                        <a:rPr lang="en-US" altLang="ko-KR" sz="1600" b="1" dirty="0">
                           <a:solidFill>
                             <a:srgbClr val="C00000"/>
                           </a:solidFill>
@@ -12713,7 +12401,7 @@
                         <a:t>%</a:t>
                       </a:r>
                       <a:r>
-                        <a:rPr lang="en-US" altLang="ko-KR" sz="1600" dirty="0" smtClean="0">
+                        <a:rPr lang="en-US" altLang="ko-KR" sz="1600" dirty="0">
                           <a:solidFill>
                             <a:srgbClr val="C00000"/>
                           </a:solidFill>
@@ -12721,7 +12409,7 @@
                         <a:t> </a:t>
                       </a:r>
                       <a:r>
-                        <a:rPr lang="en-US" altLang="ko-KR" sz="1600" baseline="0" dirty="0" smtClean="0">
+                        <a:rPr lang="en-US" altLang="ko-KR" sz="1600" baseline="0" dirty="0">
                           <a:solidFill>
                             <a:srgbClr val="C00000"/>
                           </a:solidFill>
@@ -12729,7 +12417,7 @@
                         <a:t>     </a:t>
                       </a:r>
                       <a:r>
-                        <a:rPr lang="en-US" altLang="ko-KR" sz="1600" dirty="0" smtClean="0">
+                        <a:rPr lang="en-US" altLang="ko-KR" sz="1600" dirty="0">
                           <a:solidFill>
                             <a:srgbClr val="C00000"/>
                           </a:solidFill>
@@ -12763,19 +12451,19 @@
                         <a:defRPr/>
                       </a:pPr>
                       <a:r>
-                        <a:rPr lang="en-US" altLang="ko-KR" sz="1600" dirty="0" smtClean="0"/>
+                        <a:rPr lang="en-US" altLang="ko-KR" sz="1600" dirty="0"/>
                         <a:t> </a:t>
                       </a:r>
                       <a:r>
-                        <a:rPr lang="ko-KR" altLang="en-US" sz="1600" dirty="0" smtClean="0"/>
+                        <a:rPr lang="ko-KR" altLang="en-US" sz="1600" dirty="0"/>
                         <a:t>자바 </a:t>
                       </a:r>
                       <a:r>
-                        <a:rPr lang="ko-KR" altLang="en-US" sz="1600" dirty="0" err="1" smtClean="0"/>
+                        <a:rPr lang="ko-KR" altLang="en-US" sz="1600" dirty="0" err="1"/>
                         <a:t>로직</a:t>
                       </a:r>
                       <a:r>
-                        <a:rPr lang="ko-KR" altLang="en-US" sz="1600" dirty="0" smtClean="0"/>
+                        <a:rPr lang="ko-KR" altLang="en-US" sz="1600" dirty="0"/>
                         <a:t> 코드를 작성하는 데 사용</a:t>
                       </a:r>
                     </a:p>
@@ -12800,15 +12488,15 @@
                     <a:p>
                       <a:pPr algn="l" latinLnBrk="1"/>
                       <a:r>
-                        <a:rPr lang="en-US" altLang="ko-KR" sz="1600" dirty="0" smtClean="0"/>
+                        <a:rPr lang="en-US" altLang="ko-KR" sz="1600" dirty="0"/>
                         <a:t> </a:t>
                       </a:r>
                       <a:r>
-                        <a:rPr lang="ko-KR" altLang="en-US" sz="1600" dirty="0" err="1" smtClean="0"/>
+                        <a:rPr lang="ko-KR" altLang="en-US" sz="1600" dirty="0" err="1"/>
                         <a:t>표현문</a:t>
                       </a:r>
                       <a:r>
-                        <a:rPr lang="en-US" altLang="ko-KR" sz="1600" dirty="0" smtClean="0"/>
+                        <a:rPr lang="en-US" altLang="ko-KR" sz="1600" dirty="0"/>
                         <a:t>(expression)</a:t>
                       </a:r>
                     </a:p>
@@ -12826,7 +12514,7 @@
                     <a:p>
                       <a:pPr algn="l" latinLnBrk="1"/>
                       <a:r>
-                        <a:rPr lang="en-US" altLang="ko-KR" sz="1600" dirty="0" smtClean="0">
+                        <a:rPr lang="en-US" altLang="ko-KR" sz="1600" dirty="0">
                           <a:solidFill>
                             <a:srgbClr val="C00000"/>
                           </a:solidFill>
@@ -12834,7 +12522,7 @@
                         <a:t>&lt;</a:t>
                       </a:r>
                       <a:r>
-                        <a:rPr lang="en-US" altLang="ko-KR" sz="1600" b="1" dirty="0" smtClean="0">
+                        <a:rPr lang="en-US" altLang="ko-KR" sz="1600" b="1" dirty="0">
                           <a:solidFill>
                             <a:srgbClr val="C00000"/>
                           </a:solidFill>
@@ -12842,7 +12530,7 @@
                         <a:t>%=</a:t>
                       </a:r>
                       <a:r>
-                        <a:rPr lang="en-US" altLang="ko-KR" sz="1600" b="0" baseline="0" dirty="0" smtClean="0">
+                        <a:rPr lang="en-US" altLang="ko-KR" sz="1600" b="0" baseline="0" dirty="0">
                           <a:solidFill>
                             <a:srgbClr val="C00000"/>
                           </a:solidFill>
@@ -12850,7 +12538,7 @@
                         <a:t>   </a:t>
                       </a:r>
                       <a:r>
-                        <a:rPr lang="en-US" altLang="ko-KR" sz="1600" dirty="0" smtClean="0">
+                        <a:rPr lang="en-US" altLang="ko-KR" sz="1600" dirty="0">
                           <a:solidFill>
                             <a:srgbClr val="C00000"/>
                           </a:solidFill>
@@ -12884,23 +12572,23 @@
                         <a:defRPr/>
                       </a:pPr>
                       <a:r>
-                        <a:rPr lang="en-US" altLang="ko-KR" sz="1600" dirty="0" smtClean="0"/>
+                        <a:rPr lang="en-US" altLang="ko-KR" sz="1600" dirty="0"/>
                         <a:t> </a:t>
                       </a:r>
                       <a:r>
-                        <a:rPr lang="ko-KR" altLang="en-US" sz="1600" dirty="0" smtClean="0"/>
+                        <a:rPr lang="ko-KR" altLang="en-US" sz="1600" dirty="0"/>
                         <a:t>변수</a:t>
                       </a:r>
                       <a:r>
-                        <a:rPr lang="en-US" altLang="ko-KR" sz="1600" dirty="0" smtClean="0"/>
+                        <a:rPr lang="en-US" altLang="ko-KR" sz="1600" dirty="0"/>
                         <a:t>, </a:t>
                       </a:r>
                       <a:r>
-                        <a:rPr lang="ko-KR" altLang="en-US" sz="1600" dirty="0" err="1" smtClean="0"/>
+                        <a:rPr lang="ko-KR" altLang="en-US" sz="1600" dirty="0" err="1"/>
                         <a:t>메소드</a:t>
                       </a:r>
                       <a:r>
-                        <a:rPr lang="ko-KR" altLang="en-US" sz="1600" dirty="0" smtClean="0"/>
+                        <a:rPr lang="ko-KR" altLang="en-US" sz="1600" dirty="0"/>
                         <a:t> 호출 결과를 문자열로 출력해 줌</a:t>
                       </a:r>
                     </a:p>
@@ -12949,14 +12637,14 @@
               </a:lnSpc>
             </a:pPr>
             <a:r>
-              <a:rPr lang="en-US" altLang="ko-KR" sz="2200" b="1" dirty="0" smtClean="0"/>
+              <a:rPr lang="en-US" altLang="ko-KR" sz="2200" b="1" dirty="0"/>
               <a:t>JSP </a:t>
             </a:r>
             <a:r>
-              <a:rPr lang="ko-KR" altLang="en-US" sz="2200" b="1" dirty="0" smtClean="0"/>
+              <a:rPr lang="ko-KR" altLang="en-US" sz="2200" b="1" dirty="0"/>
               <a:t>태그</a:t>
             </a:r>
-            <a:endParaRPr lang="en-US" altLang="ko-KR" sz="2200" b="1" dirty="0" smtClean="0"/>
+            <a:endParaRPr lang="en-US" altLang="ko-KR" sz="2200" b="1" dirty="0"/>
           </a:p>
           <a:p>
             <a:pPr marL="342900" indent="-342900">
@@ -12967,7 +12655,7 @@
               <a:buChar char="•"/>
             </a:pPr>
             <a:r>
-              <a:rPr lang="ko-KR" altLang="en-US" b="1" dirty="0" smtClean="0"/>
+              <a:rPr lang="ko-KR" altLang="en-US" b="1" dirty="0"/>
               <a:t>스크립트 태그 </a:t>
             </a:r>
             <a:r>
@@ -12997,15 +12685,15 @@
               <a:buChar char="•"/>
             </a:pPr>
             <a:r>
-              <a:rPr lang="ko-KR" altLang="en-US" b="1" dirty="0" err="1" smtClean="0"/>
+              <a:rPr lang="ko-KR" altLang="en-US" b="1" dirty="0" err="1"/>
               <a:t>디렉티브</a:t>
             </a:r>
             <a:r>
-              <a:rPr lang="ko-KR" altLang="en-US" b="1" dirty="0" smtClean="0"/>
+              <a:rPr lang="ko-KR" altLang="en-US" b="1" dirty="0"/>
               <a:t> 태그 </a:t>
             </a:r>
             <a:r>
-              <a:rPr lang="en-US" altLang="ko-KR" dirty="0" smtClean="0"/>
+              <a:rPr lang="en-US" altLang="ko-KR" dirty="0"/>
               <a:t>: </a:t>
             </a:r>
             <a:r>
@@ -13018,13 +12706,9 @@
             </a:r>
             <a:r>
               <a:rPr lang="ko-KR" altLang="en-US" dirty="0"/>
-              <a:t>페이지에 대한 정보를 설정하는 </a:t>
-            </a:r>
-            <a:r>
-              <a:rPr lang="ko-KR" altLang="en-US" dirty="0" smtClean="0"/>
-              <a:t>태그</a:t>
-            </a:r>
-            <a:endParaRPr lang="en-US" altLang="ko-KR" dirty="0" smtClean="0"/>
+              <a:t>페이지에 대한 정보를 설정하는 태그</a:t>
+            </a:r>
+            <a:endParaRPr lang="en-US" altLang="ko-KR" dirty="0"/>
           </a:p>
           <a:p>
             <a:pPr marL="342900" indent="-342900">
@@ -13035,26 +12719,26 @@
               <a:buChar char="•"/>
             </a:pPr>
             <a:r>
-              <a:rPr lang="ko-KR" altLang="en-US" b="1" dirty="0" smtClean="0"/>
+              <a:rPr lang="ko-KR" altLang="en-US" b="1" dirty="0"/>
               <a:t>액션 태그 </a:t>
             </a:r>
             <a:r>
-              <a:rPr lang="en-US" altLang="ko-KR" dirty="0" smtClean="0"/>
+              <a:rPr lang="en-US" altLang="ko-KR" dirty="0"/>
               <a:t>: </a:t>
             </a:r>
             <a:r>
-              <a:rPr lang="ko-KR" altLang="en-US" dirty="0" smtClean="0"/>
+              <a:rPr lang="ko-KR" altLang="en-US" dirty="0"/>
               <a:t>클라이언트</a:t>
             </a:r>
             <a:r>
-              <a:rPr lang="en-US" altLang="ko-KR" dirty="0" smtClean="0"/>
+              <a:rPr lang="en-US" altLang="ko-KR" dirty="0"/>
               <a:t>/</a:t>
             </a:r>
             <a:r>
-              <a:rPr lang="ko-KR" altLang="en-US" dirty="0" smtClean="0"/>
+              <a:rPr lang="ko-KR" altLang="en-US" dirty="0"/>
               <a:t>서버에 어떤 작동을 행하도록 명령을 지시하는 태그</a:t>
             </a:r>
-            <a:endParaRPr lang="en-US" altLang="ko-KR" dirty="0" smtClean="0"/>
+            <a:endParaRPr lang="en-US" altLang="ko-KR" dirty="0"/>
           </a:p>
         </p:txBody>
       </p:sp>
@@ -13068,13 +12752,6 @@
   <p:clrMapOvr>
     <a:masterClrMapping/>
   </p:clrMapOvr>
-  <p:timing>
-    <p:tnLst>
-      <p:par>
-        <p:cTn id="1" dur="indefinite" restart="never" nodeType="tmRoot"/>
-      </p:par>
-    </p:tnLst>
-  </p:timing>
 </p:sld>
 </file>
 
@@ -13132,7 +12809,7 @@
           </a:lstStyle>
           <a:p>
             <a:r>
-              <a:rPr lang="en-US" altLang="ko-KR" dirty="0" smtClean="0"/>
+              <a:rPr lang="en-US" altLang="ko-KR" dirty="0"/>
               <a:t> </a:t>
             </a:r>
             <a:r>
@@ -13140,22 +12817,21 @@
               <a:t> </a:t>
             </a:r>
             <a:r>
-              <a:rPr lang="en-US" altLang="ko-KR" dirty="0" smtClean="0"/>
+              <a:rPr lang="en-US" altLang="ko-KR" dirty="0"/>
               <a:t>JSP </a:t>
             </a:r>
             <a:r>
-              <a:rPr lang="ko-KR" altLang="en-US" dirty="0" smtClean="0"/>
+              <a:rPr lang="ko-KR" altLang="en-US" dirty="0"/>
               <a:t>태그 </a:t>
             </a:r>
             <a:r>
-              <a:rPr lang="en-US" altLang="ko-KR" dirty="0" smtClean="0"/>
+              <a:rPr lang="en-US" altLang="ko-KR" dirty="0"/>
               <a:t>- </a:t>
             </a:r>
             <a:r>
-              <a:rPr lang="ko-KR" altLang="en-US" dirty="0" smtClean="0"/>
+              <a:rPr lang="ko-KR" altLang="en-US" dirty="0"/>
               <a:t>스크립트 태그</a:t>
             </a:r>
-            <a:endParaRPr lang="ko-KR" altLang="en-US" dirty="0"/>
           </a:p>
         </p:txBody>
       </p:sp>
@@ -13187,26 +12863,22 @@
               </a:lnSpc>
             </a:pPr>
             <a:r>
-              <a:rPr lang="ko-KR" altLang="en-US" sz="2200" b="1" dirty="0" err="1" smtClean="0"/>
+              <a:rPr lang="ko-KR" altLang="en-US" sz="2200" b="1" dirty="0" err="1"/>
               <a:t>구글</a:t>
             </a:r>
             <a:r>
-              <a:rPr lang="ko-KR" altLang="en-US" sz="2200" b="1" dirty="0" smtClean="0"/>
+              <a:rPr lang="ko-KR" altLang="en-US" sz="2200" b="1" dirty="0"/>
               <a:t> </a:t>
             </a:r>
             <a:r>
-              <a:rPr lang="en-US" altLang="ko-KR" sz="2200" b="1" dirty="0" smtClean="0"/>
+              <a:rPr lang="en-US" altLang="ko-KR" sz="2200" b="1" dirty="0"/>
               <a:t>- JSP Document - </a:t>
             </a:r>
             <a:r>
-              <a:rPr lang="ko-KR" altLang="en-US" sz="2200" b="1" dirty="0" smtClean="0"/>
-              <a:t>검</a:t>
-            </a:r>
-            <a:r>
               <a:rPr lang="ko-KR" altLang="en-US" sz="2200" b="1" dirty="0"/>
-              <a:t>색</a:t>
-            </a:r>
-            <a:endParaRPr lang="en-US" altLang="ko-KR" sz="2200" b="1" dirty="0" smtClean="0"/>
+              <a:t>검색</a:t>
+            </a:r>
+            <a:endParaRPr lang="en-US" altLang="ko-KR" sz="2200" b="1" dirty="0"/>
           </a:p>
         </p:txBody>
       </p:sp>
@@ -13235,15 +12907,9 @@
               <a:rPr lang="en-US" altLang="ko-KR" dirty="0">
                 <a:hlinkClick r:id="rId2"/>
               </a:rPr>
-              <a:t>https://docs.oracle.com/javaee/5/tutorial/doc</a:t>
-            </a:r>
-            <a:r>
-              <a:rPr lang="en-US" altLang="ko-KR" dirty="0" smtClean="0">
-                <a:hlinkClick r:id="rId2"/>
-              </a:rPr>
-              <a:t>/</a:t>
-            </a:r>
-            <a:endParaRPr lang="en-US" altLang="ko-KR" dirty="0" smtClean="0"/>
+              <a:t>https://docs.oracle.com/javaee/5/tutorial/doc/</a:t>
+            </a:r>
+            <a:endParaRPr lang="en-US" altLang="ko-KR" dirty="0"/>
           </a:p>
           <a:p>
             <a:endParaRPr lang="ko-KR" altLang="en-US" dirty="0"/>
@@ -13320,13 +12986,6 @@
   <p:clrMapOvr>
     <a:masterClrMapping/>
   </p:clrMapOvr>
-  <p:timing>
-    <p:tnLst>
-      <p:par>
-        <p:cTn id="1" dur="indefinite" restart="never" nodeType="tmRoot"/>
-      </p:par>
-    </p:tnLst>
-  </p:timing>
 </p:sld>
 </file>
 
@@ -13384,7 +13043,7 @@
           </a:lstStyle>
           <a:p>
             <a:r>
-              <a:rPr lang="en-US" altLang="ko-KR" dirty="0" smtClean="0"/>
+              <a:rPr lang="en-US" altLang="ko-KR" dirty="0"/>
               <a:t> </a:t>
             </a:r>
             <a:r>
@@ -13392,22 +13051,21 @@
               <a:t> </a:t>
             </a:r>
             <a:r>
-              <a:rPr lang="en-US" altLang="ko-KR" dirty="0" smtClean="0"/>
+              <a:rPr lang="en-US" altLang="ko-KR" dirty="0"/>
               <a:t>JSP </a:t>
             </a:r>
             <a:r>
-              <a:rPr lang="ko-KR" altLang="en-US" dirty="0" smtClean="0"/>
+              <a:rPr lang="ko-KR" altLang="en-US" dirty="0"/>
               <a:t>태그 </a:t>
             </a:r>
             <a:r>
-              <a:rPr lang="en-US" altLang="ko-KR" dirty="0" smtClean="0"/>
+              <a:rPr lang="en-US" altLang="ko-KR" dirty="0"/>
               <a:t>- </a:t>
             </a:r>
             <a:r>
-              <a:rPr lang="ko-KR" altLang="en-US" dirty="0" smtClean="0"/>
+              <a:rPr lang="ko-KR" altLang="en-US" dirty="0"/>
               <a:t>스크립트 태그</a:t>
             </a:r>
-            <a:endParaRPr lang="ko-KR" altLang="en-US" dirty="0"/>
           </a:p>
         </p:txBody>
       </p:sp>
@@ -13439,10 +13097,10 @@
               </a:lnSpc>
             </a:pPr>
             <a:r>
-              <a:rPr lang="ko-KR" altLang="en-US" sz="2000" b="1" smtClean="0"/>
+              <a:rPr lang="ko-KR" altLang="en-US" sz="2000" b="1"/>
               <a:t>스크립트 태그 예제</a:t>
             </a:r>
-            <a:endParaRPr lang="en-US" altLang="ko-KR" sz="2000" b="1" dirty="0" smtClean="0"/>
+            <a:endParaRPr lang="en-US" altLang="ko-KR" sz="2000" b="1" dirty="0"/>
           </a:p>
         </p:txBody>
       </p:sp>
@@ -13487,13 +13145,6 @@
   <p:clrMapOvr>
     <a:masterClrMapping/>
   </p:clrMapOvr>
-  <p:timing>
-    <p:tnLst>
-      <p:par>
-        <p:cTn id="1" dur="indefinite" restart="never" nodeType="tmRoot"/>
-      </p:par>
-    </p:tnLst>
-  </p:timing>
 </p:sld>
 </file>
 
@@ -13551,7 +13202,7 @@
           </a:lstStyle>
           <a:p>
             <a:r>
-              <a:rPr lang="en-US" altLang="ko-KR" dirty="0" smtClean="0"/>
+              <a:rPr lang="en-US" altLang="ko-KR" dirty="0"/>
               <a:t> </a:t>
             </a:r>
             <a:r>
@@ -13559,22 +13210,21 @@
               <a:t> </a:t>
             </a:r>
             <a:r>
-              <a:rPr lang="en-US" altLang="ko-KR" dirty="0" smtClean="0"/>
+              <a:rPr lang="en-US" altLang="ko-KR" dirty="0"/>
               <a:t>JSP </a:t>
             </a:r>
             <a:r>
-              <a:rPr lang="ko-KR" altLang="en-US" dirty="0" smtClean="0"/>
+              <a:rPr lang="ko-KR" altLang="en-US" dirty="0"/>
               <a:t>태그 </a:t>
             </a:r>
             <a:r>
-              <a:rPr lang="en-US" altLang="ko-KR" dirty="0" smtClean="0"/>
+              <a:rPr lang="en-US" altLang="ko-KR" dirty="0"/>
               <a:t>- </a:t>
             </a:r>
             <a:r>
-              <a:rPr lang="ko-KR" altLang="en-US" dirty="0" smtClean="0"/>
+              <a:rPr lang="ko-KR" altLang="en-US" dirty="0"/>
               <a:t>스크립트 태그</a:t>
             </a:r>
-            <a:endParaRPr lang="ko-KR" altLang="en-US" dirty="0"/>
           </a:p>
         </p:txBody>
       </p:sp>
@@ -13601,7 +13251,7 @@
           <a:lstStyle/>
           <a:p>
             <a:r>
-              <a:rPr lang="ko-KR" altLang="en-US" sz="1600" dirty="0" smtClean="0">
+              <a:rPr lang="ko-KR" altLang="en-US" sz="1600" dirty="0">
                 <a:solidFill>
                   <a:srgbClr val="C00000"/>
                 </a:solidFill>
@@ -13609,7 +13259,7 @@
               <a:t>소스보기 </a:t>
             </a:r>
             <a:r>
-              <a:rPr lang="en-US" altLang="ko-KR" sz="1600" dirty="0" smtClean="0">
+              <a:rPr lang="en-US" altLang="ko-KR" sz="1600" dirty="0">
                 <a:solidFill>
                   <a:srgbClr val="C00000"/>
                 </a:solidFill>
@@ -13617,7 +13267,7 @@
               <a:t>– </a:t>
             </a:r>
             <a:r>
-              <a:rPr lang="en-US" altLang="ko-KR" sz="1600" dirty="0" err="1" smtClean="0">
+              <a:rPr lang="en-US" altLang="ko-KR" sz="1600" dirty="0" err="1">
                 <a:solidFill>
                   <a:srgbClr val="C00000"/>
                 </a:solidFill>
@@ -13625,7 +13275,7 @@
               <a:t>jsp</a:t>
             </a:r>
             <a:r>
-              <a:rPr lang="en-US" altLang="ko-KR" sz="1600" dirty="0" smtClean="0">
+              <a:rPr lang="en-US" altLang="ko-KR" sz="1600" dirty="0">
                 <a:solidFill>
                   <a:srgbClr val="C00000"/>
                 </a:solidFill>
@@ -13633,7 +13283,7 @@
               <a:t> </a:t>
             </a:r>
             <a:r>
-              <a:rPr lang="ko-KR" altLang="en-US" sz="1600" dirty="0" smtClean="0">
+              <a:rPr lang="ko-KR" altLang="en-US" sz="1600" dirty="0">
                 <a:solidFill>
                   <a:srgbClr val="C00000"/>
                 </a:solidFill>
@@ -13641,7 +13291,7 @@
               <a:t>태그는 서버에서 처리되므로 클라이언트</a:t>
             </a:r>
             <a:r>
-              <a:rPr lang="en-US" altLang="ko-KR" sz="1600" dirty="0" smtClean="0">
+              <a:rPr lang="en-US" altLang="ko-KR" sz="1600" dirty="0">
                 <a:solidFill>
                   <a:srgbClr val="C00000"/>
                 </a:solidFill>
@@ -13649,7 +13299,7 @@
               <a:t>(</a:t>
             </a:r>
             <a:r>
-              <a:rPr lang="ko-KR" altLang="en-US" sz="1600" dirty="0" smtClean="0">
+              <a:rPr lang="ko-KR" altLang="en-US" sz="1600" dirty="0">
                 <a:solidFill>
                   <a:srgbClr val="C00000"/>
                 </a:solidFill>
@@ -13657,7 +13307,7 @@
               <a:t>웹 브라우저</a:t>
             </a:r>
             <a:r>
-              <a:rPr lang="en-US" altLang="ko-KR" sz="1600" dirty="0" smtClean="0">
+              <a:rPr lang="en-US" altLang="ko-KR" sz="1600" dirty="0">
                 <a:solidFill>
                   <a:srgbClr val="C00000"/>
                 </a:solidFill>
@@ -13665,18 +13315,13 @@
               <a:t>)</a:t>
             </a:r>
             <a:r>
-              <a:rPr lang="ko-KR" altLang="en-US" sz="1600" dirty="0" smtClean="0">
+              <a:rPr lang="ko-KR" altLang="en-US" sz="1600" dirty="0">
                 <a:solidFill>
                   <a:srgbClr val="C00000"/>
                 </a:solidFill>
               </a:rPr>
               <a:t>에서는 보이지 않음</a:t>
             </a:r>
-            <a:endParaRPr lang="ko-KR" altLang="en-US" sz="1600" dirty="0">
-              <a:solidFill>
-                <a:srgbClr val="C00000"/>
-              </a:solidFill>
-            </a:endParaRPr>
           </a:p>
         </p:txBody>
       </p:sp>
@@ -13708,10 +13353,10 @@
               </a:lnSpc>
             </a:pPr>
             <a:r>
-              <a:rPr lang="ko-KR" altLang="en-US" sz="2000" b="1" smtClean="0"/>
+              <a:rPr lang="ko-KR" altLang="en-US" sz="2000" b="1"/>
               <a:t>스크립트 태그 예제</a:t>
             </a:r>
-            <a:endParaRPr lang="en-US" altLang="ko-KR" sz="2000" b="1" dirty="0" smtClean="0"/>
+            <a:endParaRPr lang="en-US" altLang="ko-KR" sz="2000" b="1" dirty="0"/>
           </a:p>
         </p:txBody>
       </p:sp>
@@ -13787,13 +13432,6 @@
   <p:clrMapOvr>
     <a:masterClrMapping/>
   </p:clrMapOvr>
-  <p:timing>
-    <p:tnLst>
-      <p:par>
-        <p:cTn id="1" dur="indefinite" restart="never" nodeType="tmRoot"/>
-      </p:par>
-    </p:tnLst>
-  </p:timing>
 </p:sld>
 </file>
 
@@ -13851,12 +13489,8 @@
           </a:lstStyle>
           <a:p>
             <a:r>
-              <a:rPr lang="en-US" altLang="ko-KR" dirty="0" smtClean="0"/>
-              <a:t> </a:t>
-            </a:r>
-            <a:r>
               <a:rPr lang="en-US" altLang="ko-KR" dirty="0"/>
-              <a:t>JSP(Java Server Page</a:t>
+              <a:t> JSP(Java Server Page</a:t>
             </a:r>
             <a:endParaRPr lang="ko-KR" altLang="en-US" dirty="0"/>
           </a:p>
@@ -13915,11 +13549,11 @@
           <a:lstStyle/>
           <a:p>
             <a:r>
-              <a:rPr lang="ko-KR" altLang="en-US" sz="1400" dirty="0" smtClean="0"/>
+              <a:rPr lang="ko-KR" altLang="en-US" sz="1400" dirty="0"/>
               <a:t>클라이언트</a:t>
             </a:r>
             <a:r>
-              <a:rPr lang="en-US" altLang="ko-KR" sz="1400" dirty="0" smtClean="0"/>
+              <a:rPr lang="en-US" altLang="ko-KR" sz="1400" dirty="0"/>
               <a:t>(Client)</a:t>
             </a:r>
             <a:endParaRPr lang="ko-KR" altLang="en-US" sz="1400" dirty="0"/>
@@ -13949,18 +13583,17 @@
           <a:lstStyle/>
           <a:p>
             <a:r>
-              <a:rPr lang="ko-KR" altLang="en-US" sz="1600" dirty="0" smtClean="0"/>
+              <a:rPr lang="ko-KR" altLang="en-US" sz="1600" dirty="0"/>
               <a:t>① </a:t>
             </a:r>
             <a:r>
-              <a:rPr lang="en-US" altLang="ko-KR" sz="1600" dirty="0" smtClean="0"/>
+              <a:rPr lang="en-US" altLang="ko-KR" sz="1600" dirty="0"/>
               <a:t>JSP</a:t>
             </a:r>
             <a:r>
-              <a:rPr lang="ko-KR" altLang="en-US" sz="1600" dirty="0" smtClean="0"/>
+              <a:rPr lang="ko-KR" altLang="en-US" sz="1600" dirty="0"/>
               <a:t> 요청</a:t>
             </a:r>
-            <a:endParaRPr lang="ko-KR" altLang="en-US" sz="1600" dirty="0"/>
           </a:p>
         </p:txBody>
       </p:sp>
@@ -13987,22 +13620,21 @@
           <a:lstStyle/>
           <a:p>
             <a:r>
-              <a:rPr lang="ko-KR" altLang="en-US" sz="1400" dirty="0" smtClean="0"/>
+              <a:rPr lang="ko-KR" altLang="en-US" sz="1400" dirty="0"/>
               <a:t>④ </a:t>
             </a:r>
             <a:r>
-              <a:rPr lang="en-US" altLang="ko-KR" sz="1400" dirty="0" smtClean="0"/>
+              <a:rPr lang="en-US" altLang="ko-KR" sz="1400" dirty="0"/>
               <a:t>JSP </a:t>
             </a:r>
             <a:r>
-              <a:rPr lang="ko-KR" altLang="en-US" sz="1400" dirty="0" err="1" smtClean="0"/>
+              <a:rPr lang="ko-KR" altLang="en-US" sz="1400" dirty="0" err="1"/>
               <a:t>서블릿</a:t>
             </a:r>
             <a:r>
-              <a:rPr lang="ko-KR" altLang="en-US" sz="1400" dirty="0" smtClean="0"/>
+              <a:rPr lang="ko-KR" altLang="en-US" sz="1400" dirty="0"/>
               <a:t> 응답</a:t>
             </a:r>
-            <a:endParaRPr lang="ko-KR" altLang="en-US" sz="1400" dirty="0"/>
           </a:p>
         </p:txBody>
       </p:sp>
@@ -14156,14 +13788,13 @@
           <a:p>
             <a:pPr algn="ctr"/>
             <a:r>
-              <a:rPr lang="en-US" altLang="ko-KR" sz="1400" smtClean="0"/>
+              <a:rPr lang="en-US" altLang="ko-KR" sz="1400"/>
               <a:t>JSP </a:t>
             </a:r>
             <a:r>
-              <a:rPr lang="ko-KR" altLang="en-US" sz="1400" dirty="0" smtClean="0"/>
+              <a:rPr lang="ko-KR" altLang="en-US" sz="1400" dirty="0"/>
               <a:t>페이지</a:t>
             </a:r>
-            <a:endParaRPr lang="ko-KR" altLang="en-US" sz="1400" dirty="0"/>
           </a:p>
         </p:txBody>
       </p:sp>
@@ -14208,22 +13839,21 @@
           <a:p>
             <a:pPr algn="ctr"/>
             <a:r>
-              <a:rPr lang="ko-KR" altLang="en-US" sz="1400" dirty="0" err="1" smtClean="0"/>
+              <a:rPr lang="ko-KR" altLang="en-US" sz="1400" dirty="0" err="1"/>
               <a:t>서블릿</a:t>
             </a:r>
             <a:r>
-              <a:rPr lang="ko-KR" altLang="en-US" sz="1400" dirty="0" smtClean="0"/>
+              <a:rPr lang="ko-KR" altLang="en-US" sz="1400" dirty="0"/>
               <a:t> </a:t>
             </a:r>
-            <a:endParaRPr lang="en-US" altLang="ko-KR" sz="1400" dirty="0" smtClean="0"/>
+            <a:endParaRPr lang="en-US" altLang="ko-KR" sz="1400" dirty="0"/>
           </a:p>
           <a:p>
             <a:pPr algn="ctr"/>
             <a:r>
-              <a:rPr lang="ko-KR" altLang="en-US" sz="1400" dirty="0" smtClean="0"/>
+              <a:rPr lang="ko-KR" altLang="en-US" sz="1400" dirty="0"/>
               <a:t>프로그램</a:t>
             </a:r>
-            <a:endParaRPr lang="ko-KR" altLang="en-US" sz="1400" dirty="0"/>
           </a:p>
         </p:txBody>
       </p:sp>
@@ -14268,22 +13898,21 @@
           <a:p>
             <a:pPr algn="ctr"/>
             <a:r>
-              <a:rPr lang="ko-KR" altLang="en-US" sz="1400" dirty="0" err="1" smtClean="0"/>
+              <a:rPr lang="ko-KR" altLang="en-US" sz="1400" dirty="0" err="1"/>
               <a:t>서블릿</a:t>
             </a:r>
             <a:r>
-              <a:rPr lang="ko-KR" altLang="en-US" sz="1400" dirty="0" smtClean="0"/>
+              <a:rPr lang="ko-KR" altLang="en-US" sz="1400" dirty="0"/>
               <a:t> </a:t>
             </a:r>
-            <a:endParaRPr lang="en-US" altLang="ko-KR" sz="1400" dirty="0" smtClean="0"/>
+            <a:endParaRPr lang="en-US" altLang="ko-KR" sz="1400" dirty="0"/>
           </a:p>
           <a:p>
             <a:pPr algn="ctr"/>
             <a:r>
-              <a:rPr lang="ko-KR" altLang="en-US" sz="1400" dirty="0" smtClean="0"/>
+              <a:rPr lang="ko-KR" altLang="en-US" sz="1400" dirty="0"/>
               <a:t>클래스</a:t>
             </a:r>
-            <a:endParaRPr lang="ko-KR" altLang="en-US" sz="1400" dirty="0"/>
           </a:p>
         </p:txBody>
       </p:sp>
@@ -14328,14 +13957,13 @@
           <a:p>
             <a:pPr algn="ctr"/>
             <a:r>
-              <a:rPr lang="en-US" altLang="ko-KR" sz="1600" dirty="0" smtClean="0"/>
+              <a:rPr lang="en-US" altLang="ko-KR" sz="1600" dirty="0"/>
               <a:t>JSP </a:t>
             </a:r>
             <a:r>
-              <a:rPr lang="ko-KR" altLang="en-US" sz="1600" dirty="0" smtClean="0"/>
+              <a:rPr lang="ko-KR" altLang="en-US" sz="1600" dirty="0"/>
               <a:t>컨테이너</a:t>
             </a:r>
-            <a:endParaRPr lang="ko-KR" altLang="en-US" sz="1600" dirty="0"/>
           </a:p>
         </p:txBody>
       </p:sp>
@@ -14434,7 +14062,7 @@
           <a:p>
             <a:pPr algn="ctr"/>
             <a:r>
-              <a:rPr lang="en-US" altLang="ko-KR" sz="1600" dirty="0" err="1" smtClean="0">
+              <a:rPr lang="en-US" altLang="ko-KR" sz="1600" dirty="0" err="1">
                 <a:solidFill>
                   <a:srgbClr val="0070C0"/>
                 </a:solidFill>
@@ -14473,7 +14101,7 @@
           <a:p>
             <a:pPr algn="ctr"/>
             <a:r>
-              <a:rPr lang="en-US" altLang="ko-KR" sz="1600" dirty="0" smtClean="0">
+              <a:rPr lang="en-US" altLang="ko-KR" sz="1600" dirty="0">
                 <a:solidFill>
                   <a:srgbClr val="0070C0"/>
                 </a:solidFill>
@@ -14512,7 +14140,7 @@
           <a:p>
             <a:pPr algn="ctr"/>
             <a:r>
-              <a:rPr lang="en-US" altLang="ko-KR" sz="1600" dirty="0" err="1" smtClean="0">
+              <a:rPr lang="en-US" altLang="ko-KR" sz="1600" dirty="0" err="1">
                 <a:solidFill>
                   <a:srgbClr val="0070C0"/>
                 </a:solidFill>
@@ -14638,12 +14266,8 @@
           <a:p>
             <a:pPr algn="ctr"/>
             <a:r>
-              <a:rPr lang="ko-KR" altLang="en-US" sz="1600" dirty="0" smtClean="0"/>
-              <a:t>② 변</a:t>
-            </a:r>
-            <a:r>
               <a:rPr lang="ko-KR" altLang="en-US" sz="1600" dirty="0"/>
-              <a:t>환</a:t>
+              <a:t>② 변환</a:t>
             </a:r>
           </a:p>
         </p:txBody>
@@ -14689,10 +14313,9 @@
           <a:p>
             <a:pPr algn="ctr"/>
             <a:r>
-              <a:rPr lang="ko-KR" altLang="en-US" sz="1600" dirty="0" smtClean="0"/>
+              <a:rPr lang="ko-KR" altLang="en-US" sz="1600" dirty="0"/>
               <a:t>③ 컴파일</a:t>
             </a:r>
-            <a:endParaRPr lang="ko-KR" altLang="en-US" sz="1600" dirty="0"/>
           </a:p>
         </p:txBody>
       </p:sp>
@@ -14724,19 +14347,19 @@
               </a:lnSpc>
             </a:pPr>
             <a:r>
-              <a:rPr lang="ko-KR" altLang="en-US" sz="1600" dirty="0" smtClean="0"/>
+              <a:rPr lang="ko-KR" altLang="en-US" sz="1600" dirty="0"/>
               <a:t>정적인 파일 </a:t>
             </a:r>
             <a:r>
-              <a:rPr lang="en-US" altLang="ko-KR" sz="1600" dirty="0" smtClean="0"/>
+              <a:rPr lang="en-US" altLang="ko-KR" sz="1600" dirty="0"/>
               <a:t>– HTML</a:t>
             </a:r>
             <a:r>
-              <a:rPr lang="ko-KR" altLang="en-US" sz="1600" dirty="0" smtClean="0"/>
+              <a:rPr lang="ko-KR" altLang="en-US" sz="1600" dirty="0"/>
               <a:t>이나 오브젝트는 웹 서버에서 처리</a:t>
             </a:r>
             <a:r>
-              <a:rPr lang="en-US" altLang="ko-KR" sz="1600" dirty="0" smtClean="0"/>
+              <a:rPr lang="en-US" altLang="ko-KR" sz="1600" dirty="0"/>
               <a:t>.</a:t>
             </a:r>
           </a:p>
@@ -14747,18 +14370,17 @@
               </a:lnSpc>
             </a:pPr>
             <a:r>
-              <a:rPr lang="ko-KR" altLang="en-US" sz="1600" dirty="0" smtClean="0"/>
+              <a:rPr lang="ko-KR" altLang="en-US" sz="1600" dirty="0"/>
               <a:t>동적인 파일 </a:t>
             </a:r>
             <a:r>
-              <a:rPr lang="en-US" altLang="ko-KR" sz="1600" dirty="0" smtClean="0"/>
+              <a:rPr lang="en-US" altLang="ko-KR" sz="1600" dirty="0"/>
               <a:t>– </a:t>
             </a:r>
             <a:r>
-              <a:rPr lang="ko-KR" altLang="en-US" sz="1600" dirty="0" smtClean="0"/>
+              <a:rPr lang="ko-KR" altLang="en-US" sz="1600" dirty="0"/>
               <a:t>웹 컨테이너로 넘겨서 처리함</a:t>
             </a:r>
-            <a:endParaRPr lang="ko-KR" altLang="en-US" sz="1600" dirty="0"/>
           </a:p>
         </p:txBody>
       </p:sp>
@@ -14772,13 +14394,6 @@
   <p:clrMapOvr>
     <a:masterClrMapping/>
   </p:clrMapOvr>
-  <p:timing>
-    <p:tnLst>
-      <p:par>
-        <p:cTn id="1" dur="indefinite" restart="never" nodeType="tmRoot"/>
-      </p:par>
-    </p:tnLst>
-  </p:timing>
 </p:sld>
 </file>
 
@@ -14836,30 +14451,25 @@
           </a:lstStyle>
           <a:p>
             <a:r>
-              <a:rPr lang="en-US" altLang="ko-KR" dirty="0" smtClean="0"/>
-              <a:t> </a:t>
-            </a:r>
-            <a:r>
               <a:rPr lang="en-US" altLang="ko-KR" dirty="0"/>
-              <a:t>JSP </a:t>
+              <a:t> JSP </a:t>
             </a:r>
             <a:r>
               <a:rPr lang="ko-KR" altLang="en-US" dirty="0"/>
               <a:t>태그 </a:t>
             </a:r>
             <a:r>
-              <a:rPr lang="en-US" altLang="ko-KR" dirty="0" smtClean="0"/>
+              <a:rPr lang="en-US" altLang="ko-KR" dirty="0"/>
               <a:t>- </a:t>
             </a:r>
             <a:r>
-              <a:rPr lang="ko-KR" altLang="en-US" dirty="0" err="1" smtClean="0"/>
+              <a:rPr lang="ko-KR" altLang="en-US" dirty="0" err="1"/>
               <a:t>디렉티브</a:t>
             </a:r>
             <a:r>
-              <a:rPr lang="ko-KR" altLang="en-US" dirty="0" smtClean="0"/>
+              <a:rPr lang="ko-KR" altLang="en-US" dirty="0"/>
               <a:t> 태그</a:t>
             </a:r>
-            <a:endParaRPr lang="ko-KR" altLang="en-US" dirty="0"/>
           </a:p>
         </p:txBody>
       </p:sp>
@@ -14891,14 +14501,14 @@
               </a:lnSpc>
             </a:pPr>
             <a:r>
-              <a:rPr lang="ko-KR" altLang="en-US" sz="2200" b="1" dirty="0" err="1" smtClean="0"/>
+              <a:rPr lang="ko-KR" altLang="en-US" sz="2200" b="1" dirty="0" err="1"/>
               <a:t>디렉티브</a:t>
             </a:r>
             <a:r>
-              <a:rPr lang="ko-KR" altLang="en-US" sz="2200" b="1" dirty="0" smtClean="0"/>
+              <a:rPr lang="ko-KR" altLang="en-US" sz="2200" b="1" dirty="0"/>
               <a:t> 태그</a:t>
             </a:r>
-            <a:endParaRPr lang="en-US" altLang="ko-KR" sz="2200" b="1" dirty="0" smtClean="0"/>
+            <a:endParaRPr lang="en-US" altLang="ko-KR" sz="2200" b="1" dirty="0"/>
           </a:p>
           <a:p>
             <a:pPr marL="342900" indent="-342900">
@@ -14909,14 +14519,14 @@
               <a:buChar char="•"/>
             </a:pPr>
             <a:r>
-              <a:rPr lang="en-US" altLang="ko-KR" dirty="0" smtClean="0"/>
+              <a:rPr lang="en-US" altLang="ko-KR" dirty="0"/>
               <a:t>JSP </a:t>
             </a:r>
             <a:r>
-              <a:rPr lang="ko-KR" altLang="en-US" dirty="0" smtClean="0"/>
+              <a:rPr lang="ko-KR" altLang="en-US" dirty="0"/>
               <a:t>페이지를 어떻게 처리할 것인지를 설정하는 태그</a:t>
             </a:r>
-            <a:endParaRPr lang="en-US" altLang="ko-KR" dirty="0" smtClean="0"/>
+            <a:endParaRPr lang="en-US" altLang="ko-KR" dirty="0"/>
           </a:p>
           <a:p>
             <a:pPr marL="342900" indent="-342900">
@@ -14927,47 +14537,47 @@
               <a:buChar char="•"/>
             </a:pPr>
             <a:r>
-              <a:rPr lang="en-US" altLang="ko-KR" dirty="0" smtClean="0"/>
+              <a:rPr lang="en-US" altLang="ko-KR" dirty="0"/>
               <a:t>JSP </a:t>
             </a:r>
             <a:r>
-              <a:rPr lang="ko-KR" altLang="en-US" dirty="0" smtClean="0"/>
+              <a:rPr lang="ko-KR" altLang="en-US" dirty="0"/>
               <a:t>페이지가 </a:t>
             </a:r>
             <a:r>
-              <a:rPr lang="ko-KR" altLang="en-US" dirty="0" err="1" smtClean="0"/>
+              <a:rPr lang="ko-KR" altLang="en-US" dirty="0" err="1"/>
               <a:t>서블릿</a:t>
             </a:r>
             <a:r>
-              <a:rPr lang="ko-KR" altLang="en-US" dirty="0" smtClean="0"/>
+              <a:rPr lang="ko-KR" altLang="en-US" dirty="0"/>
               <a:t> 프로그램에서 </a:t>
             </a:r>
             <a:r>
-              <a:rPr lang="ko-KR" altLang="en-US" dirty="0" err="1" smtClean="0"/>
+              <a:rPr lang="ko-KR" altLang="en-US" dirty="0" err="1"/>
               <a:t>서블릿</a:t>
             </a:r>
             <a:r>
-              <a:rPr lang="ko-KR" altLang="en-US" dirty="0" smtClean="0"/>
+              <a:rPr lang="ko-KR" altLang="en-US" dirty="0"/>
               <a:t> 클래스로 변환할 때 </a:t>
             </a:r>
             <a:r>
-              <a:rPr lang="en-US" altLang="ko-KR" dirty="0" smtClean="0"/>
+              <a:rPr lang="en-US" altLang="ko-KR" dirty="0"/>
               <a:t>JSP </a:t>
             </a:r>
             <a:r>
-              <a:rPr lang="ko-KR" altLang="en-US" dirty="0" smtClean="0"/>
+              <a:rPr lang="ko-KR" altLang="en-US" dirty="0"/>
               <a:t>페이지와 관련된 정보를 </a:t>
             </a:r>
             <a:r>
-              <a:rPr lang="en-US" altLang="ko-KR" dirty="0" smtClean="0"/>
+              <a:rPr lang="en-US" altLang="ko-KR" dirty="0"/>
               <a:t>JSP </a:t>
             </a:r>
             <a:r>
-              <a:rPr lang="ko-KR" altLang="en-US" dirty="0" smtClean="0"/>
+              <a:rPr lang="ko-KR" altLang="en-US" dirty="0"/>
               <a:t>컨테이너에 지시하는 메시지 이다</a:t>
             </a:r>
             <a:r>
-              <a:rPr lang="en-US" altLang="ko-KR" dirty="0" smtClean="0"/>
+              <a:rPr lang="en-US" altLang="ko-KR" dirty="0"/>
               <a:t>.</a:t>
             </a:r>
           </a:p>
@@ -15001,30 +14611,22 @@
               </a:lnSpc>
             </a:pPr>
             <a:r>
-              <a:rPr lang="ko-KR" altLang="en-US" b="1" dirty="0" err="1" smtClean="0">
+              <a:rPr lang="ko-KR" altLang="en-US" b="1" dirty="0" err="1">
                 <a:solidFill>
                   <a:srgbClr val="0070C0"/>
                 </a:solidFill>
               </a:rPr>
-              <a:t>디렉티</a:t>
-            </a:r>
-            <a:r>
-              <a:rPr lang="ko-KR" altLang="en-US" b="1" dirty="0" err="1">
-                <a:solidFill>
-                  <a:srgbClr val="0070C0"/>
-                </a:solidFill>
-              </a:rPr>
-              <a:t>브</a:t>
-            </a:r>
-            <a:r>
-              <a:rPr lang="ko-KR" altLang="en-US" b="1" dirty="0" smtClean="0">
+              <a:t>디렉티브</a:t>
+            </a:r>
+            <a:r>
+              <a:rPr lang="ko-KR" altLang="en-US" b="1" dirty="0">
                 <a:solidFill>
                   <a:srgbClr val="0070C0"/>
                 </a:solidFill>
               </a:rPr>
               <a:t> 태그의 종류</a:t>
             </a:r>
-            <a:endParaRPr lang="en-US" altLang="ko-KR" b="1" dirty="0" smtClean="0">
+            <a:endParaRPr lang="en-US" altLang="ko-KR" b="1" dirty="0">
               <a:solidFill>
                 <a:srgbClr val="0070C0"/>
               </a:solidFill>
@@ -15038,9 +14640,7 @@
           <p:cNvGraphicFramePr>
             <a:graphicFrameLocks noGrp="1"/>
           </p:cNvGraphicFramePr>
-          <p:nvPr>
-            <p:extLst/>
-          </p:nvPr>
+          <p:nvPr/>
         </p:nvGraphicFramePr>
         <p:xfrm>
           <a:off x="992560" y="3789040"/>
@@ -15083,14 +14683,13 @@
                     <a:p>
                       <a:pPr algn="ctr" latinLnBrk="1"/>
                       <a:r>
-                        <a:rPr lang="ko-KR" altLang="en-US" sz="1800" dirty="0" err="1" smtClean="0"/>
+                        <a:rPr lang="ko-KR" altLang="en-US" sz="1800" dirty="0" err="1"/>
                         <a:t>디렉티브</a:t>
                       </a:r>
                       <a:r>
-                        <a:rPr lang="ko-KR" altLang="en-US" sz="1800" dirty="0" smtClean="0"/>
+                        <a:rPr lang="ko-KR" altLang="en-US" sz="1800" dirty="0"/>
                         <a:t> 태그</a:t>
                       </a:r>
-                      <a:endParaRPr lang="ko-KR" altLang="en-US" sz="1800" dirty="0"/>
                     </a:p>
                   </a:txBody>
                   <a:tcPr anchor="ctr">
@@ -15111,10 +14710,9 @@
                     <a:p>
                       <a:pPr algn="ctr" latinLnBrk="1"/>
                       <a:r>
-                        <a:rPr lang="ko-KR" altLang="en-US" sz="1800" dirty="0" smtClean="0"/>
+                        <a:rPr lang="ko-KR" altLang="en-US" sz="1800" dirty="0"/>
                         <a:t>형식</a:t>
                       </a:r>
-                      <a:endParaRPr lang="ko-KR" altLang="en-US" sz="1800" dirty="0"/>
                     </a:p>
                   </a:txBody>
                   <a:tcPr anchor="ctr">
@@ -15132,10 +14730,9 @@
                     <a:p>
                       <a:pPr algn="ctr" latinLnBrk="1"/>
                       <a:r>
-                        <a:rPr lang="ko-KR" altLang="en-US" sz="1800" dirty="0" smtClean="0"/>
+                        <a:rPr lang="ko-KR" altLang="en-US" sz="1800" dirty="0"/>
                         <a:t>설 명</a:t>
                       </a:r>
-                      <a:endParaRPr lang="ko-KR" altLang="en-US" sz="1800" dirty="0"/>
                     </a:p>
                   </a:txBody>
                   <a:tcPr anchor="ctr">
@@ -15163,7 +14760,7 @@
                     <a:p>
                       <a:pPr algn="l" latinLnBrk="1"/>
                       <a:r>
-                        <a:rPr lang="en-US" altLang="ko-KR" sz="1800" dirty="0" smtClean="0"/>
+                        <a:rPr lang="en-US" altLang="ko-KR" sz="1800" dirty="0"/>
                         <a:t> page</a:t>
                       </a:r>
                     </a:p>
@@ -15181,7 +14778,7 @@
                     <a:p>
                       <a:pPr algn="l" latinLnBrk="1"/>
                       <a:r>
-                        <a:rPr lang="en-US" altLang="ko-KR" sz="1800" dirty="0" smtClean="0">
+                        <a:rPr lang="en-US" altLang="ko-KR" sz="1800" dirty="0">
                           <a:solidFill>
                             <a:srgbClr val="C00000"/>
                           </a:solidFill>
@@ -15189,7 +14786,7 @@
                         <a:t>&lt;%@</a:t>
                       </a:r>
                       <a:r>
-                        <a:rPr lang="en-US" altLang="ko-KR" sz="1800" baseline="0" dirty="0" smtClean="0">
+                        <a:rPr lang="en-US" altLang="ko-KR" sz="1800" baseline="0" dirty="0">
                           <a:solidFill>
                             <a:srgbClr val="C00000"/>
                           </a:solidFill>
@@ -15197,7 +14794,7 @@
                         <a:t> page …</a:t>
                       </a:r>
                       <a:r>
-                        <a:rPr lang="en-US" altLang="ko-KR" sz="1800" dirty="0" smtClean="0">
+                        <a:rPr lang="en-US" altLang="ko-KR" sz="1800" dirty="0">
                           <a:solidFill>
                             <a:srgbClr val="C00000"/>
                           </a:solidFill>
@@ -15215,14 +14812,13 @@
                     <a:p>
                       <a:pPr algn="l" latinLnBrk="1"/>
                       <a:r>
-                        <a:rPr lang="en-US" altLang="ko-KR" sz="1600" dirty="0" smtClean="0"/>
+                        <a:rPr lang="en-US" altLang="ko-KR" sz="1600" dirty="0"/>
                         <a:t> JSP </a:t>
                       </a:r>
                       <a:r>
-                        <a:rPr lang="ko-KR" altLang="en-US" sz="1600" dirty="0" smtClean="0"/>
+                        <a:rPr lang="ko-KR" altLang="en-US" sz="1600" dirty="0"/>
                         <a:t>페이지에 대한 정보를 설정</a:t>
                       </a:r>
-                      <a:endParaRPr lang="ko-KR" altLang="en-US" sz="1600" dirty="0"/>
                     </a:p>
                   </a:txBody>
                   <a:tcPr anchor="ctr">
@@ -15245,7 +14841,7 @@
                     <a:p>
                       <a:pPr algn="l" latinLnBrk="1"/>
                       <a:r>
-                        <a:rPr lang="en-US" altLang="ko-KR" sz="1800" dirty="0" smtClean="0"/>
+                        <a:rPr lang="en-US" altLang="ko-KR" sz="1800" dirty="0"/>
                         <a:t> include</a:t>
                       </a:r>
                     </a:p>
@@ -15263,7 +14859,7 @@
                     <a:p>
                       <a:pPr algn="l" latinLnBrk="1"/>
                       <a:r>
-                        <a:rPr lang="en-US" altLang="ko-KR" sz="1800" dirty="0" smtClean="0">
+                        <a:rPr lang="en-US" altLang="ko-KR" sz="1800" dirty="0">
                           <a:solidFill>
                             <a:srgbClr val="C00000"/>
                           </a:solidFill>
@@ -15271,7 +14867,7 @@
                         <a:t>&lt;%@</a:t>
                       </a:r>
                       <a:r>
-                        <a:rPr lang="en-US" altLang="ko-KR" sz="1800" baseline="0" dirty="0" smtClean="0">
+                        <a:rPr lang="en-US" altLang="ko-KR" sz="1800" baseline="0" dirty="0">
                           <a:solidFill>
                             <a:srgbClr val="C00000"/>
                           </a:solidFill>
@@ -15279,7 +14875,7 @@
                         <a:t> include …</a:t>
                       </a:r>
                       <a:r>
-                        <a:rPr lang="en-US" altLang="ko-KR" sz="1800" dirty="0" smtClean="0">
+                        <a:rPr lang="en-US" altLang="ko-KR" sz="1800" dirty="0">
                           <a:solidFill>
                             <a:srgbClr val="C00000"/>
                           </a:solidFill>
@@ -15313,11 +14909,11 @@
                         <a:defRPr/>
                       </a:pPr>
                       <a:r>
-                        <a:rPr lang="en-US" altLang="ko-KR" sz="1600" dirty="0" smtClean="0"/>
+                        <a:rPr lang="en-US" altLang="ko-KR" sz="1600" dirty="0"/>
                         <a:t> JSP </a:t>
                       </a:r>
                       <a:r>
-                        <a:rPr lang="ko-KR" altLang="en-US" sz="1600" dirty="0" smtClean="0"/>
+                        <a:rPr lang="ko-KR" altLang="en-US" sz="1600" dirty="0"/>
                         <a:t>페이지의 특정 영역에 다른 문서 포함</a:t>
                       </a:r>
                     </a:p>
@@ -15342,14 +14938,14 @@
                     <a:p>
                       <a:pPr algn="l" latinLnBrk="1"/>
                       <a:r>
-                        <a:rPr lang="en-US" altLang="ko-KR" sz="1800" dirty="0" smtClean="0"/>
+                        <a:rPr lang="en-US" altLang="ko-KR" sz="1800" dirty="0"/>
                         <a:t> </a:t>
                       </a:r>
                       <a:r>
-                        <a:rPr lang="en-US" altLang="ko-KR" sz="1800" dirty="0" err="1" smtClean="0"/>
+                        <a:rPr lang="en-US" altLang="ko-KR" sz="1800" dirty="0" err="1"/>
                         <a:t>taglib</a:t>
                       </a:r>
-                      <a:endParaRPr lang="en-US" altLang="ko-KR" sz="1800" dirty="0" smtClean="0"/>
+                      <a:endParaRPr lang="en-US" altLang="ko-KR" sz="1800" dirty="0"/>
                     </a:p>
                   </a:txBody>
                   <a:tcPr anchor="ctr">
@@ -15365,7 +14961,7 @@
                     <a:p>
                       <a:pPr algn="l" latinLnBrk="1"/>
                       <a:r>
-                        <a:rPr lang="en-US" altLang="ko-KR" sz="1800" dirty="0" smtClean="0">
+                        <a:rPr lang="en-US" altLang="ko-KR" sz="1800" dirty="0">
                           <a:solidFill>
                             <a:srgbClr val="C00000"/>
                           </a:solidFill>
@@ -15373,7 +14969,7 @@
                         <a:t>&lt;%@</a:t>
                       </a:r>
                       <a:r>
-                        <a:rPr lang="en-US" altLang="ko-KR" sz="1800" baseline="0" dirty="0" smtClean="0">
+                        <a:rPr lang="en-US" altLang="ko-KR" sz="1800" baseline="0" dirty="0">
                           <a:solidFill>
                             <a:srgbClr val="C00000"/>
                           </a:solidFill>
@@ -15381,7 +14977,7 @@
                         <a:t> </a:t>
                       </a:r>
                       <a:r>
-                        <a:rPr lang="en-US" altLang="ko-KR" sz="1800" baseline="0" dirty="0" err="1" smtClean="0">
+                        <a:rPr lang="en-US" altLang="ko-KR" sz="1800" baseline="0" dirty="0" err="1">
                           <a:solidFill>
                             <a:srgbClr val="C00000"/>
                           </a:solidFill>
@@ -15389,7 +14985,7 @@
                         <a:t>taglib</a:t>
                       </a:r>
                       <a:r>
-                        <a:rPr lang="en-US" altLang="ko-KR" sz="1800" baseline="0" dirty="0" smtClean="0">
+                        <a:rPr lang="en-US" altLang="ko-KR" sz="1800" baseline="0" dirty="0">
                           <a:solidFill>
                             <a:srgbClr val="C00000"/>
                           </a:solidFill>
@@ -15397,7 +14993,7 @@
                         <a:t> …</a:t>
                       </a:r>
                       <a:r>
-                        <a:rPr lang="en-US" altLang="ko-KR" sz="1800" dirty="0" smtClean="0">
+                        <a:rPr lang="en-US" altLang="ko-KR" sz="1800" dirty="0">
                           <a:solidFill>
                             <a:srgbClr val="C00000"/>
                           </a:solidFill>
@@ -15431,11 +15027,11 @@
                         <a:defRPr/>
                       </a:pPr>
                       <a:r>
-                        <a:rPr lang="en-US" altLang="ko-KR" sz="1600" dirty="0" smtClean="0"/>
+                        <a:rPr lang="en-US" altLang="ko-KR" sz="1600" dirty="0"/>
                         <a:t> JSP </a:t>
                       </a:r>
                       <a:r>
-                        <a:rPr lang="ko-KR" altLang="en-US" sz="1600" dirty="0" smtClean="0"/>
+                        <a:rPr lang="ko-KR" altLang="en-US" sz="1600" dirty="0"/>
                         <a:t>페이지에 사용할 태그 라이브러리 설정</a:t>
                       </a:r>
                     </a:p>
@@ -15466,13 +15062,6 @@
   <p:clrMapOvr>
     <a:masterClrMapping/>
   </p:clrMapOvr>
-  <p:timing>
-    <p:tnLst>
-      <p:par>
-        <p:cTn id="1" dur="indefinite" restart="never" nodeType="tmRoot"/>
-      </p:par>
-    </p:tnLst>
-  </p:timing>
 </p:sld>
 </file>
 
@@ -15530,12 +15119,8 @@
           </a:lstStyle>
           <a:p>
             <a:r>
-              <a:rPr lang="en-US" altLang="ko-KR" dirty="0" smtClean="0"/>
-              <a:t> </a:t>
-            </a:r>
-            <a:r>
               <a:rPr lang="en-US" altLang="ko-KR" dirty="0"/>
-              <a:t>JSP </a:t>
+              <a:t> JSP </a:t>
             </a:r>
             <a:r>
               <a:rPr lang="ko-KR" altLang="en-US" dirty="0"/>
@@ -15546,14 +15131,13 @@
               <a:t>- </a:t>
             </a:r>
             <a:r>
-              <a:rPr lang="ko-KR" altLang="en-US" dirty="0" err="1" smtClean="0"/>
+              <a:rPr lang="ko-KR" altLang="en-US" dirty="0" err="1"/>
               <a:t>디렉티브</a:t>
             </a:r>
             <a:r>
-              <a:rPr lang="ko-KR" altLang="en-US" dirty="0" smtClean="0"/>
+              <a:rPr lang="ko-KR" altLang="en-US" dirty="0"/>
               <a:t> 태그</a:t>
             </a:r>
-            <a:endParaRPr lang="ko-KR" altLang="en-US" dirty="0"/>
           </a:p>
         </p:txBody>
       </p:sp>
@@ -15585,34 +15169,34 @@
               </a:lnSpc>
             </a:pPr>
             <a:r>
-              <a:rPr lang="en-US" altLang="ko-KR" sz="2200" b="1" dirty="0" smtClean="0"/>
+              <a:rPr lang="en-US" altLang="ko-KR" sz="2200" b="1" dirty="0"/>
               <a:t>page </a:t>
             </a:r>
             <a:r>
-              <a:rPr lang="ko-KR" altLang="en-US" sz="2200" b="1" dirty="0" err="1" smtClean="0"/>
+              <a:rPr lang="ko-KR" altLang="en-US" sz="2200" b="1" dirty="0" err="1"/>
               <a:t>디렉티브</a:t>
             </a:r>
             <a:r>
-              <a:rPr lang="ko-KR" altLang="en-US" sz="2200" b="1" dirty="0" smtClean="0"/>
+              <a:rPr lang="ko-KR" altLang="en-US" sz="2200" b="1" dirty="0"/>
               <a:t> 태그 </a:t>
             </a:r>
             <a:r>
-              <a:rPr lang="en-US" altLang="ko-KR" sz="2200" b="1" dirty="0" smtClean="0"/>
+              <a:rPr lang="en-US" altLang="ko-KR" sz="2200" b="1" dirty="0"/>
               <a:t>– </a:t>
             </a:r>
             <a:r>
-              <a:rPr lang="en-US" altLang="ko-KR" sz="2200" b="1" dirty="0" err="1" smtClean="0"/>
+              <a:rPr lang="en-US" altLang="ko-KR" sz="2200" b="1" dirty="0" err="1"/>
               <a:t>contentType</a:t>
             </a:r>
             <a:r>
-              <a:rPr lang="en-US" altLang="ko-KR" sz="2200" b="1" dirty="0" smtClean="0"/>
+              <a:rPr lang="en-US" altLang="ko-KR" sz="2200" b="1" dirty="0"/>
               <a:t> </a:t>
             </a:r>
             <a:r>
-              <a:rPr lang="ko-KR" altLang="en-US" sz="2200" b="1" dirty="0" smtClean="0"/>
+              <a:rPr lang="ko-KR" altLang="en-US" sz="2200" b="1" dirty="0"/>
               <a:t>속성</a:t>
             </a:r>
-            <a:endParaRPr lang="en-US" altLang="ko-KR" sz="2200" b="1" dirty="0" smtClean="0"/>
+            <a:endParaRPr lang="en-US" altLang="ko-KR" sz="2200" b="1" dirty="0"/>
           </a:p>
           <a:p>
             <a:pPr marL="342900" indent="-342900">
@@ -15623,18 +15207,18 @@
               <a:buChar char="•"/>
             </a:pPr>
             <a:r>
-              <a:rPr lang="ko-KR" altLang="en-US" dirty="0" smtClean="0"/>
+              <a:rPr lang="ko-KR" altLang="en-US" dirty="0"/>
               <a:t>현재 </a:t>
             </a:r>
             <a:r>
-              <a:rPr lang="en-US" altLang="ko-KR" dirty="0" smtClean="0"/>
+              <a:rPr lang="en-US" altLang="ko-KR" dirty="0"/>
               <a:t>JSP </a:t>
             </a:r>
             <a:r>
-              <a:rPr lang="ko-KR" altLang="en-US" dirty="0" smtClean="0"/>
+              <a:rPr lang="ko-KR" altLang="en-US" dirty="0"/>
               <a:t>페이지에 대한 정보를 설정하는 태그</a:t>
             </a:r>
-            <a:endParaRPr lang="en-US" altLang="ko-KR" dirty="0" smtClean="0"/>
+            <a:endParaRPr lang="en-US" altLang="ko-KR" dirty="0"/>
           </a:p>
           <a:p>
             <a:pPr marL="342900" indent="-342900">
@@ -15645,38 +15229,38 @@
               <a:buChar char="•"/>
             </a:pPr>
             <a:r>
-              <a:rPr lang="ko-KR" altLang="en-US" dirty="0" err="1" smtClean="0"/>
+              <a:rPr lang="ko-KR" altLang="en-US" dirty="0" err="1"/>
               <a:t>콘텐츠</a:t>
             </a:r>
             <a:r>
-              <a:rPr lang="ko-KR" altLang="en-US" dirty="0" smtClean="0"/>
+              <a:rPr lang="ko-KR" altLang="en-US" dirty="0"/>
               <a:t> 문서의 유형</a:t>
             </a:r>
             <a:r>
-              <a:rPr lang="en-US" altLang="ko-KR" dirty="0" smtClean="0"/>
+              <a:rPr lang="en-US" altLang="ko-KR" dirty="0"/>
               <a:t>, </a:t>
             </a:r>
             <a:r>
-              <a:rPr lang="ko-KR" altLang="en-US" dirty="0" smtClean="0"/>
+              <a:rPr lang="ko-KR" altLang="en-US" dirty="0"/>
               <a:t>사용할 자바 클래스</a:t>
             </a:r>
             <a:r>
-              <a:rPr lang="en-US" altLang="ko-KR" dirty="0" smtClean="0"/>
+              <a:rPr lang="en-US" altLang="ko-KR" dirty="0"/>
               <a:t>, </a:t>
             </a:r>
             <a:r>
-              <a:rPr lang="ko-KR" altLang="en-US" dirty="0" smtClean="0"/>
+              <a:rPr lang="ko-KR" altLang="en-US" dirty="0"/>
               <a:t>오류 페이지 설정</a:t>
             </a:r>
             <a:r>
-              <a:rPr lang="en-US" altLang="ko-KR" dirty="0" smtClean="0"/>
+              <a:rPr lang="en-US" altLang="ko-KR" dirty="0"/>
               <a:t>, </a:t>
             </a:r>
             <a:r>
-              <a:rPr lang="ko-KR" altLang="en-US" dirty="0" smtClean="0"/>
+              <a:rPr lang="ko-KR" altLang="en-US" dirty="0"/>
               <a:t>세션 사용 여부 등</a:t>
             </a:r>
-            <a:endParaRPr lang="en-US" altLang="ko-KR" dirty="0" smtClean="0"/>
+            <a:endParaRPr lang="en-US" altLang="ko-KR" dirty="0"/>
           </a:p>
         </p:txBody>
       </p:sp>
@@ -15803,7 +15387,7 @@
           <a:lstStyle/>
           <a:p>
             <a:r>
-              <a:rPr lang="en-US" altLang="ko-KR" b="1" dirty="0" smtClean="0">
+              <a:rPr lang="en-US" altLang="ko-KR" b="1" dirty="0">
                 <a:solidFill>
                   <a:srgbClr val="C00000"/>
                 </a:solidFill>
@@ -15811,11 +15395,11 @@
               <a:t>&lt;%@</a:t>
             </a:r>
             <a:r>
-              <a:rPr lang="en-US" altLang="ko-KR" b="1" dirty="0" smtClean="0"/>
+              <a:rPr lang="en-US" altLang="ko-KR" b="1" dirty="0"/>
               <a:t> </a:t>
             </a:r>
             <a:r>
-              <a:rPr lang="en-US" altLang="ko-KR" b="1" dirty="0" smtClean="0">
+              <a:rPr lang="en-US" altLang="ko-KR" b="1" dirty="0">
                 <a:solidFill>
                   <a:srgbClr val="C00000"/>
                 </a:solidFill>
@@ -15823,7 +15407,7 @@
               <a:t>page </a:t>
             </a:r>
             <a:r>
-              <a:rPr lang="en-US" altLang="ko-KR" b="1" dirty="0" err="1" smtClean="0">
+              <a:rPr lang="en-US" altLang="ko-KR" b="1" dirty="0" err="1">
                 <a:solidFill>
                   <a:srgbClr val="C00000"/>
                 </a:solidFill>
@@ -15831,7 +15415,7 @@
               <a:t>contentType</a:t>
             </a:r>
             <a:r>
-              <a:rPr lang="en-US" altLang="ko-KR" b="1" dirty="0" smtClean="0">
+              <a:rPr lang="en-US" altLang="ko-KR" b="1" dirty="0">
                 <a:solidFill>
                   <a:srgbClr val="C00000"/>
                 </a:solidFill>
@@ -15839,19 +15423,19 @@
               <a:t> </a:t>
             </a:r>
             <a:r>
-              <a:rPr lang="en-US" altLang="ko-KR" b="1" dirty="0" smtClean="0"/>
+              <a:rPr lang="en-US" altLang="ko-KR" b="1" dirty="0"/>
               <a:t>= “</a:t>
             </a:r>
             <a:r>
-              <a:rPr lang="ko-KR" altLang="en-US" b="1" dirty="0" smtClean="0"/>
+              <a:rPr lang="ko-KR" altLang="en-US" b="1" dirty="0"/>
               <a:t>문서의 유형</a:t>
             </a:r>
             <a:r>
-              <a:rPr lang="en-US" altLang="ko-KR" b="1" dirty="0" smtClean="0"/>
+              <a:rPr lang="en-US" altLang="ko-KR" b="1" dirty="0"/>
               <a:t>” </a:t>
             </a:r>
             <a:r>
-              <a:rPr lang="en-US" altLang="ko-KR" b="1" dirty="0" smtClean="0">
+              <a:rPr lang="en-US" altLang="ko-KR" b="1" dirty="0">
                 <a:solidFill>
                   <a:srgbClr val="C00000"/>
                 </a:solidFill>
@@ -15876,13 +15460,6 @@
   <p:clrMapOvr>
     <a:masterClrMapping/>
   </p:clrMapOvr>
-  <p:timing>
-    <p:tnLst>
-      <p:par>
-        <p:cTn id="1" dur="indefinite" restart="never" nodeType="tmRoot"/>
-      </p:par>
-    </p:tnLst>
-  </p:timing>
 </p:sld>
 </file>
 
@@ -15940,12 +15517,8 @@
           </a:lstStyle>
           <a:p>
             <a:r>
-              <a:rPr lang="en-US" altLang="ko-KR" dirty="0" smtClean="0"/>
-              <a:t> </a:t>
-            </a:r>
-            <a:r>
               <a:rPr lang="en-US" altLang="ko-KR" dirty="0"/>
-              <a:t>JSP </a:t>
+              <a:t> JSP </a:t>
             </a:r>
             <a:r>
               <a:rPr lang="ko-KR" altLang="en-US" dirty="0"/>
@@ -15956,14 +15529,13 @@
               <a:t>- </a:t>
             </a:r>
             <a:r>
-              <a:rPr lang="ko-KR" altLang="en-US" dirty="0" err="1" smtClean="0"/>
+              <a:rPr lang="ko-KR" altLang="en-US" dirty="0" err="1"/>
               <a:t>디렉티브</a:t>
             </a:r>
             <a:r>
-              <a:rPr lang="ko-KR" altLang="en-US" dirty="0" smtClean="0"/>
+              <a:rPr lang="ko-KR" altLang="en-US" dirty="0"/>
               <a:t> 태그</a:t>
             </a:r>
-            <a:endParaRPr lang="ko-KR" altLang="en-US" dirty="0"/>
           </a:p>
         </p:txBody>
       </p:sp>
@@ -15995,19 +15567,19 @@
               </a:lnSpc>
             </a:pPr>
             <a:r>
-              <a:rPr lang="en-US" altLang="ko-KR" sz="2000" b="1" dirty="0" smtClean="0"/>
+              <a:rPr lang="en-US" altLang="ko-KR" sz="2000" b="1" dirty="0"/>
               <a:t>page </a:t>
             </a:r>
             <a:r>
-              <a:rPr lang="ko-KR" altLang="en-US" sz="2000" b="1" dirty="0" err="1" smtClean="0"/>
+              <a:rPr lang="ko-KR" altLang="en-US" sz="2000" b="1" dirty="0" err="1"/>
               <a:t>디렉티브</a:t>
             </a:r>
             <a:r>
-              <a:rPr lang="ko-KR" altLang="en-US" sz="2000" b="1" dirty="0" smtClean="0"/>
+              <a:rPr lang="ko-KR" altLang="en-US" sz="2000" b="1" dirty="0"/>
               <a:t> 태그 </a:t>
             </a:r>
             <a:r>
-              <a:rPr lang="en-US" altLang="ko-KR" sz="2000" b="1" dirty="0" smtClean="0"/>
+              <a:rPr lang="en-US" altLang="ko-KR" sz="2000" b="1" dirty="0"/>
               <a:t>– import</a:t>
             </a:r>
           </a:p>
@@ -16054,7 +15626,7 @@
           <a:lstStyle/>
           <a:p>
             <a:r>
-              <a:rPr lang="en-US" altLang="ko-KR" b="1" dirty="0" smtClean="0">
+              <a:rPr lang="en-US" altLang="ko-KR" b="1" dirty="0">
                 <a:solidFill>
                   <a:srgbClr val="C00000"/>
                 </a:solidFill>
@@ -16062,11 +15634,11 @@
               <a:t>&lt;%@</a:t>
             </a:r>
             <a:r>
-              <a:rPr lang="en-US" altLang="ko-KR" b="1" dirty="0" smtClean="0"/>
+              <a:rPr lang="en-US" altLang="ko-KR" b="1" dirty="0"/>
               <a:t> </a:t>
             </a:r>
             <a:r>
-              <a:rPr lang="en-US" altLang="ko-KR" b="1" dirty="0" smtClean="0">
+              <a:rPr lang="en-US" altLang="ko-KR" b="1" dirty="0">
                 <a:solidFill>
                   <a:srgbClr val="C00000"/>
                 </a:solidFill>
@@ -16074,19 +15646,19 @@
               <a:t>page import </a:t>
             </a:r>
             <a:r>
-              <a:rPr lang="en-US" altLang="ko-KR" b="1" dirty="0" smtClean="0"/>
+              <a:rPr lang="en-US" altLang="ko-KR" b="1" dirty="0"/>
               <a:t>= “</a:t>
             </a:r>
             <a:r>
-              <a:rPr lang="ko-KR" altLang="en-US" b="1" dirty="0" smtClean="0"/>
+              <a:rPr lang="ko-KR" altLang="en-US" b="1" dirty="0"/>
               <a:t>자바클래스</a:t>
             </a:r>
             <a:r>
-              <a:rPr lang="en-US" altLang="ko-KR" b="1" dirty="0" smtClean="0"/>
+              <a:rPr lang="en-US" altLang="ko-KR" b="1" dirty="0"/>
               <a:t>” </a:t>
             </a:r>
             <a:r>
-              <a:rPr lang="en-US" altLang="ko-KR" b="1" dirty="0" smtClean="0">
+              <a:rPr lang="en-US" altLang="ko-KR" b="1" dirty="0">
                 <a:solidFill>
                   <a:srgbClr val="C00000"/>
                 </a:solidFill>
@@ -16142,13 +15714,6 @@
   <p:clrMapOvr>
     <a:masterClrMapping/>
   </p:clrMapOvr>
-  <p:timing>
-    <p:tnLst>
-      <p:par>
-        <p:cTn id="1" dur="indefinite" restart="never" nodeType="tmRoot"/>
-      </p:par>
-    </p:tnLst>
-  </p:timing>
 </p:sld>
 </file>
 
@@ -16206,12 +15771,8 @@
           </a:lstStyle>
           <a:p>
             <a:r>
-              <a:rPr lang="en-US" altLang="ko-KR" dirty="0" smtClean="0"/>
-              <a:t> </a:t>
-            </a:r>
-            <a:r>
               <a:rPr lang="en-US" altLang="ko-KR" dirty="0"/>
-              <a:t>JSP </a:t>
+              <a:t> JSP </a:t>
             </a:r>
             <a:r>
               <a:rPr lang="ko-KR" altLang="en-US" dirty="0"/>
@@ -16222,14 +15783,13 @@
               <a:t>- </a:t>
             </a:r>
             <a:r>
-              <a:rPr lang="ko-KR" altLang="en-US" dirty="0" err="1" smtClean="0"/>
+              <a:rPr lang="ko-KR" altLang="en-US" dirty="0" err="1"/>
               <a:t>디렉티브</a:t>
             </a:r>
             <a:r>
-              <a:rPr lang="ko-KR" altLang="en-US" dirty="0" smtClean="0"/>
+              <a:rPr lang="ko-KR" altLang="en-US" dirty="0"/>
               <a:t> 태그</a:t>
             </a:r>
-            <a:endParaRPr lang="ko-KR" altLang="en-US" dirty="0"/>
           </a:p>
         </p:txBody>
       </p:sp>
@@ -16261,18 +15821,18 @@
               </a:lnSpc>
             </a:pPr>
             <a:r>
-              <a:rPr lang="en-US" altLang="ko-KR" sz="2000" b="1" dirty="0" smtClean="0"/>
+              <a:rPr lang="en-US" altLang="ko-KR" sz="2000" b="1" dirty="0"/>
               <a:t>page </a:t>
             </a:r>
             <a:r>
-              <a:rPr lang="ko-KR" altLang="en-US" sz="2000" b="1" dirty="0" err="1" smtClean="0"/>
+              <a:rPr lang="ko-KR" altLang="en-US" sz="2000" b="1" dirty="0" err="1"/>
               <a:t>디렉티브</a:t>
             </a:r>
             <a:r>
-              <a:rPr lang="ko-KR" altLang="en-US" sz="2000" b="1" dirty="0" smtClean="0"/>
+              <a:rPr lang="ko-KR" altLang="en-US" sz="2000" b="1" dirty="0"/>
               <a:t> 태그</a:t>
             </a:r>
-            <a:endParaRPr lang="en-US" altLang="ko-KR" sz="2000" b="1" dirty="0" smtClean="0"/>
+            <a:endParaRPr lang="en-US" altLang="ko-KR" sz="2000" b="1" dirty="0"/>
           </a:p>
         </p:txBody>
       </p:sp>
@@ -16348,13 +15908,6 @@
   <p:clrMapOvr>
     <a:masterClrMapping/>
   </p:clrMapOvr>
-  <p:timing>
-    <p:tnLst>
-      <p:par>
-        <p:cTn id="1" dur="indefinite" restart="never" nodeType="tmRoot"/>
-      </p:par>
-    </p:tnLst>
-  </p:timing>
 </p:sld>
 </file>
 
@@ -16412,12 +15965,8 @@
           </a:lstStyle>
           <a:p>
             <a:r>
-              <a:rPr lang="en-US" altLang="ko-KR" dirty="0" smtClean="0"/>
-              <a:t> </a:t>
-            </a:r>
-            <a:r>
               <a:rPr lang="en-US" altLang="ko-KR" dirty="0"/>
-              <a:t>JSP </a:t>
+              <a:t> JSP </a:t>
             </a:r>
             <a:r>
               <a:rPr lang="ko-KR" altLang="en-US" dirty="0"/>
@@ -16428,14 +15977,13 @@
               <a:t>- </a:t>
             </a:r>
             <a:r>
-              <a:rPr lang="ko-KR" altLang="en-US" dirty="0" err="1" smtClean="0"/>
+              <a:rPr lang="ko-KR" altLang="en-US" dirty="0" err="1"/>
               <a:t>디렉티브</a:t>
             </a:r>
             <a:r>
-              <a:rPr lang="ko-KR" altLang="en-US" dirty="0" smtClean="0"/>
+              <a:rPr lang="ko-KR" altLang="en-US" dirty="0"/>
               <a:t> 태그</a:t>
             </a:r>
-            <a:endParaRPr lang="ko-KR" altLang="en-US" dirty="0"/>
           </a:p>
         </p:txBody>
       </p:sp>
@@ -16467,18 +16015,18 @@
               </a:lnSpc>
             </a:pPr>
             <a:r>
-              <a:rPr lang="en-US" altLang="ko-KR" sz="2000" b="1" dirty="0" smtClean="0"/>
+              <a:rPr lang="en-US" altLang="ko-KR" sz="2000" b="1" dirty="0"/>
               <a:t>include </a:t>
             </a:r>
             <a:r>
-              <a:rPr lang="ko-KR" altLang="en-US" sz="2000" b="1" dirty="0" err="1" smtClean="0"/>
+              <a:rPr lang="ko-KR" altLang="en-US" sz="2000" b="1" dirty="0" err="1"/>
               <a:t>디렉티브</a:t>
             </a:r>
             <a:r>
-              <a:rPr lang="ko-KR" altLang="en-US" sz="2000" b="1" dirty="0" smtClean="0"/>
+              <a:rPr lang="ko-KR" altLang="en-US" sz="2000" b="1" dirty="0"/>
               <a:t> 태그</a:t>
             </a:r>
-            <a:endParaRPr lang="en-US" altLang="ko-KR" sz="2000" b="1" dirty="0" smtClean="0"/>
+            <a:endParaRPr lang="en-US" altLang="ko-KR" sz="2000" b="1" dirty="0"/>
           </a:p>
         </p:txBody>
       </p:sp>
@@ -16518,7 +16066,7 @@
           <a:lstStyle/>
           <a:p>
             <a:r>
-              <a:rPr lang="en-US" altLang="ko-KR" b="1" dirty="0" smtClean="0">
+              <a:rPr lang="en-US" altLang="ko-KR" b="1" dirty="0">
                 <a:solidFill>
                   <a:srgbClr val="C00000"/>
                 </a:solidFill>
@@ -16526,11 +16074,11 @@
               <a:t>&lt;%@</a:t>
             </a:r>
             <a:r>
-              <a:rPr lang="en-US" altLang="ko-KR" b="1" dirty="0" smtClean="0"/>
+              <a:rPr lang="en-US" altLang="ko-KR" b="1" dirty="0"/>
               <a:t> </a:t>
             </a:r>
             <a:r>
-              <a:rPr lang="en-US" altLang="ko-KR" b="1" dirty="0" smtClean="0">
+              <a:rPr lang="en-US" altLang="ko-KR" b="1" dirty="0">
                 <a:solidFill>
                   <a:srgbClr val="C00000"/>
                 </a:solidFill>
@@ -16538,19 +16086,19 @@
               <a:t>include file</a:t>
             </a:r>
             <a:r>
-              <a:rPr lang="en-US" altLang="ko-KR" b="1" dirty="0" smtClean="0"/>
+              <a:rPr lang="en-US" altLang="ko-KR" b="1" dirty="0"/>
               <a:t>=“</a:t>
             </a:r>
             <a:r>
-              <a:rPr lang="ko-KR" altLang="en-US" b="1" dirty="0" smtClean="0"/>
+              <a:rPr lang="ko-KR" altLang="en-US" b="1" dirty="0"/>
               <a:t>파일명</a:t>
             </a:r>
             <a:r>
-              <a:rPr lang="en-US" altLang="ko-KR" b="1" dirty="0" smtClean="0"/>
+              <a:rPr lang="en-US" altLang="ko-KR" b="1" dirty="0"/>
               <a:t>” </a:t>
             </a:r>
             <a:r>
-              <a:rPr lang="en-US" altLang="ko-KR" b="1" dirty="0" smtClean="0">
+              <a:rPr lang="en-US" altLang="ko-KR" b="1" dirty="0">
                 <a:solidFill>
                   <a:srgbClr val="C00000"/>
                 </a:solidFill>
@@ -16593,22 +16141,22 @@
               </a:lnSpc>
             </a:pPr>
             <a:r>
-              <a:rPr lang="en-US" altLang="ko-KR" sz="1600" dirty="0" smtClean="0"/>
+              <a:rPr lang="en-US" altLang="ko-KR" sz="1600" dirty="0"/>
               <a:t>-  </a:t>
             </a:r>
             <a:r>
-              <a:rPr lang="ko-KR" altLang="en-US" sz="1600" dirty="0" smtClean="0"/>
+              <a:rPr lang="ko-KR" altLang="en-US" sz="1600" dirty="0"/>
               <a:t>현재 </a:t>
             </a:r>
             <a:r>
-              <a:rPr lang="en-US" altLang="ko-KR" sz="1600" dirty="0" smtClean="0"/>
+              <a:rPr lang="en-US" altLang="ko-KR" sz="1600" dirty="0"/>
               <a:t>JSP</a:t>
             </a:r>
             <a:r>
-              <a:rPr lang="ko-KR" altLang="en-US" sz="1600" dirty="0" smtClean="0"/>
+              <a:rPr lang="ko-KR" altLang="en-US" sz="1600" dirty="0"/>
               <a:t>의 특정 영역에 외부 파일의 내용을 포함</a:t>
             </a:r>
-            <a:endParaRPr lang="en-US" altLang="ko-KR" sz="1600" dirty="0" smtClean="0"/>
+            <a:endParaRPr lang="en-US" altLang="ko-KR" sz="1600" dirty="0"/>
           </a:p>
           <a:p>
             <a:pPr marL="285750" indent="-285750">
@@ -16620,30 +16168,26 @@
             </a:pPr>
             <a:r>
               <a:rPr lang="en-US" altLang="ko-KR" sz="1600" dirty="0"/>
-              <a:t>i</a:t>
-            </a:r>
-            <a:r>
-              <a:rPr lang="en-US" altLang="ko-KR" sz="1600" dirty="0" smtClean="0"/>
-              <a:t>nclude </a:t>
-            </a:r>
-            <a:r>
-              <a:rPr lang="ko-KR" altLang="en-US" sz="1600" dirty="0" err="1" smtClean="0"/>
+              <a:t>include </a:t>
+            </a:r>
+            <a:r>
+              <a:rPr lang="ko-KR" altLang="en-US" sz="1600" dirty="0" err="1"/>
               <a:t>디렉티브</a:t>
             </a:r>
             <a:r>
-              <a:rPr lang="ko-KR" altLang="en-US" sz="1600" dirty="0" smtClean="0"/>
+              <a:rPr lang="ko-KR" altLang="en-US" sz="1600" dirty="0"/>
               <a:t> 태그는 머리글과 바닥글과 같은 공통된 부분을 별도의 </a:t>
             </a:r>
             <a:r>
-              <a:rPr lang="en-US" altLang="ko-KR" sz="1600" dirty="0" smtClean="0"/>
+              <a:rPr lang="en-US" altLang="ko-KR" sz="1600" dirty="0"/>
               <a:t>JSP </a:t>
             </a:r>
             <a:r>
-              <a:rPr lang="ko-KR" altLang="en-US" sz="1600" dirty="0" smtClean="0"/>
+              <a:rPr lang="ko-KR" altLang="en-US" sz="1600" dirty="0"/>
               <a:t>파일을 만들어 모듈화 할 수 있다</a:t>
             </a:r>
             <a:r>
-              <a:rPr lang="en-US" altLang="ko-KR" sz="1600" dirty="0" smtClean="0"/>
+              <a:rPr lang="en-US" altLang="ko-KR" sz="1600" dirty="0"/>
               <a:t>.</a:t>
             </a:r>
             <a:endParaRPr lang="ko-KR" altLang="en-US" sz="1600" dirty="0"/>
@@ -16691,13 +16235,6 @@
   <p:clrMapOvr>
     <a:masterClrMapping/>
   </p:clrMapOvr>
-  <p:timing>
-    <p:tnLst>
-      <p:par>
-        <p:cTn id="1" dur="indefinite" restart="never" nodeType="tmRoot"/>
-      </p:par>
-    </p:tnLst>
-  </p:timing>
 </p:sld>
 </file>
 
@@ -16755,12 +16292,8 @@
           </a:lstStyle>
           <a:p>
             <a:r>
-              <a:rPr lang="en-US" altLang="ko-KR" dirty="0" smtClean="0"/>
-              <a:t> </a:t>
-            </a:r>
-            <a:r>
               <a:rPr lang="en-US" altLang="ko-KR" dirty="0"/>
-              <a:t>JSP </a:t>
+              <a:t> JSP </a:t>
             </a:r>
             <a:r>
               <a:rPr lang="ko-KR" altLang="en-US" dirty="0"/>
@@ -16771,14 +16304,13 @@
               <a:t>- </a:t>
             </a:r>
             <a:r>
-              <a:rPr lang="ko-KR" altLang="en-US" dirty="0" err="1" smtClean="0"/>
+              <a:rPr lang="ko-KR" altLang="en-US" dirty="0" err="1"/>
               <a:t>디렉티브</a:t>
             </a:r>
             <a:r>
-              <a:rPr lang="ko-KR" altLang="en-US" dirty="0" smtClean="0"/>
+              <a:rPr lang="ko-KR" altLang="en-US" dirty="0"/>
               <a:t> 태그</a:t>
             </a:r>
-            <a:endParaRPr lang="ko-KR" altLang="en-US" dirty="0"/>
           </a:p>
         </p:txBody>
       </p:sp>
@@ -16810,18 +16342,18 @@
               </a:lnSpc>
             </a:pPr>
             <a:r>
-              <a:rPr lang="en-US" altLang="ko-KR" sz="2000" b="1" dirty="0" smtClean="0"/>
+              <a:rPr lang="en-US" altLang="ko-KR" sz="2000" b="1" dirty="0"/>
               <a:t>include </a:t>
             </a:r>
             <a:r>
-              <a:rPr lang="ko-KR" altLang="en-US" sz="2000" b="1" dirty="0" err="1" smtClean="0"/>
+              <a:rPr lang="ko-KR" altLang="en-US" sz="2000" b="1" dirty="0" err="1"/>
               <a:t>디렉티브</a:t>
             </a:r>
             <a:r>
-              <a:rPr lang="ko-KR" altLang="en-US" sz="2000" b="1" dirty="0" smtClean="0"/>
+              <a:rPr lang="ko-KR" altLang="en-US" sz="2000" b="1" dirty="0"/>
               <a:t> 태그</a:t>
             </a:r>
-            <a:endParaRPr lang="en-US" altLang="ko-KR" sz="2000" b="1" dirty="0" smtClean="0"/>
+            <a:endParaRPr lang="en-US" altLang="ko-KR" sz="2000" b="1" dirty="0"/>
           </a:p>
         </p:txBody>
       </p:sp>
@@ -16917,7 +16449,7 @@
               </a:rPr>
               <a:t>header.jsp</a:t>
             </a:r>
-            <a:endParaRPr lang="en-US" altLang="ko-KR" sz="1600" dirty="0" smtClean="0">
+            <a:endParaRPr lang="en-US" altLang="ko-KR" sz="1600" dirty="0">
               <a:solidFill>
                 <a:sysClr val="windowText" lastClr="000000"/>
               </a:solidFill>
@@ -16935,13 +16467,6 @@
   <p:clrMapOvr>
     <a:masterClrMapping/>
   </p:clrMapOvr>
-  <p:timing>
-    <p:tnLst>
-      <p:par>
-        <p:cTn id="1" dur="indefinite" restart="never" nodeType="tmRoot"/>
-      </p:par>
-    </p:tnLst>
-  </p:timing>
 </p:sld>
 </file>
 
@@ -16999,12 +16524,8 @@
           </a:lstStyle>
           <a:p>
             <a:r>
-              <a:rPr lang="en-US" altLang="ko-KR" dirty="0" smtClean="0"/>
-              <a:t> </a:t>
-            </a:r>
-            <a:r>
               <a:rPr lang="en-US" altLang="ko-KR" dirty="0"/>
-              <a:t>JSP </a:t>
+              <a:t> JSP </a:t>
             </a:r>
             <a:r>
               <a:rPr lang="ko-KR" altLang="en-US" dirty="0"/>
@@ -17015,14 +16536,13 @@
               <a:t>- </a:t>
             </a:r>
             <a:r>
-              <a:rPr lang="ko-KR" altLang="en-US" dirty="0" err="1" smtClean="0"/>
+              <a:rPr lang="ko-KR" altLang="en-US" dirty="0" err="1"/>
               <a:t>디렉티브</a:t>
             </a:r>
             <a:r>
-              <a:rPr lang="ko-KR" altLang="en-US" dirty="0" smtClean="0"/>
+              <a:rPr lang="ko-KR" altLang="en-US" dirty="0"/>
               <a:t> 태그</a:t>
             </a:r>
-            <a:endParaRPr lang="ko-KR" altLang="en-US" dirty="0"/>
           </a:p>
         </p:txBody>
       </p:sp>
@@ -17054,18 +16574,18 @@
               </a:lnSpc>
             </a:pPr>
             <a:r>
-              <a:rPr lang="en-US" altLang="ko-KR" sz="2000" b="1" dirty="0" smtClean="0"/>
+              <a:rPr lang="en-US" altLang="ko-KR" sz="2000" b="1" dirty="0"/>
               <a:t>include </a:t>
             </a:r>
             <a:r>
-              <a:rPr lang="ko-KR" altLang="en-US" sz="2000" b="1" dirty="0" err="1" smtClean="0"/>
+              <a:rPr lang="ko-KR" altLang="en-US" sz="2000" b="1" dirty="0" err="1"/>
               <a:t>디렉티브</a:t>
             </a:r>
             <a:r>
-              <a:rPr lang="ko-KR" altLang="en-US" sz="2000" b="1" dirty="0" smtClean="0"/>
+              <a:rPr lang="ko-KR" altLang="en-US" sz="2000" b="1" dirty="0"/>
               <a:t> 태그</a:t>
             </a:r>
-            <a:endParaRPr lang="en-US" altLang="ko-KR" sz="2000" b="1" dirty="0" smtClean="0"/>
+            <a:endParaRPr lang="en-US" altLang="ko-KR" sz="2000" b="1" dirty="0"/>
           </a:p>
         </p:txBody>
       </p:sp>
@@ -17130,7 +16650,7 @@
               </a:rPr>
               <a:t>footer.jsp</a:t>
             </a:r>
-            <a:endParaRPr lang="en-US" altLang="ko-KR" sz="1600" dirty="0" smtClean="0">
+            <a:endParaRPr lang="en-US" altLang="ko-KR" sz="1600" dirty="0">
               <a:solidFill>
                 <a:sysClr val="windowText" lastClr="000000"/>
               </a:solidFill>
@@ -17179,13 +16699,6 @@
   <p:clrMapOvr>
     <a:masterClrMapping/>
   </p:clrMapOvr>
-  <p:timing>
-    <p:tnLst>
-      <p:par>
-        <p:cTn id="1" dur="indefinite" restart="never" nodeType="tmRoot"/>
-      </p:par>
-    </p:tnLst>
-  </p:timing>
 </p:sld>
 </file>
 
@@ -17243,12 +16756,8 @@
           </a:lstStyle>
           <a:p>
             <a:r>
-              <a:rPr lang="en-US" altLang="ko-KR" dirty="0" smtClean="0"/>
-              <a:t> </a:t>
-            </a:r>
-            <a:r>
               <a:rPr lang="en-US" altLang="ko-KR" dirty="0"/>
-              <a:t>JSP </a:t>
+              <a:t> JSP </a:t>
             </a:r>
             <a:r>
               <a:rPr lang="ko-KR" altLang="en-US" dirty="0"/>
@@ -17259,14 +16768,13 @@
               <a:t>- </a:t>
             </a:r>
             <a:r>
-              <a:rPr lang="ko-KR" altLang="en-US" dirty="0" err="1" smtClean="0"/>
+              <a:rPr lang="ko-KR" altLang="en-US" dirty="0" err="1"/>
               <a:t>디렉티브</a:t>
             </a:r>
             <a:r>
-              <a:rPr lang="ko-KR" altLang="en-US" dirty="0" smtClean="0"/>
+              <a:rPr lang="ko-KR" altLang="en-US" dirty="0"/>
               <a:t> 태그</a:t>
             </a:r>
-            <a:endParaRPr lang="ko-KR" altLang="en-US" dirty="0"/>
           </a:p>
         </p:txBody>
       </p:sp>
@@ -17298,18 +16806,18 @@
               </a:lnSpc>
             </a:pPr>
             <a:r>
-              <a:rPr lang="en-US" altLang="ko-KR" sz="2000" b="1" dirty="0" smtClean="0"/>
+              <a:rPr lang="en-US" altLang="ko-KR" sz="2000" b="1" dirty="0"/>
               <a:t>include </a:t>
             </a:r>
             <a:r>
-              <a:rPr lang="ko-KR" altLang="en-US" sz="2000" b="1" dirty="0" err="1" smtClean="0"/>
+              <a:rPr lang="ko-KR" altLang="en-US" sz="2000" b="1" dirty="0" err="1"/>
               <a:t>디렉티브</a:t>
             </a:r>
             <a:r>
-              <a:rPr lang="ko-KR" altLang="en-US" sz="2000" b="1" dirty="0" smtClean="0"/>
+              <a:rPr lang="ko-KR" altLang="en-US" sz="2000" b="1" dirty="0"/>
               <a:t> 태그</a:t>
             </a:r>
-            <a:endParaRPr lang="en-US" altLang="ko-KR" sz="2000" b="1" dirty="0" smtClean="0"/>
+            <a:endParaRPr lang="en-US" altLang="ko-KR" sz="2000" b="1" dirty="0"/>
           </a:p>
         </p:txBody>
       </p:sp>
@@ -17364,25 +16872,17 @@
                   <a:sysClr val="windowText" lastClr="000000"/>
                 </a:solidFill>
               </a:rPr>
-              <a:t>i</a:t>
-            </a:r>
-            <a:r>
-              <a:rPr lang="en-US" altLang="ko-KR" sz="1600" dirty="0" smtClean="0">
-                <a:solidFill>
-                  <a:sysClr val="windowText" lastClr="000000"/>
-                </a:solidFill>
-              </a:rPr>
-              <a:t>nclude/</a:t>
-            </a:r>
-            <a:r>
-              <a:rPr lang="en-US" altLang="ko-KR" sz="1600" dirty="0" err="1" smtClean="0">
+              <a:t>include/</a:t>
+            </a:r>
+            <a:r>
+              <a:rPr lang="en-US" altLang="ko-KR" sz="1600" dirty="0" err="1">
                 <a:solidFill>
                   <a:sysClr val="windowText" lastClr="000000"/>
                 </a:solidFill>
               </a:rPr>
               <a:t>main.jsp</a:t>
             </a:r>
-            <a:endParaRPr lang="en-US" altLang="ko-KR" sz="1600" dirty="0" smtClean="0">
+            <a:endParaRPr lang="en-US" altLang="ko-KR" sz="1600" dirty="0">
               <a:solidFill>
                 <a:sysClr val="windowText" lastClr="000000"/>
               </a:solidFill>
@@ -17431,13 +16931,6 @@
   <p:clrMapOvr>
     <a:masterClrMapping/>
   </p:clrMapOvr>
-  <p:timing>
-    <p:tnLst>
-      <p:par>
-        <p:cTn id="1" dur="indefinite" restart="never" nodeType="tmRoot"/>
-      </p:par>
-    </p:tnLst>
-  </p:timing>
 </p:sld>
 </file>
 
@@ -17495,12 +16988,8 @@
           </a:lstStyle>
           <a:p>
             <a:r>
-              <a:rPr lang="en-US" altLang="ko-KR" dirty="0" smtClean="0"/>
-              <a:t> </a:t>
-            </a:r>
-            <a:r>
               <a:rPr lang="en-US" altLang="ko-KR" dirty="0"/>
-              <a:t>JSP(Java Server Page</a:t>
+              <a:t> JSP(Java Server Page</a:t>
             </a:r>
             <a:endParaRPr lang="ko-KR" altLang="en-US" dirty="0"/>
           </a:p>
@@ -17534,14 +17023,14 @@
               </a:lnSpc>
             </a:pPr>
             <a:r>
-              <a:rPr lang="en-US" altLang="ko-KR" sz="2000" b="1" dirty="0" smtClean="0"/>
+              <a:rPr lang="en-US" altLang="ko-KR" sz="2000" b="1" dirty="0"/>
               <a:t>3. JSP</a:t>
             </a:r>
             <a:r>
-              <a:rPr lang="ko-KR" altLang="en-US" sz="2000" b="1" dirty="0" smtClean="0"/>
+              <a:rPr lang="ko-KR" altLang="en-US" sz="2000" b="1" dirty="0"/>
               <a:t>의 특징</a:t>
             </a:r>
-            <a:endParaRPr lang="en-US" altLang="ko-KR" sz="2000" b="1" dirty="0" smtClean="0"/>
+            <a:endParaRPr lang="en-US" altLang="ko-KR" sz="2000" b="1" dirty="0"/>
           </a:p>
           <a:p>
             <a:pPr marL="800100" lvl="1" indent="-342900">
@@ -17552,23 +17041,23 @@
               <a:buChar char="•"/>
             </a:pPr>
             <a:r>
-              <a:rPr lang="en-US" altLang="ko-KR" b="1" dirty="0" smtClean="0"/>
+              <a:rPr lang="en-US" altLang="ko-KR" b="1" dirty="0"/>
               <a:t>JSP</a:t>
             </a:r>
             <a:r>
-              <a:rPr lang="ko-KR" altLang="en-US" b="1" dirty="0" smtClean="0"/>
+              <a:rPr lang="ko-KR" altLang="en-US" b="1" dirty="0"/>
               <a:t>는 </a:t>
             </a:r>
             <a:r>
-              <a:rPr lang="ko-KR" altLang="en-US" b="1" dirty="0" err="1" smtClean="0"/>
+              <a:rPr lang="ko-KR" altLang="en-US" b="1" dirty="0" err="1"/>
               <a:t>서블릿</a:t>
             </a:r>
             <a:r>
-              <a:rPr lang="ko-KR" altLang="en-US" b="1" dirty="0" smtClean="0"/>
+              <a:rPr lang="ko-KR" altLang="en-US" b="1" dirty="0"/>
               <a:t> 기술의 확장이다</a:t>
             </a:r>
             <a:r>
-              <a:rPr lang="en-US" altLang="ko-KR" b="1" dirty="0" smtClean="0"/>
+              <a:rPr lang="en-US" altLang="ko-KR" b="1" dirty="0"/>
               <a:t>.</a:t>
             </a:r>
           </a:p>
@@ -17580,29 +17069,25 @@
             </a:pPr>
             <a:r>
               <a:rPr lang="en-US" altLang="ko-KR" dirty="0"/>
-              <a:t> </a:t>
-            </a:r>
-            <a:r>
-              <a:rPr lang="en-US" altLang="ko-KR" dirty="0" smtClean="0"/>
-              <a:t>   </a:t>
-            </a:r>
-            <a:r>
-              <a:rPr lang="ko-KR" altLang="en-US" sz="1600" dirty="0" smtClean="0"/>
+              <a:t>    </a:t>
+            </a:r>
+            <a:r>
+              <a:rPr lang="ko-KR" altLang="en-US" sz="1600" dirty="0"/>
               <a:t>처음에는 서버 측 프로그래밍 방식으로 자바를 사용하는 </a:t>
             </a:r>
             <a:r>
-              <a:rPr lang="ko-KR" altLang="en-US" sz="1600" dirty="0" err="1" smtClean="0"/>
+              <a:rPr lang="ko-KR" altLang="en-US" sz="1600" dirty="0" err="1"/>
               <a:t>서블릿</a:t>
             </a:r>
             <a:r>
-              <a:rPr lang="en-US" altLang="ko-KR" sz="1600" dirty="0" smtClean="0"/>
+              <a:rPr lang="en-US" altLang="ko-KR" sz="1600" dirty="0"/>
               <a:t>(Servlet)</a:t>
             </a:r>
             <a:r>
-              <a:rPr lang="ko-KR" altLang="en-US" sz="1600" dirty="0" smtClean="0"/>
+              <a:rPr lang="ko-KR" altLang="en-US" sz="1600" dirty="0"/>
               <a:t>을 먼저 개발</a:t>
             </a:r>
-            <a:endParaRPr lang="en-US" altLang="ko-KR" sz="1600" dirty="0" smtClean="0"/>
+            <a:endParaRPr lang="en-US" altLang="ko-KR" sz="1600" dirty="0"/>
           </a:p>
           <a:p>
             <a:pPr lvl="1">
@@ -17612,41 +17097,37 @@
             </a:pPr>
             <a:r>
               <a:rPr lang="en-US" altLang="ko-KR" sz="1600" dirty="0"/>
-              <a:t> </a:t>
-            </a:r>
-            <a:r>
-              <a:rPr lang="en-US" altLang="ko-KR" sz="1600" dirty="0" smtClean="0"/>
-              <a:t>    </a:t>
-            </a:r>
-            <a:r>
-              <a:rPr lang="ko-KR" altLang="en-US" sz="1600" dirty="0" smtClean="0"/>
+              <a:t>     </a:t>
+            </a:r>
+            <a:r>
+              <a:rPr lang="ko-KR" altLang="en-US" sz="1600" dirty="0"/>
               <a:t>하였으나 </a:t>
             </a:r>
             <a:r>
-              <a:rPr lang="ko-KR" altLang="en-US" sz="1600" dirty="0" err="1" smtClean="0"/>
+              <a:rPr lang="ko-KR" altLang="en-US" sz="1600" dirty="0" err="1"/>
               <a:t>서블릿</a:t>
             </a:r>
             <a:r>
-              <a:rPr lang="ko-KR" altLang="en-US" sz="1600" dirty="0" smtClean="0"/>
+              <a:rPr lang="ko-KR" altLang="en-US" sz="1600" dirty="0"/>
               <a:t> 개발방식이 쉽지 않아서 개발된 기술이 </a:t>
             </a:r>
             <a:r>
-              <a:rPr lang="en-US" altLang="ko-KR" sz="1600" dirty="0" smtClean="0"/>
+              <a:rPr lang="en-US" altLang="ko-KR" sz="1600" dirty="0"/>
               <a:t>JSP(HTML</a:t>
             </a:r>
             <a:r>
-              <a:rPr lang="ko-KR" altLang="en-US" sz="1600" dirty="0" smtClean="0"/>
+              <a:rPr lang="ko-KR" altLang="en-US" sz="1600" dirty="0"/>
               <a:t>코드에 삽입</a:t>
             </a:r>
             <a:r>
-              <a:rPr lang="en-US" altLang="ko-KR" sz="1600" dirty="0" smtClean="0"/>
+              <a:rPr lang="en-US" altLang="ko-KR" sz="1600" dirty="0"/>
               <a:t>)</a:t>
             </a:r>
             <a:r>
-              <a:rPr lang="ko-KR" altLang="en-US" sz="1600" dirty="0" smtClean="0"/>
+              <a:rPr lang="ko-KR" altLang="en-US" sz="1600" dirty="0"/>
               <a:t>이다</a:t>
             </a:r>
-            <a:endParaRPr lang="en-US" altLang="ko-KR" sz="1600" dirty="0" smtClean="0"/>
+            <a:endParaRPr lang="en-US" altLang="ko-KR" sz="1600" dirty="0"/>
           </a:p>
           <a:p>
             <a:pPr marL="800100" lvl="1" indent="-342900">
@@ -17657,15 +17138,15 @@
               <a:buChar char="•"/>
             </a:pPr>
             <a:r>
-              <a:rPr lang="en-US" altLang="ko-KR" b="1" dirty="0" smtClean="0"/>
+              <a:rPr lang="en-US" altLang="ko-KR" b="1" dirty="0"/>
               <a:t>JSP</a:t>
             </a:r>
             <a:r>
-              <a:rPr lang="ko-KR" altLang="en-US" b="1" dirty="0" smtClean="0"/>
+              <a:rPr lang="ko-KR" altLang="en-US" b="1" dirty="0"/>
               <a:t>는 유지 관리가 용이하다</a:t>
             </a:r>
             <a:r>
-              <a:rPr lang="en-US" altLang="ko-KR" b="1" dirty="0" smtClean="0"/>
+              <a:rPr lang="en-US" altLang="ko-KR" b="1" dirty="0"/>
               <a:t>.</a:t>
             </a:r>
           </a:p>
@@ -17677,49 +17158,45 @@
             </a:pPr>
             <a:r>
               <a:rPr lang="en-US" altLang="ko-KR" dirty="0"/>
-              <a:t> </a:t>
-            </a:r>
-            <a:r>
-              <a:rPr lang="en-US" altLang="ko-KR" dirty="0" smtClean="0"/>
-              <a:t>   </a:t>
-            </a:r>
-            <a:r>
-              <a:rPr lang="ko-KR" altLang="en-US" sz="1600" dirty="0" err="1" smtClean="0"/>
+              <a:t>    </a:t>
+            </a:r>
+            <a:r>
+              <a:rPr lang="ko-KR" altLang="en-US" sz="1600" dirty="0" err="1"/>
               <a:t>서블릿</a:t>
             </a:r>
             <a:r>
-              <a:rPr lang="ko-KR" altLang="en-US" sz="1600" dirty="0" smtClean="0"/>
+              <a:rPr lang="ko-KR" altLang="en-US" sz="1600" dirty="0"/>
               <a:t> 기술은 프레젠테이션</a:t>
             </a:r>
             <a:r>
-              <a:rPr lang="en-US" altLang="ko-KR" sz="1600" dirty="0" smtClean="0"/>
+              <a:rPr lang="en-US" altLang="ko-KR" sz="1600" dirty="0"/>
               <a:t>(View)</a:t>
             </a:r>
             <a:r>
-              <a:rPr lang="ko-KR" altLang="en-US" sz="1600" dirty="0" smtClean="0"/>
+              <a:rPr lang="ko-KR" altLang="en-US" sz="1600" dirty="0"/>
               <a:t>와 비즈니스 </a:t>
             </a:r>
             <a:r>
-              <a:rPr lang="ko-KR" altLang="en-US" sz="1600" dirty="0" err="1" smtClean="0"/>
+              <a:rPr lang="ko-KR" altLang="en-US" sz="1600" dirty="0" err="1"/>
               <a:t>로직</a:t>
             </a:r>
             <a:r>
-              <a:rPr lang="en-US" altLang="ko-KR" sz="1600" dirty="0" smtClean="0"/>
+              <a:rPr lang="en-US" altLang="ko-KR" sz="1600" dirty="0"/>
               <a:t>(Control)</a:t>
             </a:r>
             <a:r>
-              <a:rPr lang="ko-KR" altLang="en-US" sz="1600" dirty="0" smtClean="0"/>
+              <a:rPr lang="ko-KR" altLang="en-US" sz="1600" dirty="0"/>
               <a:t>이 섞여 있지만 </a:t>
             </a:r>
             <a:r>
-              <a:rPr lang="en-US" altLang="ko-KR" sz="1600" dirty="0" smtClean="0"/>
+              <a:rPr lang="en-US" altLang="ko-KR" sz="1600" dirty="0"/>
               <a:t>JSP</a:t>
             </a:r>
             <a:r>
-              <a:rPr lang="ko-KR" altLang="en-US" sz="1600" dirty="0" smtClean="0"/>
+              <a:rPr lang="ko-KR" altLang="en-US" sz="1600" dirty="0"/>
               <a:t>는 분</a:t>
             </a:r>
-            <a:endParaRPr lang="en-US" altLang="ko-KR" sz="1600" dirty="0" smtClean="0"/>
+            <a:endParaRPr lang="en-US" altLang="ko-KR" sz="1600" dirty="0"/>
           </a:p>
           <a:p>
             <a:pPr lvl="1">
@@ -17729,22 +17206,18 @@
             </a:pPr>
             <a:r>
               <a:rPr lang="en-US" altLang="ko-KR" sz="1600" dirty="0"/>
-              <a:t> </a:t>
-            </a:r>
-            <a:r>
-              <a:rPr lang="en-US" altLang="ko-KR" sz="1600" dirty="0" smtClean="0"/>
-              <a:t>   </a:t>
-            </a:r>
-            <a:r>
-              <a:rPr lang="ko-KR" altLang="en-US" sz="1600" dirty="0" err="1" smtClean="0"/>
+              <a:t>    </a:t>
+            </a:r>
+            <a:r>
+              <a:rPr lang="ko-KR" altLang="en-US" sz="1600" dirty="0" err="1"/>
               <a:t>리할</a:t>
             </a:r>
             <a:r>
-              <a:rPr lang="ko-KR" altLang="en-US" sz="1600" dirty="0" smtClean="0"/>
+              <a:rPr lang="ko-KR" altLang="en-US" sz="1600" dirty="0"/>
               <a:t> 수 있어서 관리가 쉽다</a:t>
             </a:r>
             <a:r>
-              <a:rPr lang="en-US" altLang="ko-KR" dirty="0" smtClean="0"/>
+              <a:rPr lang="en-US" altLang="ko-KR" dirty="0"/>
               <a:t>.</a:t>
             </a:r>
           </a:p>
@@ -17757,15 +17230,15 @@
               <a:buChar char="•"/>
             </a:pPr>
             <a:r>
-              <a:rPr lang="en-US" altLang="ko-KR" b="1" dirty="0" smtClean="0"/>
+              <a:rPr lang="en-US" altLang="ko-KR" b="1" dirty="0"/>
               <a:t>JSP</a:t>
             </a:r>
             <a:r>
-              <a:rPr lang="ko-KR" altLang="en-US" b="1" dirty="0" smtClean="0"/>
+              <a:rPr lang="ko-KR" altLang="en-US" b="1" dirty="0"/>
               <a:t>는 빠른 개발이 가능하다</a:t>
             </a:r>
             <a:r>
-              <a:rPr lang="en-US" altLang="ko-KR" b="1" dirty="0" smtClean="0"/>
+              <a:rPr lang="en-US" altLang="ko-KR" b="1" dirty="0"/>
               <a:t>.</a:t>
             </a:r>
           </a:p>
@@ -17776,55 +17249,55 @@
               </a:lnSpc>
             </a:pPr>
             <a:r>
-              <a:rPr lang="en-US" altLang="ko-KR" dirty="0" smtClean="0"/>
+              <a:rPr lang="en-US" altLang="ko-KR" dirty="0"/>
               <a:t>    </a:t>
             </a:r>
             <a:r>
-              <a:rPr lang="ko-KR" altLang="en-US" sz="1600" dirty="0" smtClean="0"/>
+              <a:rPr lang="ko-KR" altLang="en-US" sz="1600" dirty="0"/>
               <a:t>코드를 </a:t>
             </a:r>
             <a:r>
-              <a:rPr lang="ko-KR" altLang="en-US" sz="1600" dirty="0" err="1" smtClean="0"/>
+              <a:rPr lang="ko-KR" altLang="en-US" sz="1600" dirty="0" err="1"/>
               <a:t>수정했을때</a:t>
             </a:r>
             <a:r>
-              <a:rPr lang="ko-KR" altLang="en-US" sz="1600" dirty="0" smtClean="0"/>
+              <a:rPr lang="ko-KR" altLang="en-US" sz="1600" dirty="0"/>
               <a:t> </a:t>
             </a:r>
             <a:r>
-              <a:rPr lang="ko-KR" altLang="en-US" sz="1600" dirty="0" err="1" smtClean="0"/>
+              <a:rPr lang="ko-KR" altLang="en-US" sz="1600" dirty="0" err="1"/>
               <a:t>서블릿에서는</a:t>
             </a:r>
             <a:r>
-              <a:rPr lang="ko-KR" altLang="en-US" sz="1600" dirty="0" smtClean="0"/>
+              <a:rPr lang="ko-KR" altLang="en-US" sz="1600" dirty="0"/>
               <a:t> 다시 </a:t>
             </a:r>
             <a:r>
-              <a:rPr lang="ko-KR" altLang="en-US" sz="1600" dirty="0" err="1" smtClean="0"/>
+              <a:rPr lang="ko-KR" altLang="en-US" sz="1600" dirty="0" err="1"/>
               <a:t>컴파일해야</a:t>
             </a:r>
             <a:r>
-              <a:rPr lang="ko-KR" altLang="en-US" sz="1600" dirty="0" smtClean="0"/>
+              <a:rPr lang="ko-KR" altLang="en-US" sz="1600" dirty="0"/>
               <a:t> 하지만</a:t>
             </a:r>
             <a:r>
-              <a:rPr lang="en-US" altLang="ko-KR" sz="1600" dirty="0" smtClean="0"/>
+              <a:rPr lang="en-US" altLang="ko-KR" sz="1600" dirty="0"/>
               <a:t>, JSP</a:t>
             </a:r>
             <a:r>
-              <a:rPr lang="ko-KR" altLang="en-US" sz="1600" dirty="0" smtClean="0"/>
+              <a:rPr lang="ko-KR" altLang="en-US" sz="1600" dirty="0"/>
               <a:t>는 </a:t>
             </a:r>
             <a:r>
-              <a:rPr lang="ko-KR" altLang="en-US" sz="1600" dirty="0" err="1" smtClean="0"/>
+              <a:rPr lang="ko-KR" altLang="en-US" sz="1600" dirty="0" err="1"/>
               <a:t>컴파일하지</a:t>
             </a:r>
             <a:r>
-              <a:rPr lang="ko-KR" altLang="en-US" sz="1600" dirty="0" smtClean="0"/>
+              <a:rPr lang="ko-KR" altLang="en-US" sz="1600" dirty="0"/>
               <a:t> 않는다</a:t>
             </a:r>
             <a:r>
-              <a:rPr lang="en-US" altLang="ko-KR" sz="1600" dirty="0" smtClean="0"/>
+              <a:rPr lang="en-US" altLang="ko-KR" sz="1600" dirty="0"/>
               <a:t>.</a:t>
             </a:r>
           </a:p>
@@ -17837,15 +17310,15 @@
               <a:buChar char="•"/>
             </a:pPr>
             <a:r>
-              <a:rPr lang="en-US" altLang="ko-KR" b="1" dirty="0" smtClean="0"/>
+              <a:rPr lang="en-US" altLang="ko-KR" b="1" dirty="0"/>
               <a:t>JSP</a:t>
             </a:r>
             <a:r>
-              <a:rPr lang="ko-KR" altLang="en-US" b="1" dirty="0" smtClean="0"/>
+              <a:rPr lang="ko-KR" altLang="en-US" b="1" dirty="0"/>
               <a:t>로 개발하면 코드 길이를 줄일 수 있다</a:t>
             </a:r>
             <a:r>
-              <a:rPr lang="en-US" altLang="ko-KR" b="1" dirty="0" smtClean="0"/>
+              <a:rPr lang="en-US" altLang="ko-KR" b="1" dirty="0"/>
               <a:t>.</a:t>
             </a:r>
           </a:p>
@@ -17856,58 +17329,58 @@
               </a:lnSpc>
             </a:pPr>
             <a:r>
-              <a:rPr lang="en-US" altLang="ko-KR" dirty="0" smtClean="0"/>
+              <a:rPr lang="en-US" altLang="ko-KR" dirty="0"/>
               <a:t>    </a:t>
             </a:r>
             <a:r>
-              <a:rPr lang="ko-KR" altLang="en-US" sz="1600" dirty="0" smtClean="0"/>
+              <a:rPr lang="ko-KR" altLang="en-US" sz="1600" dirty="0"/>
               <a:t>액션 태그</a:t>
             </a:r>
             <a:r>
-              <a:rPr lang="en-US" altLang="ko-KR" sz="1600" dirty="0" smtClean="0"/>
+              <a:rPr lang="en-US" altLang="ko-KR" sz="1600" dirty="0"/>
               <a:t>, </a:t>
             </a:r>
             <a:r>
-              <a:rPr lang="ko-KR" altLang="en-US" sz="1600" dirty="0" smtClean="0"/>
+              <a:rPr lang="ko-KR" altLang="en-US" sz="1600" dirty="0"/>
               <a:t>표현 언어</a:t>
             </a:r>
             <a:r>
-              <a:rPr lang="en-US" altLang="ko-KR" sz="1600" dirty="0" smtClean="0"/>
+              <a:rPr lang="en-US" altLang="ko-KR" sz="1600" dirty="0"/>
               <a:t>,</a:t>
             </a:r>
             <a:r>
-              <a:rPr lang="ko-KR" altLang="en-US" sz="1600" dirty="0" smtClean="0"/>
+              <a:rPr lang="ko-KR" altLang="en-US" sz="1600" dirty="0"/>
               <a:t> </a:t>
             </a:r>
             <a:r>
-              <a:rPr lang="en-US" altLang="ko-KR" sz="1600" dirty="0" smtClean="0"/>
+              <a:rPr lang="en-US" altLang="ko-KR" sz="1600" dirty="0"/>
               <a:t>JSTL</a:t>
             </a:r>
             <a:r>
-              <a:rPr lang="ko-KR" altLang="en-US" sz="1600" dirty="0" smtClean="0"/>
+              <a:rPr lang="ko-KR" altLang="en-US" sz="1600" dirty="0"/>
               <a:t>을</a:t>
             </a:r>
             <a:r>
-              <a:rPr lang="en-US" altLang="ko-KR" sz="1600" dirty="0" smtClean="0"/>
+              <a:rPr lang="en-US" altLang="ko-KR" sz="1600" dirty="0"/>
               <a:t> </a:t>
             </a:r>
             <a:r>
-              <a:rPr lang="ko-KR" altLang="en-US" sz="1600" dirty="0" smtClean="0"/>
+              <a:rPr lang="ko-KR" altLang="en-US" sz="1600" dirty="0"/>
               <a:t>사용하여 </a:t>
             </a:r>
             <a:r>
-              <a:rPr lang="ko-KR" altLang="en-US" sz="1600" dirty="0" err="1" smtClean="0"/>
+              <a:rPr lang="ko-KR" altLang="en-US" sz="1600" dirty="0" err="1"/>
               <a:t>서블릿</a:t>
             </a:r>
             <a:r>
-              <a:rPr lang="ko-KR" altLang="en-US" sz="1600" dirty="0" smtClean="0"/>
+              <a:rPr lang="ko-KR" altLang="en-US" sz="1600" dirty="0"/>
               <a:t> 보다 코드의 길이를 줄일 수 있다</a:t>
             </a:r>
             <a:r>
-              <a:rPr lang="en-US" altLang="ko-KR" sz="1600" dirty="0" smtClean="0"/>
+              <a:rPr lang="en-US" altLang="ko-KR" sz="1600" dirty="0"/>
               <a:t>.</a:t>
             </a:r>
-            <a:endParaRPr lang="en-US" altLang="ko-KR" dirty="0" smtClean="0"/>
+            <a:endParaRPr lang="en-US" altLang="ko-KR" dirty="0"/>
           </a:p>
         </p:txBody>
       </p:sp>
@@ -17921,13 +17394,6 @@
   <p:clrMapOvr>
     <a:masterClrMapping/>
   </p:clrMapOvr>
-  <p:timing>
-    <p:tnLst>
-      <p:par>
-        <p:cTn id="1" dur="indefinite" restart="never" nodeType="tmRoot"/>
-      </p:par>
-    </p:tnLst>
-  </p:timing>
 </p:sld>
 </file>
 
@@ -17985,22 +17451,21 @@
           </a:lstStyle>
           <a:p>
             <a:r>
-              <a:rPr lang="en-US" altLang="ko-KR" dirty="0" smtClean="0"/>
+              <a:rPr lang="en-US" altLang="ko-KR" dirty="0"/>
               <a:t> Java </a:t>
             </a:r>
             <a:r>
-              <a:rPr lang="ko-KR" altLang="en-US" dirty="0" smtClean="0"/>
+              <a:rPr lang="ko-KR" altLang="en-US" dirty="0"/>
               <a:t>웹</a:t>
             </a:r>
             <a:r>
-              <a:rPr lang="en-US" altLang="ko-KR" dirty="0" smtClean="0"/>
+              <a:rPr lang="en-US" altLang="ko-KR" dirty="0"/>
               <a:t> </a:t>
             </a:r>
             <a:r>
-              <a:rPr lang="ko-KR" altLang="en-US" dirty="0" smtClean="0"/>
+              <a:rPr lang="ko-KR" altLang="en-US" dirty="0"/>
               <a:t>개발 환경 구축하기</a:t>
             </a:r>
-            <a:endParaRPr lang="ko-KR" altLang="en-US" dirty="0"/>
           </a:p>
         </p:txBody>
       </p:sp>
@@ -18034,18 +17499,18 @@
               <a:buChar char="u"/>
             </a:pPr>
             <a:r>
-              <a:rPr lang="en-US" altLang="ko-KR" sz="2200" b="1" dirty="0" smtClean="0"/>
+              <a:rPr lang="en-US" altLang="ko-KR" sz="2200" b="1" dirty="0"/>
               <a:t>JSP</a:t>
             </a:r>
             <a:r>
-              <a:rPr lang="ko-KR" altLang="en-US" sz="2200" b="1" dirty="0" smtClean="0"/>
+              <a:rPr lang="ko-KR" altLang="en-US" sz="2200" b="1" dirty="0"/>
               <a:t>를 이용한 웹사이트 개발 환경 도구</a:t>
             </a:r>
             <a:r>
-              <a:rPr lang="ko-KR" altLang="en-US" b="1" dirty="0" smtClean="0"/>
+              <a:rPr lang="ko-KR" altLang="en-US" b="1" dirty="0"/>
               <a:t>  </a:t>
             </a:r>
-            <a:endParaRPr lang="en-US" altLang="ko-KR" b="1" dirty="0" smtClean="0"/>
+            <a:endParaRPr lang="en-US" altLang="ko-KR" b="1" dirty="0"/>
           </a:p>
         </p:txBody>
       </p:sp>
@@ -18108,10 +17573,9 @@
                         </a:lnSpc>
                       </a:pPr>
                       <a:r>
-                        <a:rPr lang="ko-KR" altLang="en-US" sz="1600" dirty="0" smtClean="0"/>
+                        <a:rPr lang="ko-KR" altLang="en-US" sz="1600" dirty="0"/>
                         <a:t>요소</a:t>
                       </a:r>
-                      <a:endParaRPr lang="ko-KR" altLang="en-US" sz="1600" dirty="0"/>
                     </a:p>
                   </a:txBody>
                   <a:tcPr anchor="ctr">
@@ -18136,10 +17600,9 @@
                         </a:lnSpc>
                       </a:pPr>
                       <a:r>
-                        <a:rPr lang="ko-KR" altLang="en-US" sz="1600" dirty="0" smtClean="0"/>
+                        <a:rPr lang="ko-KR" altLang="en-US" sz="1600" dirty="0"/>
                         <a:t>프로그램</a:t>
                       </a:r>
-                      <a:endParaRPr lang="ko-KR" altLang="en-US" sz="1600" dirty="0"/>
                     </a:p>
                   </a:txBody>
                   <a:tcPr anchor="ctr">
@@ -18161,10 +17624,9 @@
                         </a:lnSpc>
                       </a:pPr>
                       <a:r>
-                        <a:rPr lang="ko-KR" altLang="en-US" sz="1600" dirty="0" smtClean="0"/>
+                        <a:rPr lang="ko-KR" altLang="en-US" sz="1600" dirty="0"/>
                         <a:t>설명</a:t>
                       </a:r>
-                      <a:endParaRPr lang="ko-KR" altLang="en-US" sz="1600" dirty="0"/>
                     </a:p>
                   </a:txBody>
                   <a:tcPr anchor="ctr">
@@ -18196,10 +17658,10 @@
                         </a:lnSpc>
                       </a:pPr>
                       <a:r>
-                        <a:rPr lang="ko-KR" altLang="en-US" sz="1600" dirty="0" smtClean="0"/>
+                        <a:rPr lang="ko-KR" altLang="en-US" sz="1600" dirty="0"/>
                         <a:t>자바 개발 환경</a:t>
                       </a:r>
-                      <a:endParaRPr lang="en-US" altLang="ko-KR" sz="1600" dirty="0" smtClean="0"/>
+                      <a:endParaRPr lang="en-US" altLang="ko-KR" sz="1600" dirty="0"/>
                     </a:p>
                   </a:txBody>
                   <a:tcPr anchor="ctr">
@@ -18219,7 +17681,7 @@
                         </a:lnSpc>
                       </a:pPr>
                       <a:r>
-                        <a:rPr lang="en-US" altLang="ko-KR" sz="1600" dirty="0" smtClean="0"/>
+                        <a:rPr lang="en-US" altLang="ko-KR" sz="1600" dirty="0"/>
                         <a:t> JDK</a:t>
                       </a:r>
                     </a:p>
@@ -18237,30 +17699,29 @@
                         </a:lnSpc>
                       </a:pPr>
                       <a:r>
-                        <a:rPr lang="en-US" altLang="ko-KR" sz="1600" dirty="0" smtClean="0"/>
+                        <a:rPr lang="en-US" altLang="ko-KR" sz="1600" dirty="0"/>
                         <a:t> JSP</a:t>
                       </a:r>
                       <a:r>
-                        <a:rPr lang="ko-KR" altLang="en-US" sz="1600" dirty="0" smtClean="0"/>
+                        <a:rPr lang="ko-KR" altLang="en-US" sz="1600" dirty="0"/>
                         <a:t>는 </a:t>
                       </a:r>
                       <a:r>
-                        <a:rPr lang="en-US" altLang="ko-KR" sz="1600" dirty="0" smtClean="0"/>
+                        <a:rPr lang="en-US" altLang="ko-KR" sz="1600" dirty="0"/>
                         <a:t>HTML </a:t>
                       </a:r>
                       <a:r>
-                        <a:rPr lang="ko-KR" altLang="en-US" sz="1600" dirty="0" smtClean="0"/>
+                        <a:rPr lang="ko-KR" altLang="en-US" sz="1600" dirty="0"/>
                         <a:t>코드 내에 자바 코드를 작성하므로 </a:t>
                       </a:r>
                       <a:r>
-                        <a:rPr lang="en-US" altLang="ko-KR" sz="1600" dirty="0" smtClean="0"/>
+                        <a:rPr lang="en-US" altLang="ko-KR" sz="1600" dirty="0"/>
                         <a:t>JDK</a:t>
                       </a:r>
                       <a:r>
-                        <a:rPr lang="ko-KR" altLang="en-US" sz="1600" dirty="0" smtClean="0"/>
+                        <a:rPr lang="ko-KR" altLang="en-US" sz="1600" dirty="0"/>
                         <a:t>가 반드시 설치 되어야 함</a:t>
                       </a:r>
-                      <a:endParaRPr lang="ko-KR" altLang="en-US" sz="1600" dirty="0"/>
                     </a:p>
                   </a:txBody>
                   <a:tcPr anchor="ctr">
@@ -18287,10 +17748,10 @@
                         </a:lnSpc>
                       </a:pPr>
                       <a:r>
-                        <a:rPr lang="ko-KR" altLang="en-US" sz="1600" dirty="0" smtClean="0"/>
+                        <a:rPr lang="ko-KR" altLang="en-US" sz="1600" dirty="0"/>
                         <a:t>통합개발환경</a:t>
                       </a:r>
-                      <a:endParaRPr lang="en-US" altLang="ko-KR" sz="1600" dirty="0" smtClean="0"/>
+                      <a:endParaRPr lang="en-US" altLang="ko-KR" sz="1600" dirty="0"/>
                     </a:p>
                   </a:txBody>
                   <a:tcPr anchor="ctr">
@@ -18311,14 +17772,14 @@
                         </a:lnSpc>
                       </a:pPr>
                       <a:r>
-                        <a:rPr lang="ko-KR" altLang="en-US" sz="1600" dirty="0" smtClean="0"/>
+                        <a:rPr lang="ko-KR" altLang="en-US" sz="1600" dirty="0"/>
                         <a:t> </a:t>
                       </a:r>
                       <a:r>
-                        <a:rPr lang="ko-KR" altLang="en-US" sz="1600" dirty="0" err="1" smtClean="0"/>
+                        <a:rPr lang="ko-KR" altLang="en-US" sz="1600" dirty="0" err="1"/>
                         <a:t>이클립스</a:t>
                       </a:r>
-                      <a:endParaRPr lang="en-US" altLang="ko-KR" sz="1600" dirty="0" smtClean="0"/>
+                      <a:endParaRPr lang="en-US" altLang="ko-KR" sz="1600" dirty="0"/>
                     </a:p>
                   </a:txBody>
                   <a:tcPr anchor="ctr">
@@ -18348,31 +17809,31 @@
                         <a:defRPr/>
                       </a:pPr>
                       <a:r>
-                        <a:rPr lang="en-US" altLang="ko-KR" sz="1600" dirty="0" smtClean="0"/>
+                        <a:rPr lang="en-US" altLang="ko-KR" sz="1600" dirty="0"/>
                         <a:t>JSP </a:t>
                       </a:r>
                       <a:r>
-                        <a:rPr lang="ko-KR" altLang="en-US" sz="1600" dirty="0" smtClean="0"/>
+                        <a:rPr lang="ko-KR" altLang="en-US" sz="1600" dirty="0"/>
                         <a:t>코드를 컴파일하고 실행할 수 있는 통합개발환경</a:t>
                       </a:r>
                       <a:r>
-                        <a:rPr lang="en-US" altLang="ko-KR" sz="1600" dirty="0" smtClean="0"/>
+                        <a:rPr lang="en-US" altLang="ko-KR" sz="1600" dirty="0"/>
                         <a:t>(IDE)</a:t>
                       </a:r>
                       <a:r>
-                        <a:rPr lang="ko-KR" altLang="en-US" sz="1600" dirty="0" smtClean="0"/>
+                        <a:rPr lang="ko-KR" altLang="en-US" sz="1600" dirty="0"/>
                         <a:t>로 </a:t>
                       </a:r>
                       <a:r>
-                        <a:rPr lang="ko-KR" altLang="en-US" sz="1600" dirty="0" err="1" smtClean="0"/>
+                        <a:rPr lang="ko-KR" altLang="en-US" sz="1600" dirty="0" err="1"/>
                         <a:t>이클립스를</a:t>
                       </a:r>
                       <a:r>
-                        <a:rPr lang="ko-KR" altLang="en-US" sz="1600" dirty="0" smtClean="0"/>
+                        <a:rPr lang="ko-KR" altLang="en-US" sz="1600" dirty="0"/>
                         <a:t> 사용</a:t>
                       </a:r>
                       <a:r>
-                        <a:rPr lang="en-US" altLang="ko-KR" sz="1600" dirty="0" smtClean="0"/>
+                        <a:rPr lang="en-US" altLang="ko-KR" sz="1600" dirty="0"/>
                         <a:t>.</a:t>
                       </a:r>
                     </a:p>
@@ -18395,18 +17856,18 @@
                         <a:defRPr/>
                       </a:pPr>
                       <a:r>
-                        <a:rPr lang="en-US" altLang="ko-KR" sz="1600" dirty="0" smtClean="0"/>
+                        <a:rPr lang="en-US" altLang="ko-KR" sz="1600" dirty="0"/>
                         <a:t>Eclipse IDE</a:t>
                       </a:r>
                       <a:r>
-                        <a:rPr lang="en-US" altLang="ko-KR" sz="1600" baseline="0" dirty="0" smtClean="0"/>
+                        <a:rPr lang="en-US" altLang="ko-KR" sz="1600" baseline="0" dirty="0"/>
                         <a:t> for Enterprise Java Developers  </a:t>
                       </a:r>
                       <a:r>
-                        <a:rPr lang="ko-KR" altLang="en-US" sz="1600" baseline="0" dirty="0" smtClean="0"/>
+                        <a:rPr lang="ko-KR" altLang="en-US" sz="1600" baseline="0" dirty="0"/>
                         <a:t>설치</a:t>
                       </a:r>
-                      <a:endParaRPr lang="ko-KR" altLang="en-US" sz="1600" dirty="0" smtClean="0"/>
+                      <a:endParaRPr lang="ko-KR" altLang="en-US" sz="1600" dirty="0"/>
                     </a:p>
                   </a:txBody>
                   <a:tcPr anchor="ctr">
@@ -18434,11 +17895,11 @@
                         </a:lnSpc>
                       </a:pPr>
                       <a:r>
-                        <a:rPr lang="ko-KR" altLang="en-US" sz="1600" dirty="0" smtClean="0"/>
+                        <a:rPr lang="ko-KR" altLang="en-US" sz="1600" dirty="0"/>
                         <a:t>웹 서버</a:t>
                       </a:r>
                       <a:r>
-                        <a:rPr lang="en-US" altLang="ko-KR" sz="1600" dirty="0" smtClean="0"/>
+                        <a:rPr lang="en-US" altLang="ko-KR" sz="1600" dirty="0"/>
                         <a:t>(WAS)</a:t>
                       </a:r>
                     </a:p>
@@ -18465,14 +17926,14 @@
                         </a:lnSpc>
                       </a:pPr>
                       <a:r>
-                        <a:rPr lang="ko-KR" altLang="en-US" sz="1600" dirty="0" smtClean="0"/>
+                        <a:rPr lang="ko-KR" altLang="en-US" sz="1600" dirty="0"/>
                         <a:t> </a:t>
                       </a:r>
                       <a:r>
-                        <a:rPr lang="ko-KR" altLang="en-US" sz="1600" dirty="0" err="1" smtClean="0"/>
+                        <a:rPr lang="ko-KR" altLang="en-US" sz="1600" dirty="0" err="1"/>
                         <a:t>톰캣</a:t>
                       </a:r>
-                      <a:endParaRPr lang="en-US" altLang="ko-KR" sz="1600" dirty="0" smtClean="0"/>
+                      <a:endParaRPr lang="en-US" altLang="ko-KR" sz="1600" dirty="0"/>
                     </a:p>
                   </a:txBody>
                   <a:tcPr anchor="ctr">
@@ -18506,46 +17967,46 @@
                         <a:defRPr/>
                       </a:pPr>
                       <a:r>
-                        <a:rPr lang="en-US" altLang="ko-KR" sz="1600" dirty="0" smtClean="0"/>
+                        <a:rPr lang="en-US" altLang="ko-KR" sz="1600" dirty="0"/>
                         <a:t> </a:t>
                       </a:r>
                       <a:r>
-                        <a:rPr lang="ko-KR" altLang="en-US" sz="1600" dirty="0" smtClean="0"/>
+                        <a:rPr lang="ko-KR" altLang="en-US" sz="1600" dirty="0"/>
                         <a:t>웹 페이지가 웹 브라우저에 나타나도록 하려면 웹 컨테이너를 </a:t>
                       </a:r>
                       <a:r>
-                        <a:rPr lang="ko-KR" altLang="en-US" sz="1600" dirty="0" err="1" smtClean="0"/>
+                        <a:rPr lang="ko-KR" altLang="en-US" sz="1600" dirty="0" err="1"/>
                         <a:t>설치해야하는데</a:t>
                       </a:r>
                       <a:r>
-                        <a:rPr lang="ko-KR" altLang="en-US" sz="1600" dirty="0" smtClean="0"/>
+                        <a:rPr lang="ko-KR" altLang="en-US" sz="1600" dirty="0"/>
                         <a:t> 대표적인 </a:t>
                       </a:r>
                       <a:r>
-                        <a:rPr lang="ko-KR" altLang="en-US" sz="1600" dirty="0" err="1" smtClean="0"/>
+                        <a:rPr lang="ko-KR" altLang="en-US" sz="1600" dirty="0" err="1"/>
                         <a:t>웹서버가</a:t>
                       </a:r>
                       <a:r>
-                        <a:rPr lang="ko-KR" altLang="en-US" sz="1600" dirty="0" smtClean="0"/>
+                        <a:rPr lang="ko-KR" altLang="en-US" sz="1600" dirty="0"/>
                         <a:t> 무료 </a:t>
                       </a:r>
                       <a:r>
-                        <a:rPr lang="ko-KR" altLang="en-US" sz="1600" dirty="0" err="1" smtClean="0"/>
+                        <a:rPr lang="ko-KR" altLang="en-US" sz="1600" dirty="0" err="1"/>
                         <a:t>오픈소스</a:t>
                       </a:r>
                       <a:r>
-                        <a:rPr lang="ko-KR" altLang="en-US" sz="1600" dirty="0" smtClean="0"/>
+                        <a:rPr lang="ko-KR" altLang="en-US" sz="1600" dirty="0"/>
                         <a:t> 프로젝트인 </a:t>
                       </a:r>
                       <a:r>
-                        <a:rPr lang="ko-KR" altLang="en-US" sz="1600" dirty="0" err="1" smtClean="0"/>
+                        <a:rPr lang="ko-KR" altLang="en-US" sz="1600" dirty="0" err="1"/>
                         <a:t>톰캣이다</a:t>
                       </a:r>
                       <a:r>
-                        <a:rPr lang="en-US" altLang="ko-KR" sz="1600" dirty="0" smtClean="0"/>
+                        <a:rPr lang="en-US" altLang="ko-KR" sz="1600" dirty="0"/>
                         <a:t>.</a:t>
                       </a:r>
-                      <a:endParaRPr lang="ko-KR" altLang="en-US" sz="1600" dirty="0" smtClean="0"/>
+                      <a:endParaRPr lang="ko-KR" altLang="en-US" sz="1600" dirty="0"/>
                     </a:p>
                   </a:txBody>
                   <a:tcPr anchor="ctr">
@@ -18579,13 +18040,6 @@
   <p:clrMapOvr>
     <a:masterClrMapping/>
   </p:clrMapOvr>
-  <p:timing>
-    <p:tnLst>
-      <p:par>
-        <p:cTn id="1" dur="indefinite" restart="never" nodeType="tmRoot"/>
-      </p:par>
-    </p:tnLst>
-  </p:timing>
 </p:sld>
 </file>
 
@@ -18804,20 +18258,12 @@
               <a:buChar char="u"/>
             </a:pPr>
             <a:r>
-              <a:rPr lang="ko-KR" altLang="en-US" sz="2000" b="1" dirty="0" smtClean="0">
+              <a:rPr lang="ko-KR" altLang="en-US" sz="2000" b="1" dirty="0">
                 <a:solidFill>
                   <a:srgbClr val="C00000"/>
                 </a:solidFill>
               </a:rPr>
-              <a:t> 자바 </a:t>
-            </a:r>
-            <a:r>
-              <a:rPr lang="ko-KR" altLang="en-US" sz="2000" b="1" dirty="0">
-                <a:solidFill>
-                  <a:srgbClr val="C00000"/>
-                </a:solidFill>
-              </a:rPr>
-              <a:t>개발도구</a:t>
+              <a:t> 자바 개발도구</a:t>
             </a:r>
             <a:r>
               <a:rPr lang="en-US" altLang="ko-KR" sz="2000" b="1" dirty="0">
@@ -18935,11 +18381,11 @@
           <a:lstStyle/>
           <a:p>
             <a:r>
-              <a:rPr lang="en-US" altLang="ko-KR" dirty="0" smtClean="0"/>
+              <a:rPr lang="en-US" altLang="ko-KR" dirty="0"/>
               <a:t>  </a:t>
             </a:r>
             <a:r>
-              <a:rPr lang="en-US" altLang="ko-KR" b="1" dirty="0" smtClean="0"/>
+              <a:rPr lang="en-US" altLang="ko-KR" b="1" dirty="0"/>
               <a:t>JDK(Java Development Kit)</a:t>
             </a:r>
             <a:endParaRPr lang="ko-KR" altLang="en-US" dirty="0"/>
@@ -18973,50 +18419,49 @@
               <a:buChar char="§"/>
             </a:pPr>
             <a:r>
-              <a:rPr lang="ko-KR" altLang="en-US" sz="1600" dirty="0" smtClean="0"/>
+              <a:rPr lang="ko-KR" altLang="en-US" sz="1600" dirty="0"/>
               <a:t>오라클 </a:t>
             </a:r>
             <a:r>
-              <a:rPr lang="en-US" altLang="ko-KR" sz="1600" dirty="0" smtClean="0"/>
+              <a:rPr lang="en-US" altLang="ko-KR" sz="1600" dirty="0"/>
               <a:t>java </a:t>
             </a:r>
             <a:r>
-              <a:rPr lang="ko-KR" altLang="en-US" sz="1600" dirty="0" smtClean="0"/>
+              <a:rPr lang="ko-KR" altLang="en-US" sz="1600" dirty="0"/>
               <a:t>다운로드</a:t>
             </a:r>
             <a:r>
-              <a:rPr lang="en-US" altLang="ko-KR" sz="1600" dirty="0" smtClean="0"/>
+              <a:rPr lang="en-US" altLang="ko-KR" sz="1600" dirty="0"/>
               <a:t>(</a:t>
             </a:r>
             <a:r>
-              <a:rPr lang="ko-KR" altLang="en-US" sz="1600" dirty="0" smtClean="0"/>
+              <a:rPr lang="ko-KR" altLang="en-US" sz="1600" dirty="0"/>
               <a:t>검색</a:t>
             </a:r>
             <a:r>
-              <a:rPr lang="en-US" altLang="ko-KR" sz="1600" dirty="0" smtClean="0"/>
+              <a:rPr lang="en-US" altLang="ko-KR" sz="1600" dirty="0"/>
               <a:t>)-&gt; windows&gt; Java SE21 </a:t>
             </a:r>
             <a:r>
-              <a:rPr lang="ko-KR" altLang="en-US" sz="1600" dirty="0" smtClean="0"/>
+              <a:rPr lang="ko-KR" altLang="en-US" sz="1600" dirty="0"/>
               <a:t>다운로드 </a:t>
             </a:r>
             <a:r>
-              <a:rPr lang="en-US" altLang="ko-KR" sz="1600" dirty="0" smtClean="0"/>
+              <a:rPr lang="en-US" altLang="ko-KR" sz="1600" dirty="0"/>
               <a:t>-&gt; x64</a:t>
             </a:r>
             <a:r>
-              <a:rPr lang="ko-KR" altLang="en-US" sz="1600" dirty="0" smtClean="0"/>
+              <a:rPr lang="ko-KR" altLang="en-US" sz="1600" dirty="0"/>
               <a:t> </a:t>
             </a:r>
             <a:r>
-              <a:rPr lang="ko-KR" altLang="en-US" sz="1600" dirty="0" err="1" smtClean="0"/>
+              <a:rPr lang="ko-KR" altLang="en-US" sz="1600" dirty="0" err="1"/>
               <a:t>인스톨러</a:t>
             </a:r>
             <a:r>
-              <a:rPr lang="ko-KR" altLang="en-US" sz="1600" dirty="0" smtClean="0"/>
+              <a:rPr lang="ko-KR" altLang="en-US" sz="1600" dirty="0"/>
               <a:t> </a:t>
             </a:r>
-            <a:endParaRPr lang="ko-KR" altLang="en-US" sz="1600" dirty="0"/>
           </a:p>
         </p:txBody>
       </p:sp>
@@ -19111,13 +18556,6 @@
   <p:clrMapOvr>
     <a:masterClrMapping/>
   </p:clrMapOvr>
-  <p:timing>
-    <p:tnLst>
-      <p:par>
-        <p:cTn id="1" dur="indefinite" restart="never" nodeType="tmRoot"/>
-      </p:par>
-    </p:tnLst>
-  </p:timing>
 </p:sld>
 </file>
 
@@ -19159,30 +18597,29 @@
           <a:lstStyle/>
           <a:p>
             <a:r>
-              <a:rPr lang="en-US" altLang="ko-KR" dirty="0" smtClean="0"/>
+              <a:rPr lang="en-US" altLang="ko-KR" dirty="0"/>
               <a:t> </a:t>
             </a:r>
             <a:r>
-              <a:rPr lang="ko-KR" altLang="en-US" dirty="0" err="1" smtClean="0"/>
+              <a:rPr lang="ko-KR" altLang="en-US" dirty="0" err="1"/>
               <a:t>이클립스</a:t>
             </a:r>
             <a:r>
-              <a:rPr lang="en-US" altLang="ko-KR" dirty="0" smtClean="0"/>
+              <a:rPr lang="en-US" altLang="ko-KR" dirty="0"/>
               <a:t>(Eclipse)</a:t>
             </a:r>
             <a:r>
-              <a:rPr lang="ko-KR" altLang="en-US" dirty="0" smtClean="0"/>
+              <a:rPr lang="ko-KR" altLang="en-US" dirty="0"/>
               <a:t> </a:t>
             </a:r>
             <a:r>
-              <a:rPr lang="en-US" altLang="ko-KR" dirty="0" smtClean="0"/>
+              <a:rPr lang="en-US" altLang="ko-KR" dirty="0"/>
               <a:t>IDE </a:t>
             </a:r>
             <a:r>
-              <a:rPr lang="ko-KR" altLang="en-US" dirty="0" smtClean="0"/>
+              <a:rPr lang="ko-KR" altLang="en-US" dirty="0"/>
               <a:t>설치</a:t>
             </a:r>
-            <a:endParaRPr lang="ko-KR" altLang="en-US" dirty="0"/>
           </a:p>
         </p:txBody>
       </p:sp>
@@ -19384,7 +18821,7 @@
               <a:buChar char="u"/>
             </a:pPr>
             <a:r>
-              <a:rPr lang="ko-KR" altLang="en-US" sz="2000" b="1" dirty="0" smtClean="0">
+              <a:rPr lang="ko-KR" altLang="en-US" sz="2000" b="1" dirty="0">
                 <a:solidFill>
                   <a:srgbClr val="C00000"/>
                 </a:solidFill>
@@ -19392,7 +18829,7 @@
               <a:t> </a:t>
             </a:r>
             <a:r>
-              <a:rPr lang="ko-KR" altLang="en-US" sz="2000" b="1" dirty="0" err="1" smtClean="0">
+              <a:rPr lang="ko-KR" altLang="en-US" sz="2000" b="1" dirty="0" err="1">
                 <a:solidFill>
                   <a:srgbClr val="C00000"/>
                 </a:solidFill>
@@ -19400,7 +18837,7 @@
               <a:t>이클립스</a:t>
             </a:r>
             <a:r>
-              <a:rPr lang="ko-KR" altLang="en-US" sz="2000" b="1" dirty="0" smtClean="0">
+              <a:rPr lang="ko-KR" altLang="en-US" sz="2000" b="1" dirty="0">
                 <a:solidFill>
                   <a:srgbClr val="C00000"/>
                 </a:solidFill>
@@ -19408,7 +18845,7 @@
               <a:t> </a:t>
             </a:r>
             <a:r>
-              <a:rPr lang="en-US" altLang="ko-KR" sz="2000" b="1" dirty="0" smtClean="0">
+              <a:rPr lang="en-US" altLang="ko-KR" sz="2000" b="1" dirty="0">
                 <a:solidFill>
                   <a:srgbClr val="C00000"/>
                 </a:solidFill>
@@ -19416,7 +18853,7 @@
               <a:t>IED(</a:t>
             </a:r>
             <a:r>
-              <a:rPr lang="ko-KR" altLang="en-US" sz="2000" b="1" dirty="0" smtClean="0">
+              <a:rPr lang="ko-KR" altLang="en-US" sz="2000" b="1" dirty="0">
                 <a:solidFill>
                   <a:srgbClr val="C00000"/>
                 </a:solidFill>
@@ -19424,7 +18861,7 @@
               <a:t>통합개발환경</a:t>
             </a:r>
             <a:r>
-              <a:rPr lang="en-US" altLang="ko-KR" sz="2000" b="1" dirty="0" smtClean="0">
+              <a:rPr lang="en-US" altLang="ko-KR" sz="2000" b="1" dirty="0">
                 <a:solidFill>
                   <a:srgbClr val="C00000"/>
                 </a:solidFill>
@@ -19432,14 +18869,14 @@
               <a:t>) </a:t>
             </a:r>
             <a:r>
-              <a:rPr lang="ko-KR" altLang="en-US" sz="2000" b="1" dirty="0" smtClean="0">
+              <a:rPr lang="ko-KR" altLang="en-US" sz="2000" b="1" dirty="0">
                 <a:solidFill>
                   <a:srgbClr val="C00000"/>
                 </a:solidFill>
               </a:rPr>
               <a:t>설치</a:t>
             </a:r>
-            <a:endParaRPr lang="en-US" altLang="ko-KR" sz="2200" dirty="0" smtClean="0"/>
+            <a:endParaRPr lang="en-US" altLang="ko-KR" sz="2200" dirty="0"/>
           </a:p>
           <a:p>
             <a:pPr lvl="1">
@@ -19450,24 +18887,12 @@
               <a:buChar char="§"/>
             </a:pPr>
             <a:r>
-              <a:rPr lang="en-US" altLang="ko-KR" sz="1800" dirty="0" smtClean="0">
-                <a:hlinkClick r:id="rId2"/>
-              </a:rPr>
-              <a:t>https</a:t>
-            </a:r>
-            <a:r>
               <a:rPr lang="en-US" altLang="ko-KR" sz="1800" dirty="0">
                 <a:hlinkClick r:id="rId2"/>
               </a:rPr>
-              <a:t>://www.eclipse.org/downloads</a:t>
-            </a:r>
-            <a:r>
-              <a:rPr lang="en-US" altLang="ko-KR" sz="1800" dirty="0" smtClean="0">
-                <a:hlinkClick r:id="rId2"/>
-              </a:rPr>
-              <a:t>/</a:t>
-            </a:r>
-            <a:endParaRPr lang="en-US" altLang="ko-KR" sz="1800" dirty="0" smtClean="0"/>
+              <a:t>https://www.eclipse.org/downloads/</a:t>
+            </a:r>
+            <a:endParaRPr lang="en-US" altLang="ko-KR" sz="1800" dirty="0"/>
           </a:p>
           <a:p>
             <a:pPr lvl="1">
@@ -19478,28 +18903,24 @@
               <a:buChar char="§"/>
             </a:pPr>
             <a:r>
-              <a:rPr lang="en-US" altLang="ko-KR" sz="1800" dirty="0" smtClean="0"/>
+              <a:rPr lang="en-US" altLang="ko-KR" sz="1800" dirty="0"/>
               <a:t>Workspace(</a:t>
             </a:r>
             <a:r>
-              <a:rPr lang="ko-KR" altLang="en-US" sz="1800" dirty="0" smtClean="0"/>
+              <a:rPr lang="ko-KR" altLang="en-US" sz="1800" dirty="0"/>
               <a:t>작업공간</a:t>
             </a:r>
             <a:r>
-              <a:rPr lang="en-US" altLang="ko-KR" sz="1800" dirty="0" smtClean="0"/>
+              <a:rPr lang="en-US" altLang="ko-KR" sz="1800" dirty="0"/>
               <a:t>) </a:t>
             </a:r>
             <a:r>
-              <a:rPr lang="ko-KR" altLang="en-US" sz="1800" dirty="0" smtClean="0"/>
+              <a:rPr lang="ko-KR" altLang="en-US" sz="1800" dirty="0"/>
               <a:t>설정</a:t>
             </a:r>
             <a:r>
               <a:rPr lang="en-US" altLang="ko-KR" sz="1800" dirty="0"/>
-              <a:t> </a:t>
-            </a:r>
-            <a:r>
-              <a:rPr lang="en-US" altLang="ko-KR" sz="1800" dirty="0" smtClean="0"/>
-              <a:t>: C:\JspWorkSpace</a:t>
+              <a:t> : C:\JspWorkSpace</a:t>
             </a:r>
             <a:endParaRPr lang="en-US" altLang="ko-KR" sz="2000" b="1" dirty="0"/>
           </a:p>
@@ -19610,7 +19031,7 @@
           <a:p>
             <a:pPr algn="ctr"/>
             <a:r>
-              <a:rPr lang="en-US" altLang="ko-KR" sz="1600" dirty="0" smtClean="0">
+              <a:rPr lang="en-US" altLang="ko-KR" sz="1600" dirty="0">
                 <a:solidFill>
                   <a:sysClr val="windowText" lastClr="000000"/>
                 </a:solidFill>
@@ -19621,7 +19042,7 @@
           <a:p>
             <a:pPr algn="ctr"/>
             <a:r>
-              <a:rPr lang="en-US" altLang="ko-KR" sz="1600" dirty="0" smtClean="0">
+              <a:rPr lang="en-US" altLang="ko-KR" sz="1600" dirty="0">
                 <a:solidFill>
                   <a:sysClr val="windowText" lastClr="000000"/>
                 </a:solidFill>
@@ -19629,18 +19050,13 @@
               <a:t>Web Service </a:t>
             </a:r>
             <a:r>
-              <a:rPr lang="ko-KR" altLang="en-US" sz="1600" dirty="0" smtClean="0">
+              <a:rPr lang="ko-KR" altLang="en-US" sz="1600" dirty="0">
                 <a:solidFill>
                   <a:sysClr val="windowText" lastClr="000000"/>
                 </a:solidFill>
               </a:rPr>
               <a:t>포함</a:t>
             </a:r>
-            <a:endParaRPr lang="ko-KR" altLang="en-US" sz="1600" dirty="0">
-              <a:solidFill>
-                <a:sysClr val="windowText" lastClr="000000"/>
-              </a:solidFill>
-            </a:endParaRPr>
           </a:p>
         </p:txBody>
       </p:sp>
@@ -19730,13 +19146,6 @@
   <p:clrMapOvr>
     <a:masterClrMapping/>
   </p:clrMapOvr>
-  <p:timing>
-    <p:tnLst>
-      <p:par>
-        <p:cTn id="1" dur="indefinite" restart="never" nodeType="tmRoot"/>
-      </p:par>
-    </p:tnLst>
-  </p:timing>
 </p:sld>
 </file>
 
@@ -19778,30 +19187,29 @@
           <a:lstStyle/>
           <a:p>
             <a:r>
-              <a:rPr lang="en-US" altLang="ko-KR" dirty="0" smtClean="0"/>
+              <a:rPr lang="en-US" altLang="ko-KR" dirty="0"/>
               <a:t> </a:t>
             </a:r>
             <a:r>
-              <a:rPr lang="ko-KR" altLang="en-US" dirty="0" err="1" smtClean="0"/>
+              <a:rPr lang="ko-KR" altLang="en-US" dirty="0" err="1"/>
               <a:t>이클립스</a:t>
             </a:r>
             <a:r>
-              <a:rPr lang="en-US" altLang="ko-KR" dirty="0" smtClean="0"/>
+              <a:rPr lang="en-US" altLang="ko-KR" dirty="0"/>
               <a:t>(Eclipse)</a:t>
             </a:r>
             <a:r>
-              <a:rPr lang="ko-KR" altLang="en-US" dirty="0" smtClean="0"/>
+              <a:rPr lang="ko-KR" altLang="en-US" dirty="0"/>
               <a:t> </a:t>
             </a:r>
             <a:r>
-              <a:rPr lang="en-US" altLang="ko-KR" dirty="0" smtClean="0"/>
+              <a:rPr lang="en-US" altLang="ko-KR" dirty="0"/>
               <a:t>IDE </a:t>
             </a:r>
             <a:r>
-              <a:rPr lang="ko-KR" altLang="en-US" dirty="0" smtClean="0"/>
+              <a:rPr lang="ko-KR" altLang="en-US" dirty="0"/>
               <a:t>설치</a:t>
             </a:r>
-            <a:endParaRPr lang="ko-KR" altLang="en-US" dirty="0"/>
           </a:p>
         </p:txBody>
       </p:sp>
@@ -20003,7 +19411,7 @@
               <a:buChar char="u"/>
             </a:pPr>
             <a:r>
-              <a:rPr lang="ko-KR" altLang="en-US" sz="2000" b="1" dirty="0" smtClean="0">
+              <a:rPr lang="ko-KR" altLang="en-US" sz="2000" b="1" dirty="0">
                 <a:solidFill>
                   <a:srgbClr val="C00000"/>
                 </a:solidFill>
@@ -20011,7 +19419,7 @@
               <a:t> </a:t>
             </a:r>
             <a:r>
-              <a:rPr lang="ko-KR" altLang="en-US" sz="2000" b="1" dirty="0" err="1" smtClean="0">
+              <a:rPr lang="ko-KR" altLang="en-US" sz="2000" b="1" dirty="0" err="1">
                 <a:solidFill>
                   <a:srgbClr val="C00000"/>
                 </a:solidFill>
@@ -20019,7 +19427,7 @@
               <a:t>이클립스</a:t>
             </a:r>
             <a:r>
-              <a:rPr lang="ko-KR" altLang="en-US" sz="2000" b="1" dirty="0" smtClean="0">
+              <a:rPr lang="ko-KR" altLang="en-US" sz="2000" b="1" dirty="0">
                 <a:solidFill>
                   <a:srgbClr val="C00000"/>
                 </a:solidFill>
@@ -20126,7 +19534,7 @@
           <a:p>
             <a:pPr algn="ctr"/>
             <a:r>
-              <a:rPr lang="en-US" altLang="ko-KR" sz="1600" dirty="0" smtClean="0">
+              <a:rPr lang="en-US" altLang="ko-KR" sz="1600" dirty="0">
                 <a:solidFill>
                   <a:sysClr val="windowText" lastClr="000000"/>
                 </a:solidFill>
@@ -20137,7 +19545,7 @@
           <a:p>
             <a:pPr algn="ctr"/>
             <a:r>
-              <a:rPr lang="ko-KR" altLang="en-US" sz="1600" dirty="0" err="1" smtClean="0">
+              <a:rPr lang="ko-KR" altLang="en-US" sz="1600" dirty="0" err="1">
                 <a:solidFill>
                   <a:sysClr val="windowText" lastClr="000000"/>
                 </a:solidFill>
@@ -20145,7 +19553,7 @@
               <a:t>선택후</a:t>
             </a:r>
             <a:r>
-              <a:rPr lang="ko-KR" altLang="en-US" sz="1600" dirty="0" smtClean="0">
+              <a:rPr lang="ko-KR" altLang="en-US" sz="1600" dirty="0">
                 <a:solidFill>
                   <a:sysClr val="windowText" lastClr="000000"/>
                 </a:solidFill>
@@ -20153,7 +19561,7 @@
               <a:t> </a:t>
             </a:r>
             <a:r>
-              <a:rPr lang="en-US" altLang="ko-KR" sz="1600" dirty="0" smtClean="0">
+              <a:rPr lang="en-US" altLang="ko-KR" sz="1600" dirty="0">
                 <a:solidFill>
                   <a:sysClr val="windowText" lastClr="000000"/>
                 </a:solidFill>
@@ -20161,14 +19569,14 @@
               <a:t>java</a:t>
             </a:r>
             <a:r>
-              <a:rPr lang="ko-KR" altLang="en-US" sz="1600" dirty="0" smtClean="0">
+              <a:rPr lang="ko-KR" altLang="en-US" sz="1600" dirty="0">
                 <a:solidFill>
                   <a:sysClr val="windowText" lastClr="000000"/>
                 </a:solidFill>
               </a:rPr>
               <a:t>로 변경</a:t>
             </a:r>
-            <a:endParaRPr lang="en-US" altLang="ko-KR" sz="1600" dirty="0" smtClean="0">
+            <a:endParaRPr lang="en-US" altLang="ko-KR" sz="1600" dirty="0">
               <a:solidFill>
                 <a:sysClr val="windowText" lastClr="000000"/>
               </a:solidFill>
@@ -20255,7 +19663,7 @@
           <a:p>
             <a:pPr algn="ctr"/>
             <a:r>
-              <a:rPr lang="en-US" altLang="ko-KR" sz="1600" dirty="0" smtClean="0">
+              <a:rPr lang="en-US" altLang="ko-KR" sz="1600" dirty="0">
                 <a:solidFill>
                   <a:sysClr val="windowText" lastClr="000000"/>
                 </a:solidFill>
@@ -20263,7 +19671,7 @@
               <a:t>Web </a:t>
             </a:r>
             <a:r>
-              <a:rPr lang="ko-KR" altLang="en-US" sz="1600" dirty="0" smtClean="0">
+              <a:rPr lang="ko-KR" altLang="en-US" sz="1600" dirty="0">
                 <a:solidFill>
                   <a:sysClr val="windowText" lastClr="000000"/>
                 </a:solidFill>
@@ -20271,7 +19679,7 @@
               <a:t>프로젝트 </a:t>
             </a:r>
             <a:r>
-              <a:rPr lang="ko-KR" altLang="en-US" sz="1600" dirty="0" err="1" smtClean="0">
+              <a:rPr lang="ko-KR" altLang="en-US" sz="1600" dirty="0" err="1">
                 <a:solidFill>
                   <a:sysClr val="windowText" lastClr="000000"/>
                 </a:solidFill>
@@ -20279,7 +19687,7 @@
               <a:t>만들때</a:t>
             </a:r>
             <a:r>
-              <a:rPr lang="ko-KR" altLang="en-US" sz="1600" dirty="0" smtClean="0">
+              <a:rPr lang="ko-KR" altLang="en-US" sz="1600" dirty="0">
                 <a:solidFill>
                   <a:sysClr val="windowText" lastClr="000000"/>
                 </a:solidFill>
@@ -20287,7 +19695,7 @@
               <a:t> </a:t>
             </a:r>
             <a:r>
-              <a:rPr lang="en-US" altLang="ko-KR" sz="1600" dirty="0" err="1" smtClean="0">
+              <a:rPr lang="en-US" altLang="ko-KR" sz="1600" dirty="0" err="1">
                 <a:solidFill>
                   <a:sysClr val="windowText" lastClr="000000"/>
                 </a:solidFill>
@@ -20295,14 +19703,14 @@
               <a:t>JavaEE</a:t>
             </a:r>
             <a:r>
-              <a:rPr lang="ko-KR" altLang="en-US" sz="1600" dirty="0" smtClean="0">
+              <a:rPr lang="ko-KR" altLang="en-US" sz="1600" dirty="0">
                 <a:solidFill>
                   <a:sysClr val="windowText" lastClr="000000"/>
                 </a:solidFill>
               </a:rPr>
               <a:t>로 변경</a:t>
             </a:r>
-            <a:endParaRPr lang="en-US" altLang="ko-KR" sz="1600" dirty="0" smtClean="0">
+            <a:endParaRPr lang="en-US" altLang="ko-KR" sz="1600" dirty="0">
               <a:solidFill>
                 <a:sysClr val="windowText" lastClr="000000"/>
               </a:solidFill>
@@ -20466,13 +19874,6 @@
   <p:clrMapOvr>
     <a:masterClrMapping/>
   </p:clrMapOvr>
-  <p:timing>
-    <p:tnLst>
-      <p:par>
-        <p:cTn id="1" dur="indefinite" restart="never" nodeType="tmRoot"/>
-      </p:par>
-    </p:tnLst>
-  </p:timing>
 </p:sld>
 </file>
 
@@ -20514,7 +19915,7 @@
           <a:lstStyle/>
           <a:p>
             <a:r>
-              <a:rPr lang="en-US" altLang="ko-KR" dirty="0" smtClean="0"/>
+              <a:rPr lang="en-US" altLang="ko-KR" dirty="0"/>
               <a:t> </a:t>
             </a:r>
             <a:r>
@@ -20522,14 +19923,13 @@
               <a:t> </a:t>
             </a:r>
             <a:r>
-              <a:rPr lang="ko-KR" altLang="en-US" dirty="0" err="1" smtClean="0"/>
+              <a:rPr lang="ko-KR" altLang="en-US" dirty="0" err="1"/>
               <a:t>인코딩</a:t>
             </a:r>
             <a:r>
-              <a:rPr lang="ko-KR" altLang="en-US" dirty="0" smtClean="0"/>
+              <a:rPr lang="ko-KR" altLang="en-US" dirty="0"/>
               <a:t> 설정</a:t>
             </a:r>
-            <a:endParaRPr lang="ko-KR" altLang="en-US" dirty="0"/>
           </a:p>
         </p:txBody>
       </p:sp>
@@ -20731,50 +20131,50 @@
               <a:buChar char="§"/>
             </a:pPr>
             <a:r>
-              <a:rPr lang="ko-KR" altLang="en-US" sz="2000" b="1" dirty="0" smtClean="0"/>
+              <a:rPr lang="ko-KR" altLang="en-US" sz="2000" b="1" dirty="0"/>
               <a:t> 텍스트 </a:t>
             </a:r>
             <a:r>
-              <a:rPr lang="ko-KR" altLang="en-US" sz="2000" b="1" dirty="0" err="1" smtClean="0"/>
+              <a:rPr lang="ko-KR" altLang="en-US" sz="2000" b="1" dirty="0" err="1"/>
               <a:t>인코딩</a:t>
             </a:r>
             <a:r>
-              <a:rPr lang="ko-KR" altLang="en-US" sz="2000" b="1" dirty="0" smtClean="0"/>
+              <a:rPr lang="ko-KR" altLang="en-US" sz="2000" b="1" dirty="0"/>
               <a:t> 설정 </a:t>
             </a:r>
             <a:r>
-              <a:rPr lang="en-US" altLang="ko-KR" sz="2000" b="1" dirty="0" smtClean="0"/>
+              <a:rPr lang="en-US" altLang="ko-KR" sz="2000" b="1" dirty="0"/>
               <a:t>– html, </a:t>
             </a:r>
             <a:r>
-              <a:rPr lang="en-US" altLang="ko-KR" sz="2000" b="1" dirty="0" err="1" smtClean="0"/>
+              <a:rPr lang="en-US" altLang="ko-KR" sz="2000" b="1" dirty="0" err="1"/>
               <a:t>css</a:t>
             </a:r>
             <a:r>
-              <a:rPr lang="en-US" altLang="ko-KR" sz="2000" b="1" dirty="0" smtClean="0"/>
+              <a:rPr lang="en-US" altLang="ko-KR" sz="2000" b="1" dirty="0"/>
               <a:t>, </a:t>
             </a:r>
             <a:r>
-              <a:rPr lang="en-US" altLang="ko-KR" sz="2000" b="1" dirty="0" err="1" smtClean="0"/>
+              <a:rPr lang="en-US" altLang="ko-KR" sz="2000" b="1" dirty="0" err="1"/>
               <a:t>jsp</a:t>
             </a:r>
             <a:r>
-              <a:rPr lang="ko-KR" altLang="en-US" sz="2000" b="1" dirty="0" smtClean="0"/>
+              <a:rPr lang="ko-KR" altLang="en-US" sz="2000" b="1" dirty="0"/>
               <a:t>의 </a:t>
             </a:r>
             <a:r>
-              <a:rPr lang="en-US" altLang="ko-KR" sz="2000" b="1" dirty="0" smtClean="0"/>
+              <a:rPr lang="en-US" altLang="ko-KR" sz="2000" b="1" dirty="0"/>
               <a:t>character </a:t>
             </a:r>
             <a:r>
-              <a:rPr lang="ko-KR" altLang="en-US" sz="2000" b="1" dirty="0" err="1" smtClean="0"/>
+              <a:rPr lang="ko-KR" altLang="en-US" sz="2000" b="1" dirty="0" err="1"/>
               <a:t>인코딩</a:t>
             </a:r>
             <a:r>
-              <a:rPr lang="ko-KR" altLang="en-US" sz="2000" b="1" dirty="0" smtClean="0"/>
+              <a:rPr lang="ko-KR" altLang="en-US" sz="2000" b="1" dirty="0"/>
               <a:t> 변경</a:t>
             </a:r>
-            <a:endParaRPr lang="en-US" altLang="ko-KR" sz="2000" b="1" dirty="0" smtClean="0"/>
+            <a:endParaRPr lang="en-US" altLang="ko-KR" sz="2000" b="1" dirty="0"/>
           </a:p>
         </p:txBody>
       </p:sp>
@@ -20801,14 +20201,13 @@
           <a:lstStyle/>
           <a:p>
             <a:r>
-              <a:rPr lang="en-US" altLang="ko-KR" sz="1600" dirty="0" smtClean="0"/>
+              <a:rPr lang="en-US" altLang="ko-KR" sz="1600" dirty="0"/>
               <a:t>Web &gt; CSS Files(HTML, JSP Files) &gt; Encoding &gt; ISO 10646/Unicode(UTF-8) </a:t>
             </a:r>
             <a:r>
-              <a:rPr lang="ko-KR" altLang="en-US" sz="1600" dirty="0" smtClean="0"/>
+              <a:rPr lang="ko-KR" altLang="en-US" sz="1600" dirty="0"/>
               <a:t> </a:t>
             </a:r>
-            <a:endParaRPr lang="ko-KR" altLang="en-US" sz="1600" dirty="0"/>
           </a:p>
         </p:txBody>
       </p:sp>
@@ -20969,13 +20368,6 @@
   <p:clrMapOvr>
     <a:masterClrMapping/>
   </p:clrMapOvr>
-  <p:timing>
-    <p:tnLst>
-      <p:par>
-        <p:cTn id="1" dur="indefinite" restart="never" nodeType="tmRoot"/>
-      </p:par>
-    </p:tnLst>
-  </p:timing>
 </p:sld>
 </file>
 
